--- a/docs/Production_Update_Presentation.pptx
+++ b/docs/Production_Update_Presentation.pptx
@@ -15,7 +15,7 @@
     <p:sldId id="263" r:id="rId9"/>
     <p:sldId id="264" r:id="rId10"/>
     <p:sldId id="265" r:id="rId11"/>
-    <p:sldId id="266" r:id="rId12"/>
+    <p:sldId id="268" r:id="rId12"/>
     <p:sldId id="267" r:id="rId13"/>
   </p:sldIdLst>
   <p:sldSz cx="12192000" cy="6858000"/>
@@ -361,6 +361,88 @@
           </a:p>
         </p:txBody>
       </p:sp>
+      <p:sp>
+        <p:nvSpPr>
+          <p:cNvPr id="7" name="hrSlideMaster.Title SlideHeader" descr="Internal                  ">
+            <a:extLst>
+              <a:ext uri="{FF2B5EF4-FFF2-40B4-BE49-F238E27FC236}">
+                <a16:creationId xmlns:a16="http://schemas.microsoft.com/office/drawing/2014/main" id="{900951C8-BEEA-033F-51EC-75F00A7DE813}"/>
+              </a:ext>
+            </a:extLst>
+          </p:cNvPr>
+          <p:cNvSpPr txBox="1"/>
+          <p:nvPr userDrawn="1"/>
+        </p:nvSpPr>
+        <p:spPr>
+          <a:xfrm>
+            <a:off x="0" y="0"/>
+            <a:ext cx="12192000" cy="261610"/>
+          </a:xfrm>
+          <a:prstGeom prst="rect">
+            <a:avLst/>
+          </a:prstGeom>
+          <a:noFill/>
+        </p:spPr>
+        <p:txBody>
+          <a:bodyPr vert="horz" rtlCol="0">
+            <a:spAutoFit/>
+          </a:bodyPr>
+          <a:lstStyle/>
+          <a:p>
+            <a:pPr algn="r"/>
+            <a:r>
+              <a:rPr lang="en-CA" sz="1100" b="1" i="0" u="none" baseline="0">
+                <a:solidFill>
+                  <a:srgbClr val="000000"/>
+                </a:solidFill>
+                <a:latin typeface="arial" panose="020B0604020202020204" pitchFamily="34" charset="0"/>
+              </a:rPr>
+              <a:t>Internal                  </a:t>
+            </a:r>
+          </a:p>
+        </p:txBody>
+      </p:sp>
+      <p:sp>
+        <p:nvSpPr>
+          <p:cNvPr id="8" name="hrTitle SlideHeader" descr="Internal                  ">
+            <a:extLst>
+              <a:ext uri="{FF2B5EF4-FFF2-40B4-BE49-F238E27FC236}">
+                <a16:creationId xmlns:a16="http://schemas.microsoft.com/office/drawing/2014/main" id="{EA7F7EBD-1FD9-D1E4-6771-CC7A6D0CFCD1}"/>
+              </a:ext>
+            </a:extLst>
+          </p:cNvPr>
+          <p:cNvSpPr txBox="1"/>
+          <p:nvPr userDrawn="1"/>
+        </p:nvSpPr>
+        <p:spPr>
+          <a:xfrm>
+            <a:off x="0" y="0"/>
+            <a:ext cx="12192000" cy="261610"/>
+          </a:xfrm>
+          <a:prstGeom prst="rect">
+            <a:avLst/>
+          </a:prstGeom>
+          <a:noFill/>
+        </p:spPr>
+        <p:txBody>
+          <a:bodyPr vert="horz" rtlCol="0">
+            <a:spAutoFit/>
+          </a:bodyPr>
+          <a:lstStyle/>
+          <a:p>
+            <a:pPr algn="r"/>
+            <a:r>
+              <a:rPr lang="en-CA" sz="1100" b="1" i="0" u="none" baseline="0">
+                <a:solidFill>
+                  <a:srgbClr val="000000"/>
+                </a:solidFill>
+                <a:latin typeface="arial" panose="020B0604020202020204" pitchFamily="34" charset="0"/>
+              </a:rPr>
+              <a:t>Internal                  </a:t>
+            </a:r>
+          </a:p>
+        </p:txBody>
+      </p:sp>
     </p:spTree>
     <p:extLst>
       <p:ext uri="{BB962C8B-B14F-4D97-AF65-F5344CB8AC3E}">
@@ -529,6 +611,47 @@
           </a:p>
         </p:txBody>
       </p:sp>
+      <p:sp>
+        <p:nvSpPr>
+          <p:cNvPr id="7" name="hrSlideMaster.Title and Vertical TextHeader" descr="Internal                  ">
+            <a:extLst>
+              <a:ext uri="{FF2B5EF4-FFF2-40B4-BE49-F238E27FC236}">
+                <a16:creationId xmlns:a16="http://schemas.microsoft.com/office/drawing/2014/main" id="{B634159D-65ED-C1F3-E92D-BCA83EE3A188}"/>
+              </a:ext>
+            </a:extLst>
+          </p:cNvPr>
+          <p:cNvSpPr txBox="1"/>
+          <p:nvPr userDrawn="1"/>
+        </p:nvSpPr>
+        <p:spPr>
+          <a:xfrm>
+            <a:off x="0" y="0"/>
+            <a:ext cx="12192000" cy="261610"/>
+          </a:xfrm>
+          <a:prstGeom prst="rect">
+            <a:avLst/>
+          </a:prstGeom>
+          <a:noFill/>
+        </p:spPr>
+        <p:txBody>
+          <a:bodyPr vert="horz" rtlCol="0">
+            <a:spAutoFit/>
+          </a:bodyPr>
+          <a:lstStyle/>
+          <a:p>
+            <a:pPr algn="r"/>
+            <a:r>
+              <a:rPr lang="en-CA" sz="1100" b="1" i="0" u="none" baseline="0">
+                <a:solidFill>
+                  <a:srgbClr val="000000"/>
+                </a:solidFill>
+                <a:latin typeface="arial" panose="020B0604020202020204" pitchFamily="34" charset="0"/>
+              </a:rPr>
+              <a:t>Internal                  </a:t>
+            </a:r>
+          </a:p>
+        </p:txBody>
+      </p:sp>
     </p:spTree>
     <p:extLst>
       <p:ext uri="{BB962C8B-B14F-4D97-AF65-F5344CB8AC3E}">
@@ -707,6 +830,47 @@
           </a:p>
         </p:txBody>
       </p:sp>
+      <p:sp>
+        <p:nvSpPr>
+          <p:cNvPr id="7" name="hrSlideMaster.Vertical Title and TextHeader" descr="Internal                  ">
+            <a:extLst>
+              <a:ext uri="{FF2B5EF4-FFF2-40B4-BE49-F238E27FC236}">
+                <a16:creationId xmlns:a16="http://schemas.microsoft.com/office/drawing/2014/main" id="{AA208673-137C-EF1E-5A2B-894DA7FBC052}"/>
+              </a:ext>
+            </a:extLst>
+          </p:cNvPr>
+          <p:cNvSpPr txBox="1"/>
+          <p:nvPr userDrawn="1"/>
+        </p:nvSpPr>
+        <p:spPr>
+          <a:xfrm>
+            <a:off x="0" y="0"/>
+            <a:ext cx="12192000" cy="261610"/>
+          </a:xfrm>
+          <a:prstGeom prst="rect">
+            <a:avLst/>
+          </a:prstGeom>
+          <a:noFill/>
+        </p:spPr>
+        <p:txBody>
+          <a:bodyPr vert="horz" rtlCol="0">
+            <a:spAutoFit/>
+          </a:bodyPr>
+          <a:lstStyle/>
+          <a:p>
+            <a:pPr algn="r"/>
+            <a:r>
+              <a:rPr lang="en-CA" sz="1100" b="1" i="0" u="none" baseline="0">
+                <a:solidFill>
+                  <a:srgbClr val="000000"/>
+                </a:solidFill>
+                <a:latin typeface="arial" panose="020B0604020202020204" pitchFamily="34" charset="0"/>
+              </a:rPr>
+              <a:t>Internal                  </a:t>
+            </a:r>
+          </a:p>
+        </p:txBody>
+      </p:sp>
     </p:spTree>
     <p:extLst>
       <p:ext uri="{BB962C8B-B14F-4D97-AF65-F5344CB8AC3E}">
@@ -875,6 +1039,47 @@
           </a:p>
         </p:txBody>
       </p:sp>
+      <p:sp>
+        <p:nvSpPr>
+          <p:cNvPr id="7" name="hrSlideMaster.Title and ContentHeader" descr="Internal                  ">
+            <a:extLst>
+              <a:ext uri="{FF2B5EF4-FFF2-40B4-BE49-F238E27FC236}">
+                <a16:creationId xmlns:a16="http://schemas.microsoft.com/office/drawing/2014/main" id="{80336BD5-92C9-9E7F-0C63-C7B078D8C668}"/>
+              </a:ext>
+            </a:extLst>
+          </p:cNvPr>
+          <p:cNvSpPr txBox="1"/>
+          <p:nvPr userDrawn="1"/>
+        </p:nvSpPr>
+        <p:spPr>
+          <a:xfrm>
+            <a:off x="0" y="0"/>
+            <a:ext cx="12192000" cy="261610"/>
+          </a:xfrm>
+          <a:prstGeom prst="rect">
+            <a:avLst/>
+          </a:prstGeom>
+          <a:noFill/>
+        </p:spPr>
+        <p:txBody>
+          <a:bodyPr vert="horz" rtlCol="0">
+            <a:spAutoFit/>
+          </a:bodyPr>
+          <a:lstStyle/>
+          <a:p>
+            <a:pPr algn="r"/>
+            <a:r>
+              <a:rPr lang="en-CA" sz="1100" b="1" i="0" u="none" baseline="0">
+                <a:solidFill>
+                  <a:srgbClr val="000000"/>
+                </a:solidFill>
+                <a:latin typeface="arial" panose="020B0604020202020204" pitchFamily="34" charset="0"/>
+              </a:rPr>
+              <a:t>Internal                  </a:t>
+            </a:r>
+          </a:p>
+        </p:txBody>
+      </p:sp>
     </p:spTree>
     <p:extLst>
       <p:ext uri="{BB962C8B-B14F-4D97-AF65-F5344CB8AC3E}">
@@ -1120,6 +1325,47 @@
           </a:p>
         </p:txBody>
       </p:sp>
+      <p:sp>
+        <p:nvSpPr>
+          <p:cNvPr id="7" name="hrSlideMaster.Section HeaderHeader" descr="Internal                  ">
+            <a:extLst>
+              <a:ext uri="{FF2B5EF4-FFF2-40B4-BE49-F238E27FC236}">
+                <a16:creationId xmlns:a16="http://schemas.microsoft.com/office/drawing/2014/main" id="{67E34B0F-FFF0-A5DD-05BD-8AA7A38F15F8}"/>
+              </a:ext>
+            </a:extLst>
+          </p:cNvPr>
+          <p:cNvSpPr txBox="1"/>
+          <p:nvPr userDrawn="1"/>
+        </p:nvSpPr>
+        <p:spPr>
+          <a:xfrm>
+            <a:off x="0" y="0"/>
+            <a:ext cx="12192000" cy="261610"/>
+          </a:xfrm>
+          <a:prstGeom prst="rect">
+            <a:avLst/>
+          </a:prstGeom>
+          <a:noFill/>
+        </p:spPr>
+        <p:txBody>
+          <a:bodyPr vert="horz" rtlCol="0">
+            <a:spAutoFit/>
+          </a:bodyPr>
+          <a:lstStyle/>
+          <a:p>
+            <a:pPr algn="r"/>
+            <a:r>
+              <a:rPr lang="en-CA" sz="1100" b="1" i="0" u="none" baseline="0">
+                <a:solidFill>
+                  <a:srgbClr val="000000"/>
+                </a:solidFill>
+                <a:latin typeface="arial" panose="020B0604020202020204" pitchFamily="34" charset="0"/>
+              </a:rPr>
+              <a:t>Internal                  </a:t>
+            </a:r>
+          </a:p>
+        </p:txBody>
+      </p:sp>
     </p:spTree>
     <p:extLst>
       <p:ext uri="{BB962C8B-B14F-4D97-AF65-F5344CB8AC3E}">
@@ -1402,6 +1648,47 @@
               <a:t>‹#›</a:t>
             </a:fld>
             <a:endParaRPr lang="en-US"/>
+          </a:p>
+        </p:txBody>
+      </p:sp>
+      <p:sp>
+        <p:nvSpPr>
+          <p:cNvPr id="8" name="hrSlideMaster.Two ContentHeader" descr="Internal                  ">
+            <a:extLst>
+              <a:ext uri="{FF2B5EF4-FFF2-40B4-BE49-F238E27FC236}">
+                <a16:creationId xmlns:a16="http://schemas.microsoft.com/office/drawing/2014/main" id="{544F7E7C-12C1-5DEB-49B5-9041DE2CF6E3}"/>
+              </a:ext>
+            </a:extLst>
+          </p:cNvPr>
+          <p:cNvSpPr txBox="1"/>
+          <p:nvPr userDrawn="1"/>
+        </p:nvSpPr>
+        <p:spPr>
+          <a:xfrm>
+            <a:off x="0" y="0"/>
+            <a:ext cx="12192000" cy="261610"/>
+          </a:xfrm>
+          <a:prstGeom prst="rect">
+            <a:avLst/>
+          </a:prstGeom>
+          <a:noFill/>
+        </p:spPr>
+        <p:txBody>
+          <a:bodyPr vert="horz" rtlCol="0">
+            <a:spAutoFit/>
+          </a:bodyPr>
+          <a:lstStyle/>
+          <a:p>
+            <a:pPr algn="r"/>
+            <a:r>
+              <a:rPr lang="en-CA" sz="1100" b="1" i="0" u="none" baseline="0">
+                <a:solidFill>
+                  <a:srgbClr val="000000"/>
+                </a:solidFill>
+                <a:latin typeface="arial" panose="020B0604020202020204" pitchFamily="34" charset="0"/>
+              </a:rPr>
+              <a:t>Internal                  </a:t>
+            </a:r>
           </a:p>
         </p:txBody>
       </p:sp>
@@ -1824,6 +2111,47 @@
           </a:p>
         </p:txBody>
       </p:sp>
+      <p:sp>
+        <p:nvSpPr>
+          <p:cNvPr id="10" name="hrSlideMaster.ComparisonHeader" descr="Internal                  ">
+            <a:extLst>
+              <a:ext uri="{FF2B5EF4-FFF2-40B4-BE49-F238E27FC236}">
+                <a16:creationId xmlns:a16="http://schemas.microsoft.com/office/drawing/2014/main" id="{154E265A-447D-7649-5B42-4B42C0CA0FF0}"/>
+              </a:ext>
+            </a:extLst>
+          </p:cNvPr>
+          <p:cNvSpPr txBox="1"/>
+          <p:nvPr userDrawn="1"/>
+        </p:nvSpPr>
+        <p:spPr>
+          <a:xfrm>
+            <a:off x="0" y="0"/>
+            <a:ext cx="12192000" cy="261610"/>
+          </a:xfrm>
+          <a:prstGeom prst="rect">
+            <a:avLst/>
+          </a:prstGeom>
+          <a:noFill/>
+        </p:spPr>
+        <p:txBody>
+          <a:bodyPr vert="horz" rtlCol="0">
+            <a:spAutoFit/>
+          </a:bodyPr>
+          <a:lstStyle/>
+          <a:p>
+            <a:pPr algn="r"/>
+            <a:r>
+              <a:rPr lang="en-CA" sz="1100" b="1" i="0" u="none" baseline="0">
+                <a:solidFill>
+                  <a:srgbClr val="000000"/>
+                </a:solidFill>
+                <a:latin typeface="arial" panose="020B0604020202020204" pitchFamily="34" charset="0"/>
+              </a:rPr>
+              <a:t>Internal                  </a:t>
+            </a:r>
+          </a:p>
+        </p:txBody>
+      </p:sp>
     </p:spTree>
     <p:extLst>
       <p:ext uri="{BB962C8B-B14F-4D97-AF65-F5344CB8AC3E}">
@@ -1941,6 +2269,47 @@
           </a:p>
         </p:txBody>
       </p:sp>
+      <p:sp>
+        <p:nvSpPr>
+          <p:cNvPr id="6" name="hrSlideMaster.Title OnlyHeader" descr="Internal                  ">
+            <a:extLst>
+              <a:ext uri="{FF2B5EF4-FFF2-40B4-BE49-F238E27FC236}">
+                <a16:creationId xmlns:a16="http://schemas.microsoft.com/office/drawing/2014/main" id="{2DAECFF7-A007-D1F2-92BB-1961B5112189}"/>
+              </a:ext>
+            </a:extLst>
+          </p:cNvPr>
+          <p:cNvSpPr txBox="1"/>
+          <p:nvPr userDrawn="1"/>
+        </p:nvSpPr>
+        <p:spPr>
+          <a:xfrm>
+            <a:off x="0" y="0"/>
+            <a:ext cx="12192000" cy="261610"/>
+          </a:xfrm>
+          <a:prstGeom prst="rect">
+            <a:avLst/>
+          </a:prstGeom>
+          <a:noFill/>
+        </p:spPr>
+        <p:txBody>
+          <a:bodyPr vert="horz" rtlCol="0">
+            <a:spAutoFit/>
+          </a:bodyPr>
+          <a:lstStyle/>
+          <a:p>
+            <a:pPr algn="r"/>
+            <a:r>
+              <a:rPr lang="en-CA" sz="1100" b="1" i="0" u="none" baseline="0">
+                <a:solidFill>
+                  <a:srgbClr val="000000"/>
+                </a:solidFill>
+                <a:latin typeface="arial" panose="020B0604020202020204" pitchFamily="34" charset="0"/>
+              </a:rPr>
+              <a:t>Internal                  </a:t>
+            </a:r>
+          </a:p>
+        </p:txBody>
+      </p:sp>
     </p:spTree>
     <p:extLst>
       <p:ext uri="{BB962C8B-B14F-4D97-AF65-F5344CB8AC3E}">
@@ -2033,6 +2402,47 @@
               <a:t>‹#›</a:t>
             </a:fld>
             <a:endParaRPr lang="en-US"/>
+          </a:p>
+        </p:txBody>
+      </p:sp>
+      <p:sp>
+        <p:nvSpPr>
+          <p:cNvPr id="5" name="hrSlideMaster.BlankHeader" descr="Internal                  ">
+            <a:extLst>
+              <a:ext uri="{FF2B5EF4-FFF2-40B4-BE49-F238E27FC236}">
+                <a16:creationId xmlns:a16="http://schemas.microsoft.com/office/drawing/2014/main" id="{F232DB96-F244-7353-4A5C-32072DAD2337}"/>
+              </a:ext>
+            </a:extLst>
+          </p:cNvPr>
+          <p:cNvSpPr txBox="1"/>
+          <p:nvPr userDrawn="1"/>
+        </p:nvSpPr>
+        <p:spPr>
+          <a:xfrm>
+            <a:off x="0" y="0"/>
+            <a:ext cx="12192000" cy="261610"/>
+          </a:xfrm>
+          <a:prstGeom prst="rect">
+            <a:avLst/>
+          </a:prstGeom>
+          <a:noFill/>
+        </p:spPr>
+        <p:txBody>
+          <a:bodyPr vert="horz" rtlCol="0">
+            <a:spAutoFit/>
+          </a:bodyPr>
+          <a:lstStyle/>
+          <a:p>
+            <a:pPr algn="r"/>
+            <a:r>
+              <a:rPr lang="en-CA" sz="1100" b="1" i="0" u="none" baseline="0">
+                <a:solidFill>
+                  <a:srgbClr val="000000"/>
+                </a:solidFill>
+                <a:latin typeface="arial" panose="020B0604020202020204" pitchFamily="34" charset="0"/>
+              </a:rPr>
+              <a:t>Internal                  </a:t>
+            </a:r>
           </a:p>
         </p:txBody>
       </p:sp>
@@ -2311,6 +2721,47 @@
           </a:p>
         </p:txBody>
       </p:sp>
+      <p:sp>
+        <p:nvSpPr>
+          <p:cNvPr id="8" name="hrSlideMaster.Content with CaptionHeader" descr="Internal                  ">
+            <a:extLst>
+              <a:ext uri="{FF2B5EF4-FFF2-40B4-BE49-F238E27FC236}">
+                <a16:creationId xmlns:a16="http://schemas.microsoft.com/office/drawing/2014/main" id="{2B4E1760-5D6E-5994-E8B5-E31643C905E8}"/>
+              </a:ext>
+            </a:extLst>
+          </p:cNvPr>
+          <p:cNvSpPr txBox="1"/>
+          <p:nvPr userDrawn="1"/>
+        </p:nvSpPr>
+        <p:spPr>
+          <a:xfrm>
+            <a:off x="0" y="0"/>
+            <a:ext cx="12192000" cy="261610"/>
+          </a:xfrm>
+          <a:prstGeom prst="rect">
+            <a:avLst/>
+          </a:prstGeom>
+          <a:noFill/>
+        </p:spPr>
+        <p:txBody>
+          <a:bodyPr vert="horz" rtlCol="0">
+            <a:spAutoFit/>
+          </a:bodyPr>
+          <a:lstStyle/>
+          <a:p>
+            <a:pPr algn="r"/>
+            <a:r>
+              <a:rPr lang="en-CA" sz="1100" b="1" i="0" u="none" baseline="0">
+                <a:solidFill>
+                  <a:srgbClr val="000000"/>
+                </a:solidFill>
+                <a:latin typeface="arial" panose="020B0604020202020204" pitchFamily="34" charset="0"/>
+              </a:rPr>
+              <a:t>Internal                  </a:t>
+            </a:r>
+          </a:p>
+        </p:txBody>
+      </p:sp>
     </p:spTree>
     <p:extLst>
       <p:ext uri="{BB962C8B-B14F-4D97-AF65-F5344CB8AC3E}">
@@ -2560,6 +3011,47 @@
               <a:t>‹#›</a:t>
             </a:fld>
             <a:endParaRPr lang="en-US"/>
+          </a:p>
+        </p:txBody>
+      </p:sp>
+      <p:sp>
+        <p:nvSpPr>
+          <p:cNvPr id="8" name="hrSlideMaster.Picture with CaptionHeader" descr="Internal                  ">
+            <a:extLst>
+              <a:ext uri="{FF2B5EF4-FFF2-40B4-BE49-F238E27FC236}">
+                <a16:creationId xmlns:a16="http://schemas.microsoft.com/office/drawing/2014/main" id="{263E9EF4-2395-76F6-CE1A-5BE44345AE5B}"/>
+              </a:ext>
+            </a:extLst>
+          </p:cNvPr>
+          <p:cNvSpPr txBox="1"/>
+          <p:nvPr userDrawn="1"/>
+        </p:nvSpPr>
+        <p:spPr>
+          <a:xfrm>
+            <a:off x="0" y="0"/>
+            <a:ext cx="12192000" cy="261610"/>
+          </a:xfrm>
+          <a:prstGeom prst="rect">
+            <a:avLst/>
+          </a:prstGeom>
+          <a:noFill/>
+        </p:spPr>
+        <p:txBody>
+          <a:bodyPr vert="horz" rtlCol="0">
+            <a:spAutoFit/>
+          </a:bodyPr>
+          <a:lstStyle/>
+          <a:p>
+            <a:pPr algn="r"/>
+            <a:r>
+              <a:rPr lang="en-CA" sz="1100" b="1" i="0" u="none" baseline="0">
+                <a:solidFill>
+                  <a:srgbClr val="000000"/>
+                </a:solidFill>
+                <a:latin typeface="arial" panose="020B0604020202020204" pitchFamily="34" charset="0"/>
+              </a:rPr>
+              <a:t>Internal                  </a:t>
+            </a:r>
           </a:p>
         </p:txBody>
       </p:sp>
@@ -3343,14 +3835,20 @@
       </p:sp>
       <p:sp>
         <p:nvSpPr>
-          <p:cNvPr id="8" name="TextBox 7"/>
-          <p:cNvSpPr txBox="1"/>
-          <p:nvPr/>
-        </p:nvSpPr>
-        <p:spPr>
-          <a:xfrm>
-            <a:off x="868680" y="6263640"/>
-            <a:ext cx="5486400" cy="365760"/>
+          <p:cNvPr id="10" name="TextBox 9">
+            <a:extLst>
+              <a:ext uri="{FF2B5EF4-FFF2-40B4-BE49-F238E27FC236}">
+                <a16:creationId xmlns:a16="http://schemas.microsoft.com/office/drawing/2014/main" id="{A5B31D82-5914-4D04-C1D5-01D560257BF5}"/>
+              </a:ext>
+            </a:extLst>
+          </p:cNvPr>
+          <p:cNvSpPr txBox="1"/>
+          <p:nvPr/>
+        </p:nvSpPr>
+        <p:spPr>
+          <a:xfrm>
+            <a:off x="868680" y="6483876"/>
+            <a:ext cx="4082448" cy="384721"/>
           </a:xfrm>
           <a:prstGeom prst="rect">
             <a:avLst/>
@@ -3363,51 +3861,41 @@
           </a:bodyPr>
           <a:lstStyle/>
           <a:p>
+            <a:r>
+              <a:rPr lang="en-CA" sz="1500" b="0" i="0" dirty="0" err="1">
+                <a:solidFill>
+                  <a:srgbClr val="92D050"/>
+                </a:solidFill>
+                <a:latin typeface="Calibri"/>
+              </a:rPr>
+              <a:t>Adobel</a:t>
+            </a:r>
+            <a:r>
+              <a:rPr lang="en-CA" sz="1500" b="0" i="0" dirty="0">
+                <a:solidFill>
+                  <a:srgbClr val="92D050"/>
+                </a:solidFill>
+                <a:latin typeface="Calibri"/>
+              </a:rPr>
+              <a:t> Services Inc </a:t>
+            </a:r>
+            <a:r>
+              <a:rPr lang="en-CA" sz="1500" dirty="0">
+                <a:solidFill>
+                  <a:srgbClr val="92D050"/>
+                </a:solidFill>
+              </a:rPr>
+              <a:t>©</a:t>
+            </a:r>
+          </a:p>
+          <a:p>
             <a:pPr algn="l"/>
-            <a:r>
-              <a:rPr sz="1200" b="1" i="0">
-                <a:solidFill>
-                  <a:srgbClr val="82BC3F"/>
-                </a:solidFill>
-                <a:latin typeface="Calibri"/>
-              </a:rPr>
-              <a:t>PACIFIC CANBRIAM ENERGY</a:t>
-            </a:r>
-          </a:p>
-        </p:txBody>
-      </p:sp>
-      <p:sp>
-        <p:nvSpPr>
-          <p:cNvPr id="9" name="TextBox 8"/>
-          <p:cNvSpPr txBox="1"/>
-          <p:nvPr/>
-        </p:nvSpPr>
-        <p:spPr>
-          <a:xfrm>
-            <a:off x="6400800" y="6263640"/>
-            <a:ext cx="4937760" cy="365760"/>
-          </a:xfrm>
-          <a:prstGeom prst="rect">
-            <a:avLst/>
-          </a:prstGeom>
-          <a:noFill/>
-        </p:spPr>
-        <p:txBody>
-          <a:bodyPr wrap="square" lIns="0" tIns="0" rIns="0" bIns="0" anchor="t">
-            <a:spAutoFit/>
-          </a:bodyPr>
-          <a:lstStyle/>
-          <a:p>
-            <a:pPr algn="r"/>
-            <a:r>
-              <a:rPr sz="1200" b="0" i="0">
-                <a:solidFill>
-                  <a:srgbClr val="FFFFFF"/>
-                </a:solidFill>
-                <a:latin typeface="Calibri"/>
-              </a:rPr>
-              <a:t>Engineering Overview · 2026</a:t>
-            </a:r>
+            <a:endParaRPr sz="1000" b="0" i="0" dirty="0">
+              <a:solidFill>
+                <a:srgbClr val="6B7280"/>
+              </a:solidFill>
+              <a:latin typeface="Calibri"/>
+            </a:endParaRPr>
           </a:p>
         </p:txBody>
       </p:sp>
@@ -3438,51 +3926,6 @@
       </p:grpSpPr>
       <p:sp>
         <p:nvSpPr>
-          <p:cNvPr id="2" name="Rectangle 1"/>
-          <p:cNvSpPr/>
-          <p:nvPr/>
-        </p:nvSpPr>
-        <p:spPr>
-          <a:xfrm>
-            <a:off x="0" y="0"/>
-            <a:ext cx="12191695" cy="6858000"/>
-          </a:xfrm>
-          <a:prstGeom prst="rect">
-            <a:avLst/>
-          </a:prstGeom>
-          <a:solidFill>
-            <a:srgbClr val="FFFFFF"/>
-          </a:solidFill>
-          <a:ln>
-            <a:noFill/>
-          </a:ln>
-          <a:effectLst/>
-        </p:spPr>
-        <p:style>
-          <a:lnRef idx="1">
-            <a:schemeClr val="accent1"/>
-          </a:lnRef>
-          <a:fillRef idx="3">
-            <a:schemeClr val="accent1"/>
-          </a:fillRef>
-          <a:effectRef idx="2">
-            <a:schemeClr val="accent1"/>
-          </a:effectRef>
-          <a:fontRef idx="minor">
-            <a:schemeClr val="lt1"/>
-          </a:fontRef>
-        </p:style>
-        <p:txBody>
-          <a:bodyPr rtlCol="0" anchor="ctr"/>
-          <a:lstStyle/>
-          <a:p>
-            <a:pPr algn="ctr"/>
-            <a:endParaRPr/>
-          </a:p>
-        </p:txBody>
-      </p:sp>
-      <p:sp>
-        <p:nvSpPr>
           <p:cNvPr id="3" name="Rectangle 2"/>
           <p:cNvSpPr/>
           <p:nvPr/>
@@ -3808,7 +4251,7 @@
         </p:nvSpPr>
         <p:spPr>
           <a:xfrm>
-            <a:off x="804672" y="1828800"/>
+            <a:off x="804672" y="1869186"/>
             <a:ext cx="5230368" cy="457200"/>
           </a:xfrm>
           <a:prstGeom prst="rect">
@@ -3831,7 +4274,7 @@
               </a:spcAft>
             </a:pPr>
             <a:r>
-              <a:rPr sz="1600" b="1" i="0">
+              <a:rPr sz="1600" b="1" i="0" dirty="0">
                 <a:solidFill>
                   <a:srgbClr val="1F2937"/>
                 </a:solidFill>
@@ -3894,7 +4337,7 @@
         </p:nvSpPr>
         <p:spPr>
           <a:xfrm>
-            <a:off x="804672" y="2286000"/>
+            <a:off x="804672" y="2340864"/>
             <a:ext cx="5230368" cy="457200"/>
           </a:xfrm>
           <a:prstGeom prst="rect">
@@ -3917,7 +4360,7 @@
               </a:spcAft>
             </a:pPr>
             <a:r>
-              <a:rPr sz="1600" b="1" i="0">
+              <a:rPr sz="1600" b="1" i="0" dirty="0">
                 <a:solidFill>
                   <a:srgbClr val="1F2937"/>
                 </a:solidFill>
@@ -3980,7 +4423,7 @@
         </p:nvSpPr>
         <p:spPr>
           <a:xfrm>
-            <a:off x="804672" y="2743200"/>
+            <a:off x="804672" y="2807208"/>
             <a:ext cx="5230368" cy="457200"/>
           </a:xfrm>
           <a:prstGeom prst="rect">
@@ -4003,7 +4446,7 @@
               </a:spcAft>
             </a:pPr>
             <a:r>
-              <a:rPr sz="1600" b="1" i="0">
+              <a:rPr sz="1600" b="1" i="0" dirty="0">
                 <a:solidFill>
                   <a:srgbClr val="1F2937"/>
                 </a:solidFill>
@@ -4066,7 +4509,7 @@
         </p:nvSpPr>
         <p:spPr>
           <a:xfrm>
-            <a:off x="804672" y="3200400"/>
+            <a:off x="804672" y="3273552"/>
             <a:ext cx="5230368" cy="457200"/>
           </a:xfrm>
           <a:prstGeom prst="rect">
@@ -4089,7 +4532,7 @@
               </a:spcAft>
             </a:pPr>
             <a:r>
-              <a:rPr sz="1600" b="1" i="0">
+              <a:rPr sz="1600" b="1" i="0" dirty="0">
                 <a:solidFill>
                   <a:srgbClr val="1F2937"/>
                 </a:solidFill>
@@ -4152,7 +4595,7 @@
         </p:nvSpPr>
         <p:spPr>
           <a:xfrm>
-            <a:off x="6656832" y="1828800"/>
+            <a:off x="6656832" y="1883664"/>
             <a:ext cx="5230368" cy="457200"/>
           </a:xfrm>
           <a:prstGeom prst="rect">
@@ -4175,7 +4618,7 @@
               </a:spcAft>
             </a:pPr>
             <a:r>
-              <a:rPr sz="1600" b="1" i="0">
+              <a:rPr sz="1600" b="1" i="0" dirty="0">
                 <a:solidFill>
                   <a:srgbClr val="1F2937"/>
                 </a:solidFill>
@@ -4238,8 +4681,8 @@
         </p:nvSpPr>
         <p:spPr>
           <a:xfrm>
-            <a:off x="6656832" y="2286000"/>
-            <a:ext cx="5230368" cy="457200"/>
+            <a:off x="6656832" y="2318548"/>
+            <a:ext cx="5230368" cy="275717"/>
           </a:xfrm>
           <a:prstGeom prst="rect">
             <a:avLst/>
@@ -4261,13 +4704,31 @@
               </a:spcAft>
             </a:pPr>
             <a:r>
-              <a:rPr sz="1600" b="1" i="0">
+              <a:rPr sz="1600" b="1" i="0" dirty="0">
                 <a:solidFill>
                   <a:srgbClr val="1F2937"/>
                 </a:solidFill>
                 <a:latin typeface="Calibri"/>
               </a:rPr>
-              <a:t>Type-curve and YE2 rows protected during rebuilds</a:t>
+              <a:t>Type-curve</a:t>
+            </a:r>
+            <a:r>
+              <a:rPr lang="en-CA" sz="1600" b="1" i="0" dirty="0">
+                <a:solidFill>
+                  <a:srgbClr val="1F2937"/>
+                </a:solidFill>
+                <a:latin typeface="Calibri"/>
+              </a:rPr>
+              <a:t>s are </a:t>
+            </a:r>
+            <a:r>
+              <a:rPr sz="1600" b="1" i="0" dirty="0">
+                <a:solidFill>
+                  <a:srgbClr val="1F2937"/>
+                </a:solidFill>
+                <a:latin typeface="Calibri"/>
+              </a:rPr>
+              <a:t>protected during rebuilds</a:t>
             </a:r>
           </a:p>
         </p:txBody>
@@ -4324,7 +4785,7 @@
         </p:nvSpPr>
         <p:spPr>
           <a:xfrm>
-            <a:off x="6656832" y="2743200"/>
+            <a:off x="6656832" y="2808297"/>
             <a:ext cx="5230368" cy="457200"/>
           </a:xfrm>
           <a:prstGeom prst="rect">
@@ -4347,7 +4808,7 @@
               </a:spcAft>
             </a:pPr>
             <a:r>
-              <a:rPr sz="1600" b="1" i="0">
+              <a:rPr sz="1600" b="1" i="0" dirty="0">
                 <a:solidFill>
                   <a:srgbClr val="1F2937"/>
                 </a:solidFill>
@@ -4410,7 +4871,7 @@
         </p:nvSpPr>
         <p:spPr>
           <a:xfrm>
-            <a:off x="6656832" y="3200400"/>
+            <a:off x="6656832" y="3265497"/>
             <a:ext cx="5230368" cy="457200"/>
           </a:xfrm>
           <a:prstGeom prst="rect">
@@ -4433,7 +4894,7 @@
               </a:spcAft>
             </a:pPr>
             <a:r>
-              <a:rPr sz="1600" b="1" i="0">
+              <a:rPr sz="1600" b="1" i="0" dirty="0">
                 <a:solidFill>
                   <a:srgbClr val="1F2937"/>
                 </a:solidFill>
@@ -4521,6 +4982,74 @@
               </a:rPr>
               <a:t>If something goes wrong, you can read the log and reproduce the result.</a:t>
             </a:r>
+          </a:p>
+        </p:txBody>
+      </p:sp>
+      <p:sp>
+        <p:nvSpPr>
+          <p:cNvPr id="28" name="TextBox 27">
+            <a:extLst>
+              <a:ext uri="{FF2B5EF4-FFF2-40B4-BE49-F238E27FC236}">
+                <a16:creationId xmlns:a16="http://schemas.microsoft.com/office/drawing/2014/main" id="{CB17A9C5-2F64-81C7-CDAF-78B04F98D503}"/>
+              </a:ext>
+            </a:extLst>
+          </p:cNvPr>
+          <p:cNvSpPr txBox="1"/>
+          <p:nvPr/>
+        </p:nvSpPr>
+        <p:spPr>
+          <a:xfrm>
+            <a:off x="10600509" y="6605468"/>
+            <a:ext cx="4082448" cy="338554"/>
+          </a:xfrm>
+          <a:prstGeom prst="rect">
+            <a:avLst/>
+          </a:prstGeom>
+          <a:noFill/>
+        </p:spPr>
+        <p:txBody>
+          <a:bodyPr wrap="square" lIns="0" tIns="0" rIns="0" bIns="0" anchor="t">
+            <a:spAutoFit/>
+          </a:bodyPr>
+          <a:lstStyle/>
+          <a:p>
+            <a:r>
+              <a:rPr lang="en-CA" sz="1200" b="0" i="0" dirty="0" err="1">
+                <a:solidFill>
+                  <a:srgbClr val="6B7280"/>
+                </a:solidFill>
+                <a:latin typeface="Calibri"/>
+              </a:rPr>
+              <a:t>Adobel</a:t>
+            </a:r>
+            <a:r>
+              <a:rPr lang="en-CA" sz="1200" b="0" i="0" dirty="0">
+                <a:solidFill>
+                  <a:srgbClr val="6B7280"/>
+                </a:solidFill>
+                <a:latin typeface="Calibri"/>
+              </a:rPr>
+              <a:t> Services Inc </a:t>
+            </a:r>
+            <a:r>
+              <a:rPr lang="en-CA" sz="1200" dirty="0">
+                <a:solidFill>
+                  <a:schemeClr val="bg1">
+                    <a:lumMod val="50000"/>
+                  </a:schemeClr>
+                </a:solidFill>
+              </a:rPr>
+              <a:t>©</a:t>
+            </a:r>
+          </a:p>
+          <a:p>
+            <a:pPr algn="l"/>
+            <a:endParaRPr sz="1000" b="0" i="0" dirty="0">
+              <a:solidFill>
+                <a:srgbClr val="6B7280"/>
+              </a:solidFill>
+              <a:latin typeface="Calibri"/>
+            </a:endParaRPr>
           </a:p>
         </p:txBody>
       </p:sp>
@@ -4537,7 +5066,13 @@
   <p:cSld>
     <p:spTree>
       <p:nvGrpSpPr>
-        <p:cNvPr id="1" name=""/>
+        <p:cNvPr id="1" name="">
+          <a:extLst>
+            <a:ext uri="{FF2B5EF4-FFF2-40B4-BE49-F238E27FC236}">
+              <a16:creationId xmlns:a16="http://schemas.microsoft.com/office/drawing/2014/main" id="{466A946D-67F0-72E5-1BB2-DE0387CB62E9}"/>
+            </a:ext>
+          </a:extLst>
+        </p:cNvPr>
         <p:cNvGrpSpPr/>
         <p:nvPr/>
       </p:nvGrpSpPr>
@@ -4551,52 +5086,13 @@
       </p:grpSpPr>
       <p:sp>
         <p:nvSpPr>
-          <p:cNvPr id="2" name="Rectangle 1"/>
-          <p:cNvSpPr/>
-          <p:nvPr/>
-        </p:nvSpPr>
-        <p:spPr>
-          <a:xfrm>
-            <a:off x="0" y="0"/>
-            <a:ext cx="12191695" cy="6858000"/>
-          </a:xfrm>
-          <a:prstGeom prst="rect">
-            <a:avLst/>
-          </a:prstGeom>
-          <a:solidFill>
-            <a:srgbClr val="FFFFFF"/>
-          </a:solidFill>
-          <a:ln>
-            <a:noFill/>
-          </a:ln>
-          <a:effectLst/>
-        </p:spPr>
-        <p:style>
-          <a:lnRef idx="1">
-            <a:schemeClr val="accent1"/>
-          </a:lnRef>
-          <a:fillRef idx="3">
-            <a:schemeClr val="accent1"/>
-          </a:fillRef>
-          <a:effectRef idx="2">
-            <a:schemeClr val="accent1"/>
-          </a:effectRef>
-          <a:fontRef idx="minor">
-            <a:schemeClr val="lt1"/>
-          </a:fontRef>
-        </p:style>
-        <p:txBody>
-          <a:bodyPr rtlCol="0" anchor="ctr"/>
-          <a:lstStyle/>
-          <a:p>
-            <a:pPr algn="ctr"/>
-            <a:endParaRPr/>
-          </a:p>
-        </p:txBody>
-      </p:sp>
-      <p:sp>
-        <p:nvSpPr>
-          <p:cNvPr id="3" name="Rectangle 2"/>
+          <p:cNvPr id="3" name="Rectangle 2">
+            <a:extLst>
+              <a:ext uri="{FF2B5EF4-FFF2-40B4-BE49-F238E27FC236}">
+                <a16:creationId xmlns:a16="http://schemas.microsoft.com/office/drawing/2014/main" id="{2DC183D8-7447-FE6B-D688-3214949E1751}"/>
+              </a:ext>
+            </a:extLst>
+          </p:cNvPr>
           <p:cNvSpPr/>
           <p:nvPr/>
         </p:nvSpPr>
@@ -4641,7 +5137,13 @@
       </p:sp>
       <p:sp>
         <p:nvSpPr>
-          <p:cNvPr id="4" name="Rectangle 3"/>
+          <p:cNvPr id="4" name="Rectangle 3">
+            <a:extLst>
+              <a:ext uri="{FF2B5EF4-FFF2-40B4-BE49-F238E27FC236}">
+                <a16:creationId xmlns:a16="http://schemas.microsoft.com/office/drawing/2014/main" id="{D60A046C-EBE8-164B-A872-08883A991FD4}"/>
+              </a:ext>
+            </a:extLst>
+          </p:cNvPr>
           <p:cNvSpPr/>
           <p:nvPr/>
         </p:nvSpPr>
@@ -4686,7 +5188,13 @@
       </p:sp>
       <p:sp>
         <p:nvSpPr>
-          <p:cNvPr id="5" name="TextBox 4"/>
+          <p:cNvPr id="5" name="TextBox 4">
+            <a:extLst>
+              <a:ext uri="{FF2B5EF4-FFF2-40B4-BE49-F238E27FC236}">
+                <a16:creationId xmlns:a16="http://schemas.microsoft.com/office/drawing/2014/main" id="{11E6A479-85D0-B8D5-F851-7CF08CD3EAA7}"/>
+              </a:ext>
+            </a:extLst>
+          </p:cNvPr>
           <p:cNvSpPr txBox="1"/>
           <p:nvPr/>
         </p:nvSpPr>
@@ -4714,21 +5222,27 @@
                 </a:solidFill>
                 <a:latin typeface="Calibri"/>
               </a:rPr>
-              <a:t>ROADMAP — SHIPPED VALUE, CLEAR NEXT PHASE</a:t>
-            </a:r>
-          </a:p>
-        </p:txBody>
-      </p:sp>
-      <p:sp>
-        <p:nvSpPr>
-          <p:cNvPr id="6" name="TextBox 5"/>
+              <a:t>BUILT FOR ENGINEERING TRUST</a:t>
+            </a:r>
+          </a:p>
+        </p:txBody>
+      </p:sp>
+      <p:sp>
+        <p:nvSpPr>
+          <p:cNvPr id="6" name="TextBox 5">
+            <a:extLst>
+              <a:ext uri="{FF2B5EF4-FFF2-40B4-BE49-F238E27FC236}">
+                <a16:creationId xmlns:a16="http://schemas.microsoft.com/office/drawing/2014/main" id="{A8A50B84-9DB6-FEC2-0E1C-EBC65BC128D4}"/>
+              </a:ext>
+            </a:extLst>
+          </p:cNvPr>
           <p:cNvSpPr txBox="1"/>
           <p:nvPr/>
         </p:nvSpPr>
         <p:spPr>
           <a:xfrm>
             <a:off x="548640" y="457200"/>
-            <a:ext cx="10058400" cy="777240"/>
+            <a:ext cx="10058400" cy="461665"/>
           </a:xfrm>
           <a:prstGeom prst="rect">
             <a:avLst/>
@@ -4743,20 +5257,32 @@
           <a:p>
             <a:pPr algn="l"/>
             <a:r>
-              <a:rPr sz="3000" b="1" i="0">
+              <a:rPr lang="en-CA" sz="3000" b="1" i="0" dirty="0">
                 <a:solidFill>
                   <a:srgbClr val="FFFFFF"/>
                 </a:solidFill>
                 <a:latin typeface="Calibri"/>
               </a:rPr>
-              <a:t>What's next.</a:t>
-            </a:r>
-          </a:p>
-        </p:txBody>
-      </p:sp>
-      <p:sp>
-        <p:nvSpPr>
-          <p:cNvPr id="7" name="TextBox 6"/>
+              <a:t>Value Added </a:t>
+            </a:r>
+            <a:endParaRPr sz="3000" b="1" i="0" dirty="0">
+              <a:solidFill>
+                <a:srgbClr val="FFFFFF"/>
+              </a:solidFill>
+              <a:latin typeface="Calibri"/>
+            </a:endParaRPr>
+          </a:p>
+        </p:txBody>
+      </p:sp>
+      <p:sp>
+        <p:nvSpPr>
+          <p:cNvPr id="7" name="TextBox 6">
+            <a:extLst>
+              <a:ext uri="{FF2B5EF4-FFF2-40B4-BE49-F238E27FC236}">
+                <a16:creationId xmlns:a16="http://schemas.microsoft.com/office/drawing/2014/main" id="{120E700E-8F89-773A-7A96-F4B1D5380E02}"/>
+              </a:ext>
+            </a:extLst>
+          </p:cNvPr>
           <p:cNvSpPr txBox="1"/>
           <p:nvPr/>
         </p:nvSpPr>
@@ -4784,14 +5310,20 @@
                 </a:solidFill>
                 <a:latin typeface="Calibri"/>
               </a:rPr>
-              <a:t>11 / 12</a:t>
-            </a:r>
-          </a:p>
-        </p:txBody>
-      </p:sp>
-      <p:sp>
-        <p:nvSpPr>
-          <p:cNvPr id="8" name="Rectangle 7"/>
+              <a:t>10 / 12</a:t>
+            </a:r>
+          </a:p>
+        </p:txBody>
+      </p:sp>
+      <p:sp>
+        <p:nvSpPr>
+          <p:cNvPr id="8" name="Rectangle 7">
+            <a:extLst>
+              <a:ext uri="{FF2B5EF4-FFF2-40B4-BE49-F238E27FC236}">
+                <a16:creationId xmlns:a16="http://schemas.microsoft.com/office/drawing/2014/main" id="{3577FED7-01DC-C0B7-94C7-B5B3ACF47656}"/>
+              </a:ext>
+            </a:extLst>
+          </p:cNvPr>
           <p:cNvSpPr/>
           <p:nvPr/>
         </p:nvSpPr>
@@ -4836,7 +5368,13 @@
       </p:sp>
       <p:sp>
         <p:nvSpPr>
-          <p:cNvPr id="9" name="TextBox 8"/>
+          <p:cNvPr id="9" name="TextBox 8">
+            <a:extLst>
+              <a:ext uri="{FF2B5EF4-FFF2-40B4-BE49-F238E27FC236}">
+                <a16:creationId xmlns:a16="http://schemas.microsoft.com/office/drawing/2014/main" id="{0D45EC9B-E0B1-0C0F-B69B-D0B3CC75E0AF}"/>
+              </a:ext>
+            </a:extLst>
+          </p:cNvPr>
           <p:cNvSpPr txBox="1"/>
           <p:nvPr/>
         </p:nvSpPr>
@@ -4871,13 +5409,19 @@
       </p:sp>
       <p:sp>
         <p:nvSpPr>
-          <p:cNvPr id="10" name="Rectangle 9"/>
+          <p:cNvPr id="10" name="Rectangle 9">
+            <a:extLst>
+              <a:ext uri="{FF2B5EF4-FFF2-40B4-BE49-F238E27FC236}">
+                <a16:creationId xmlns:a16="http://schemas.microsoft.com/office/drawing/2014/main" id="{39FABF22-83EF-C9F4-D4C5-732788D436AF}"/>
+              </a:ext>
+            </a:extLst>
+          </p:cNvPr>
           <p:cNvSpPr/>
           <p:nvPr/>
         </p:nvSpPr>
         <p:spPr>
           <a:xfrm>
-            <a:off x="548640" y="1993392"/>
+            <a:off x="548640" y="2047506"/>
             <a:ext cx="91440" cy="91440"/>
           </a:xfrm>
           <a:prstGeom prst="rect">
@@ -4915,14 +5459,20 @@
       </p:sp>
       <p:sp>
         <p:nvSpPr>
-          <p:cNvPr id="11" name="TextBox 10"/>
-          <p:cNvSpPr txBox="1"/>
-          <p:nvPr/>
-        </p:nvSpPr>
-        <p:spPr>
-          <a:xfrm>
-            <a:off x="804672" y="1828800"/>
-            <a:ext cx="7059168" cy="457200"/>
+          <p:cNvPr id="11" name="TextBox 10">
+            <a:extLst>
+              <a:ext uri="{FF2B5EF4-FFF2-40B4-BE49-F238E27FC236}">
+                <a16:creationId xmlns:a16="http://schemas.microsoft.com/office/drawing/2014/main" id="{18DDDDE8-8032-198E-0339-086BC0C361A6}"/>
+              </a:ext>
+            </a:extLst>
+          </p:cNvPr>
+          <p:cNvSpPr txBox="1"/>
+          <p:nvPr/>
+        </p:nvSpPr>
+        <p:spPr>
+          <a:xfrm>
+            <a:off x="804672" y="1869186"/>
+            <a:ext cx="5230368" cy="430887"/>
           </a:xfrm>
           <a:prstGeom prst="rect">
             <a:avLst/>
@@ -4944,35 +5494,38 @@
               </a:spcAft>
             </a:pPr>
             <a:r>
-              <a:rPr sz="1700" b="1" i="0">
+              <a:rPr lang="en-CA" sz="2500" b="1" i="0" dirty="0">
                 <a:solidFill>
                   <a:srgbClr val="1F2937"/>
                 </a:solidFill>
                 <a:latin typeface="Calibri"/>
               </a:rPr>
-              <a:t>Whitson+ Mass Upload</a:t>
-            </a:r>
-            <a:r>
-              <a:rPr sz="1700" b="0" i="0">
-                <a:solidFill>
-                  <a:srgbClr val="1F2937"/>
-                </a:solidFill>
-                <a:latin typeface="Calibri"/>
-              </a:rPr>
-              <a:t> — Replace the current placeholder workflow</a:t>
-            </a:r>
-          </a:p>
-        </p:txBody>
-      </p:sp>
-      <p:sp>
-        <p:nvSpPr>
-          <p:cNvPr id="12" name="Rectangle 11"/>
+              <a:t>Automated work flows</a:t>
+            </a:r>
+            <a:endParaRPr sz="2500" b="1" i="0" dirty="0">
+              <a:solidFill>
+                <a:srgbClr val="1F2937"/>
+              </a:solidFill>
+              <a:latin typeface="Calibri"/>
+            </a:endParaRPr>
+          </a:p>
+        </p:txBody>
+      </p:sp>
+      <p:sp>
+        <p:nvSpPr>
+          <p:cNvPr id="12" name="Rectangle 11">
+            <a:extLst>
+              <a:ext uri="{FF2B5EF4-FFF2-40B4-BE49-F238E27FC236}">
+                <a16:creationId xmlns:a16="http://schemas.microsoft.com/office/drawing/2014/main" id="{CA4715F8-F748-D1AF-AC76-7A889EF67D92}"/>
+              </a:ext>
+            </a:extLst>
+          </p:cNvPr>
           <p:cNvSpPr/>
           <p:nvPr/>
         </p:nvSpPr>
         <p:spPr>
           <a:xfrm>
-            <a:off x="548640" y="2450592"/>
+            <a:off x="548640" y="2504706"/>
             <a:ext cx="91440" cy="91440"/>
           </a:xfrm>
           <a:prstGeom prst="rect">
@@ -5010,14 +5563,20 @@
       </p:sp>
       <p:sp>
         <p:nvSpPr>
-          <p:cNvPr id="13" name="TextBox 12"/>
-          <p:cNvSpPr txBox="1"/>
-          <p:nvPr/>
-        </p:nvSpPr>
-        <p:spPr>
-          <a:xfrm>
-            <a:off x="804672" y="2286000"/>
-            <a:ext cx="7059168" cy="457200"/>
+          <p:cNvPr id="13" name="TextBox 12">
+            <a:extLst>
+              <a:ext uri="{FF2B5EF4-FFF2-40B4-BE49-F238E27FC236}">
+                <a16:creationId xmlns:a16="http://schemas.microsoft.com/office/drawing/2014/main" id="{7FE36472-4203-3435-C4C0-CCAA3105F5D2}"/>
+              </a:ext>
+            </a:extLst>
+          </p:cNvPr>
+          <p:cNvSpPr txBox="1"/>
+          <p:nvPr/>
+        </p:nvSpPr>
+        <p:spPr>
+          <a:xfrm>
+            <a:off x="804672" y="2340864"/>
+            <a:ext cx="5230368" cy="430887"/>
           </a:xfrm>
           <a:prstGeom prst="rect">
             <a:avLst/>
@@ -5039,35 +5598,38 @@
               </a:spcAft>
             </a:pPr>
             <a:r>
-              <a:rPr sz="1700" b="1" i="0">
+              <a:rPr lang="en-CA" sz="2500" b="1" i="0" dirty="0">
                 <a:solidFill>
                   <a:srgbClr val="1F2937"/>
                 </a:solidFill>
                 <a:latin typeface="Calibri"/>
               </a:rPr>
-              <a:t>Exports / Reports</a:t>
-            </a:r>
-            <a:r>
-              <a:rPr sz="1700" b="0" i="0">
-                <a:solidFill>
-                  <a:srgbClr val="1F2937"/>
-                </a:solidFill>
-                <a:latin typeface="Calibri"/>
-              </a:rPr>
-              <a:t> — First-class dialog and scheduled extracts</a:t>
-            </a:r>
-          </a:p>
-        </p:txBody>
-      </p:sp>
-      <p:sp>
-        <p:nvSpPr>
-          <p:cNvPr id="14" name="Rectangle 13"/>
+              <a:t>Data integrity</a:t>
+            </a:r>
+            <a:endParaRPr sz="2500" b="1" i="0" dirty="0">
+              <a:solidFill>
+                <a:srgbClr val="1F2937"/>
+              </a:solidFill>
+              <a:latin typeface="Calibri"/>
+            </a:endParaRPr>
+          </a:p>
+        </p:txBody>
+      </p:sp>
+      <p:sp>
+        <p:nvSpPr>
+          <p:cNvPr id="14" name="Rectangle 13">
+            <a:extLst>
+              <a:ext uri="{FF2B5EF4-FFF2-40B4-BE49-F238E27FC236}">
+                <a16:creationId xmlns:a16="http://schemas.microsoft.com/office/drawing/2014/main" id="{E407C301-AA07-649D-034B-913DC4359B75}"/>
+              </a:ext>
+            </a:extLst>
+          </p:cNvPr>
           <p:cNvSpPr/>
           <p:nvPr/>
         </p:nvSpPr>
         <p:spPr>
           <a:xfrm>
-            <a:off x="548640" y="2907792"/>
+            <a:off x="548640" y="2961906"/>
             <a:ext cx="91440" cy="91440"/>
           </a:xfrm>
           <a:prstGeom prst="rect">
@@ -5105,14 +5667,20 @@
       </p:sp>
       <p:sp>
         <p:nvSpPr>
-          <p:cNvPr id="15" name="TextBox 14"/>
-          <p:cNvSpPr txBox="1"/>
-          <p:nvPr/>
-        </p:nvSpPr>
-        <p:spPr>
-          <a:xfrm>
-            <a:off x="804672" y="2743200"/>
-            <a:ext cx="7059168" cy="457200"/>
+          <p:cNvPr id="15" name="TextBox 14">
+            <a:extLst>
+              <a:ext uri="{FF2B5EF4-FFF2-40B4-BE49-F238E27FC236}">
+                <a16:creationId xmlns:a16="http://schemas.microsoft.com/office/drawing/2014/main" id="{0078B30C-9E30-9984-F5C9-1F2A224B1999}"/>
+              </a:ext>
+            </a:extLst>
+          </p:cNvPr>
+          <p:cNvSpPr txBox="1"/>
+          <p:nvPr/>
+        </p:nvSpPr>
+        <p:spPr>
+          <a:xfrm>
+            <a:off x="804672" y="2749201"/>
+            <a:ext cx="5230368" cy="430887"/>
           </a:xfrm>
           <a:prstGeom prst="rect">
             <a:avLst/>
@@ -5134,35 +5702,38 @@
               </a:spcAft>
             </a:pPr>
             <a:r>
-              <a:rPr sz="1700" b="1" i="0">
+              <a:rPr lang="en-CA" sz="2500" b="1" i="0" dirty="0">
                 <a:solidFill>
                   <a:srgbClr val="1F2937"/>
                 </a:solidFill>
                 <a:latin typeface="Calibri"/>
               </a:rPr>
-              <a:t>Automated reconciliation</a:t>
-            </a:r>
-            <a:r>
-              <a:rPr sz="1700" b="0" i="0">
-                <a:solidFill>
-                  <a:srgbClr val="1F2937"/>
-                </a:solidFill>
-                <a:latin typeface="Calibri"/>
-              </a:rPr>
-              <a:t> — Cross-source checks (Snowflake / Accumap / ValNav)</a:t>
-            </a:r>
-          </a:p>
-        </p:txBody>
-      </p:sp>
-      <p:sp>
-        <p:nvSpPr>
-          <p:cNvPr id="16" name="Rectangle 15"/>
+              <a:t>Repeatability and Auditability</a:t>
+            </a:r>
+            <a:endParaRPr sz="2500" b="1" i="0" dirty="0">
+              <a:solidFill>
+                <a:srgbClr val="1F2937"/>
+              </a:solidFill>
+              <a:latin typeface="Calibri"/>
+            </a:endParaRPr>
+          </a:p>
+        </p:txBody>
+      </p:sp>
+      <p:sp>
+        <p:nvSpPr>
+          <p:cNvPr id="16" name="Rectangle 15">
+            <a:extLst>
+              <a:ext uri="{FF2B5EF4-FFF2-40B4-BE49-F238E27FC236}">
+                <a16:creationId xmlns:a16="http://schemas.microsoft.com/office/drawing/2014/main" id="{03D3613B-DFD9-E832-1DF9-33ACE5F3DD44}"/>
+              </a:ext>
+            </a:extLst>
+          </p:cNvPr>
           <p:cNvSpPr/>
           <p:nvPr/>
         </p:nvSpPr>
         <p:spPr>
           <a:xfrm>
-            <a:off x="548640" y="3364992"/>
+            <a:off x="548640" y="3419106"/>
             <a:ext cx="91440" cy="91440"/>
           </a:xfrm>
           <a:prstGeom prst="rect">
@@ -5200,78 +5771,145 @@
       </p:sp>
       <p:sp>
         <p:nvSpPr>
-          <p:cNvPr id="17" name="TextBox 16"/>
-          <p:cNvSpPr txBox="1"/>
-          <p:nvPr/>
-        </p:nvSpPr>
-        <p:spPr>
-          <a:xfrm>
-            <a:off x="804672" y="3200400"/>
-            <a:ext cx="7059168" cy="457200"/>
-          </a:xfrm>
-          <a:prstGeom prst="rect">
-            <a:avLst/>
-          </a:prstGeom>
-          <a:noFill/>
-        </p:spPr>
-        <p:txBody>
-          <a:bodyPr wrap="square" lIns="0" tIns="0" rIns="0" bIns="0">
-            <a:spAutoFit/>
-          </a:bodyPr>
-          <a:lstStyle/>
-          <a:p>
-            <a:pPr algn="l">
-              <a:lnSpc>
-                <a:spcPct val="120000"/>
-              </a:lnSpc>
-              <a:spcAft>
-                <a:spcPts val="0"/>
-              </a:spcAft>
-            </a:pPr>
-            <a:r>
-              <a:rPr sz="1700" b="1" i="0">
+          <p:cNvPr id="28" name="TextBox 27">
+            <a:extLst>
+              <a:ext uri="{FF2B5EF4-FFF2-40B4-BE49-F238E27FC236}">
+                <a16:creationId xmlns:a16="http://schemas.microsoft.com/office/drawing/2014/main" id="{F103A83C-485E-A1B2-CCDE-5FC7945CF948}"/>
+              </a:ext>
+            </a:extLst>
+          </p:cNvPr>
+          <p:cNvSpPr txBox="1"/>
+          <p:nvPr/>
+        </p:nvSpPr>
+        <p:spPr>
+          <a:xfrm>
+            <a:off x="10600509" y="6605468"/>
+            <a:ext cx="4082448" cy="338554"/>
+          </a:xfrm>
+          <a:prstGeom prst="rect">
+            <a:avLst/>
+          </a:prstGeom>
+          <a:noFill/>
+        </p:spPr>
+        <p:txBody>
+          <a:bodyPr wrap="square" lIns="0" tIns="0" rIns="0" bIns="0" anchor="t">
+            <a:spAutoFit/>
+          </a:bodyPr>
+          <a:lstStyle/>
+          <a:p>
+            <a:r>
+              <a:rPr lang="en-CA" sz="1200" b="0" i="0" dirty="0" err="1">
+                <a:solidFill>
+                  <a:srgbClr val="6B7280"/>
+                </a:solidFill>
+                <a:latin typeface="Calibri"/>
+              </a:rPr>
+              <a:t>Adobel</a:t>
+            </a:r>
+            <a:r>
+              <a:rPr lang="en-CA" sz="1200" b="0" i="0" dirty="0">
+                <a:solidFill>
+                  <a:srgbClr val="6B7280"/>
+                </a:solidFill>
+                <a:latin typeface="Calibri"/>
+              </a:rPr>
+              <a:t> Services Inc </a:t>
+            </a:r>
+            <a:r>
+              <a:rPr lang="en-CA" sz="1200" dirty="0">
+                <a:solidFill>
+                  <a:schemeClr val="bg1">
+                    <a:lumMod val="50000"/>
+                  </a:schemeClr>
+                </a:solidFill>
+              </a:rPr>
+              <a:t>©</a:t>
+            </a:r>
+          </a:p>
+          <a:p>
+            <a:pPr algn="l"/>
+            <a:endParaRPr sz="1000" b="0" i="0" dirty="0">
+              <a:solidFill>
+                <a:srgbClr val="6B7280"/>
+              </a:solidFill>
+              <a:latin typeface="Calibri"/>
+            </a:endParaRPr>
+          </a:p>
+        </p:txBody>
+      </p:sp>
+      <p:sp>
+        <p:nvSpPr>
+          <p:cNvPr id="2" name="TextBox 1">
+            <a:extLst>
+              <a:ext uri="{FF2B5EF4-FFF2-40B4-BE49-F238E27FC236}">
+                <a16:creationId xmlns:a16="http://schemas.microsoft.com/office/drawing/2014/main" id="{EF877742-FBBA-AF49-398D-1045F80EDF8D}"/>
+              </a:ext>
+            </a:extLst>
+          </p:cNvPr>
+          <p:cNvSpPr txBox="1"/>
+          <p:nvPr/>
+        </p:nvSpPr>
+        <p:spPr>
+          <a:xfrm>
+            <a:off x="726613" y="3234012"/>
+            <a:ext cx="3767328" cy="477054"/>
+          </a:xfrm>
+          <a:prstGeom prst="rect">
+            <a:avLst/>
+          </a:prstGeom>
+          <a:noFill/>
+        </p:spPr>
+        <p:txBody>
+          <a:bodyPr wrap="square" rtlCol="0">
+            <a:spAutoFit/>
+          </a:bodyPr>
+          <a:lstStyle/>
+          <a:p>
+            <a:r>
+              <a:rPr lang="en-CA" sz="2500" b="1" dirty="0">
                 <a:solidFill>
                   <a:srgbClr val="1F2937"/>
                 </a:solidFill>
-                <a:latin typeface="Calibri"/>
-              </a:rPr>
-              <a:t>Smaller asks</a:t>
-            </a:r>
-            <a:r>
-              <a:rPr sz="1700" b="0" i="0">
-                <a:solidFill>
-                  <a:srgbClr val="1F2937"/>
-                </a:solidFill>
-                <a:latin typeface="Calibri"/>
-              </a:rPr>
-              <a:t> — Better progress signals, more name-resolution rules</a:t>
-            </a:r>
-          </a:p>
-        </p:txBody>
-      </p:sp>
-      <p:sp>
-        <p:nvSpPr>
-          <p:cNvPr id="18" name="Rectangle 17"/>
+                <a:latin typeface="Calibri" panose="020F0502020204030204" pitchFamily="34" charset="0"/>
+                <a:ea typeface="Calibri" panose="020F0502020204030204" pitchFamily="34" charset="0"/>
+                <a:cs typeface="Calibri" panose="020F0502020204030204" pitchFamily="34" charset="0"/>
+              </a:rPr>
+              <a:t>Single Source of Truth</a:t>
+            </a:r>
+            <a:endParaRPr lang="en-CA" sz="2500" b="1" dirty="0">
+              <a:latin typeface="Calibri" panose="020F0502020204030204" pitchFamily="34" charset="0"/>
+              <a:ea typeface="Calibri" panose="020F0502020204030204" pitchFamily="34" charset="0"/>
+              <a:cs typeface="Calibri" panose="020F0502020204030204" pitchFamily="34" charset="0"/>
+            </a:endParaRPr>
+          </a:p>
+        </p:txBody>
+      </p:sp>
+      <p:sp>
+        <p:nvSpPr>
+          <p:cNvPr id="29" name="Rectangle 28">
+            <a:extLst>
+              <a:ext uri="{FF2B5EF4-FFF2-40B4-BE49-F238E27FC236}">
+                <a16:creationId xmlns:a16="http://schemas.microsoft.com/office/drawing/2014/main" id="{678908B1-EA22-5D29-43BF-DC1299490146}"/>
+              </a:ext>
+            </a:extLst>
+          </p:cNvPr>
           <p:cNvSpPr/>
           <p:nvPr/>
         </p:nvSpPr>
         <p:spPr>
           <a:xfrm>
-            <a:off x="8138160" y="1828800"/>
-            <a:ext cx="3657600" cy="4023360"/>
+            <a:off x="548640" y="3923373"/>
+            <a:ext cx="91440" cy="91440"/>
           </a:xfrm>
           <a:prstGeom prst="rect">
             <a:avLst/>
           </a:prstGeom>
           <a:solidFill>
-            <a:srgbClr val="EFF6E2"/>
+            <a:srgbClr val="82BC3F"/>
           </a:solidFill>
-          <a:ln w="9525">
-            <a:solidFill>
-              <a:srgbClr val="E5E7EB"/>
-            </a:solidFill>
+          <a:ln>
+            <a:noFill/>
           </a:ln>
-          <a:effectLst/>
         </p:spPr>
         <p:style>
           <a:lnRef idx="1">
@@ -5298,25 +5936,124 @@
       </p:sp>
       <p:sp>
         <p:nvSpPr>
-          <p:cNvPr id="19" name="Rectangle 18"/>
+          <p:cNvPr id="30" name="TextBox 29">
+            <a:extLst>
+              <a:ext uri="{FF2B5EF4-FFF2-40B4-BE49-F238E27FC236}">
+                <a16:creationId xmlns:a16="http://schemas.microsoft.com/office/drawing/2014/main" id="{FFE67C1E-437A-DC63-C65F-EB524B253050}"/>
+              </a:ext>
+            </a:extLst>
+          </p:cNvPr>
+          <p:cNvSpPr txBox="1"/>
+          <p:nvPr/>
+        </p:nvSpPr>
+        <p:spPr>
+          <a:xfrm>
+            <a:off x="726613" y="3714523"/>
+            <a:ext cx="3767328" cy="477054"/>
+          </a:xfrm>
+          <a:prstGeom prst="rect">
+            <a:avLst/>
+          </a:prstGeom>
+          <a:noFill/>
+        </p:spPr>
+        <p:txBody>
+          <a:bodyPr wrap="square" rtlCol="0">
+            <a:spAutoFit/>
+          </a:bodyPr>
+          <a:lstStyle/>
+          <a:p>
+            <a:r>
+              <a:rPr lang="en-CA" sz="2500" b="1" dirty="0">
+                <a:solidFill>
+                  <a:srgbClr val="1F2937"/>
+                </a:solidFill>
+                <a:latin typeface="Calibri" panose="020F0502020204030204" pitchFamily="34" charset="0"/>
+                <a:ea typeface="Calibri" panose="020F0502020204030204" pitchFamily="34" charset="0"/>
+                <a:cs typeface="Calibri" panose="020F0502020204030204" pitchFamily="34" charset="0"/>
+              </a:rPr>
+              <a:t>Easier onboarding</a:t>
+            </a:r>
+            <a:endParaRPr lang="en-CA" sz="2500" b="1" dirty="0">
+              <a:latin typeface="Calibri" panose="020F0502020204030204" pitchFamily="34" charset="0"/>
+              <a:ea typeface="Calibri" panose="020F0502020204030204" pitchFamily="34" charset="0"/>
+              <a:cs typeface="Calibri" panose="020F0502020204030204" pitchFamily="34" charset="0"/>
+            </a:endParaRPr>
+          </a:p>
+        </p:txBody>
+      </p:sp>
+      <p:sp>
+        <p:nvSpPr>
+          <p:cNvPr id="31" name="TextBox 30">
+            <a:extLst>
+              <a:ext uri="{FF2B5EF4-FFF2-40B4-BE49-F238E27FC236}">
+                <a16:creationId xmlns:a16="http://schemas.microsoft.com/office/drawing/2014/main" id="{DA44C74E-908C-655C-28CA-5ED35AE3D406}"/>
+              </a:ext>
+            </a:extLst>
+          </p:cNvPr>
+          <p:cNvSpPr txBox="1"/>
+          <p:nvPr/>
+        </p:nvSpPr>
+        <p:spPr>
+          <a:xfrm>
+            <a:off x="726613" y="4200983"/>
+            <a:ext cx="3767328" cy="477054"/>
+          </a:xfrm>
+          <a:prstGeom prst="rect">
+            <a:avLst/>
+          </a:prstGeom>
+          <a:noFill/>
+        </p:spPr>
+        <p:txBody>
+          <a:bodyPr wrap="square" rtlCol="0">
+            <a:spAutoFit/>
+          </a:bodyPr>
+          <a:lstStyle/>
+          <a:p>
+            <a:r>
+              <a:rPr lang="en-CA" sz="2500" b="1" dirty="0">
+                <a:solidFill>
+                  <a:srgbClr val="1F2937"/>
+                </a:solidFill>
+                <a:latin typeface="Calibri" panose="020F0502020204030204" pitchFamily="34" charset="0"/>
+                <a:ea typeface="Calibri" panose="020F0502020204030204" pitchFamily="34" charset="0"/>
+                <a:cs typeface="Calibri" panose="020F0502020204030204" pitchFamily="34" charset="0"/>
+              </a:rPr>
+              <a:t>Clear audit trail</a:t>
+            </a:r>
+            <a:endParaRPr lang="en-CA" sz="2500" b="1" dirty="0">
+              <a:latin typeface="Calibri" panose="020F0502020204030204" pitchFamily="34" charset="0"/>
+              <a:ea typeface="Calibri" panose="020F0502020204030204" pitchFamily="34" charset="0"/>
+              <a:cs typeface="Calibri" panose="020F0502020204030204" pitchFamily="34" charset="0"/>
+            </a:endParaRPr>
+          </a:p>
+        </p:txBody>
+      </p:sp>
+      <p:sp>
+        <p:nvSpPr>
+          <p:cNvPr id="32" name="Rectangle 31">
+            <a:extLst>
+              <a:ext uri="{FF2B5EF4-FFF2-40B4-BE49-F238E27FC236}">
+                <a16:creationId xmlns:a16="http://schemas.microsoft.com/office/drawing/2014/main" id="{3975F8F9-4967-3D2A-637E-9CB3770AF4A3}"/>
+              </a:ext>
+            </a:extLst>
+          </p:cNvPr>
           <p:cNvSpPr/>
           <p:nvPr/>
         </p:nvSpPr>
         <p:spPr>
           <a:xfrm>
-            <a:off x="8138160" y="1828800"/>
-            <a:ext cx="164592" cy="4023360"/>
+            <a:off x="550424" y="4409432"/>
+            <a:ext cx="91440" cy="91440"/>
           </a:xfrm>
           <a:prstGeom prst="rect">
             <a:avLst/>
           </a:prstGeom>
           <a:solidFill>
-            <a:srgbClr val="3577B5"/>
+            <a:srgbClr val="82BC3F"/>
           </a:solidFill>
           <a:ln>
             <a:noFill/>
           </a:ln>
-          <a:effectLst/>
         </p:spPr>
         <p:style>
           <a:lnRef idx="1">
@@ -5341,300 +6078,12 @@
           </a:p>
         </p:txBody>
       </p:sp>
-      <p:sp>
-        <p:nvSpPr>
-          <p:cNvPr id="20" name="TextBox 19"/>
-          <p:cNvSpPr txBox="1"/>
-          <p:nvPr/>
-        </p:nvSpPr>
-        <p:spPr>
-          <a:xfrm>
-            <a:off x="8641080" y="2103120"/>
-            <a:ext cx="2971800" cy="457200"/>
-          </a:xfrm>
-          <a:prstGeom prst="rect">
-            <a:avLst/>
-          </a:prstGeom>
-          <a:noFill/>
-        </p:spPr>
-        <p:txBody>
-          <a:bodyPr wrap="square" lIns="0" tIns="0" rIns="0" bIns="0" anchor="t">
-            <a:spAutoFit/>
-          </a:bodyPr>
-          <a:lstStyle/>
-          <a:p>
-            <a:pPr algn="l"/>
-            <a:r>
-              <a:rPr sz="1600" b="1" i="0">
-                <a:solidFill>
-                  <a:srgbClr val="1A2C5C"/>
-                </a:solidFill>
-                <a:latin typeface="Calibri"/>
-              </a:rPr>
-              <a:t>Owners &amp; timelines</a:t>
-            </a:r>
-          </a:p>
-        </p:txBody>
-      </p:sp>
-      <p:sp>
-        <p:nvSpPr>
-          <p:cNvPr id="21" name="Rectangle 20"/>
-          <p:cNvSpPr/>
-          <p:nvPr/>
-        </p:nvSpPr>
-        <p:spPr>
-          <a:xfrm>
-            <a:off x="8641080" y="2862072"/>
-            <a:ext cx="91440" cy="91440"/>
-          </a:xfrm>
-          <a:prstGeom prst="rect">
-            <a:avLst/>
-          </a:prstGeom>
-          <a:solidFill>
-            <a:srgbClr val="3577B5"/>
-          </a:solidFill>
-          <a:ln>
-            <a:noFill/>
-          </a:ln>
-        </p:spPr>
-        <p:style>
-          <a:lnRef idx="1">
-            <a:schemeClr val="accent1"/>
-          </a:lnRef>
-          <a:fillRef idx="3">
-            <a:schemeClr val="accent1"/>
-          </a:fillRef>
-          <a:effectRef idx="2">
-            <a:schemeClr val="accent1"/>
-          </a:effectRef>
-          <a:fontRef idx="minor">
-            <a:schemeClr val="lt1"/>
-          </a:fontRef>
-        </p:style>
-        <p:txBody>
-          <a:bodyPr rtlCol="0" anchor="ctr"/>
-          <a:lstStyle/>
-          <a:p>
-            <a:pPr algn="ctr"/>
-            <a:endParaRPr/>
-          </a:p>
-        </p:txBody>
-      </p:sp>
-      <p:sp>
-        <p:nvSpPr>
-          <p:cNvPr id="22" name="TextBox 21"/>
-          <p:cNvSpPr txBox="1"/>
-          <p:nvPr/>
-        </p:nvSpPr>
-        <p:spPr>
-          <a:xfrm>
-            <a:off x="8897112" y="2697480"/>
-            <a:ext cx="2624328" cy="457200"/>
-          </a:xfrm>
-          <a:prstGeom prst="rect">
-            <a:avLst/>
-          </a:prstGeom>
-          <a:noFill/>
-        </p:spPr>
-        <p:txBody>
-          <a:bodyPr wrap="square" lIns="0" tIns="0" rIns="0" bIns="0">
-            <a:spAutoFit/>
-          </a:bodyPr>
-          <a:lstStyle/>
-          <a:p>
-            <a:pPr algn="l">
-              <a:lnSpc>
-                <a:spcPct val="120000"/>
-              </a:lnSpc>
-              <a:spcAft>
-                <a:spcPts val="0"/>
-              </a:spcAft>
-            </a:pPr>
-            <a:r>
-              <a:rPr sz="1300" b="0" i="0">
-                <a:solidFill>
-                  <a:srgbClr val="1F2937"/>
-                </a:solidFill>
-                <a:latin typeface="Calibri"/>
-              </a:rPr>
-              <a:t>Tech lead — to be assigned</a:t>
-            </a:r>
-          </a:p>
-        </p:txBody>
-      </p:sp>
-      <p:sp>
-        <p:nvSpPr>
-          <p:cNvPr id="23" name="Rectangle 22"/>
-          <p:cNvSpPr/>
-          <p:nvPr/>
-        </p:nvSpPr>
-        <p:spPr>
-          <a:xfrm>
-            <a:off x="8641080" y="3319272"/>
-            <a:ext cx="91440" cy="91440"/>
-          </a:xfrm>
-          <a:prstGeom prst="rect">
-            <a:avLst/>
-          </a:prstGeom>
-          <a:solidFill>
-            <a:srgbClr val="3577B5"/>
-          </a:solidFill>
-          <a:ln>
-            <a:noFill/>
-          </a:ln>
-        </p:spPr>
-        <p:style>
-          <a:lnRef idx="1">
-            <a:schemeClr val="accent1"/>
-          </a:lnRef>
-          <a:fillRef idx="3">
-            <a:schemeClr val="accent1"/>
-          </a:fillRef>
-          <a:effectRef idx="2">
-            <a:schemeClr val="accent1"/>
-          </a:effectRef>
-          <a:fontRef idx="minor">
-            <a:schemeClr val="lt1"/>
-          </a:fontRef>
-        </p:style>
-        <p:txBody>
-          <a:bodyPr rtlCol="0" anchor="ctr"/>
-          <a:lstStyle/>
-          <a:p>
-            <a:pPr algn="ctr"/>
-            <a:endParaRPr/>
-          </a:p>
-        </p:txBody>
-      </p:sp>
-      <p:sp>
-        <p:nvSpPr>
-          <p:cNvPr id="24" name="TextBox 23"/>
-          <p:cNvSpPr txBox="1"/>
-          <p:nvPr/>
-        </p:nvSpPr>
-        <p:spPr>
-          <a:xfrm>
-            <a:off x="8897112" y="3154680"/>
-            <a:ext cx="2624328" cy="457200"/>
-          </a:xfrm>
-          <a:prstGeom prst="rect">
-            <a:avLst/>
-          </a:prstGeom>
-          <a:noFill/>
-        </p:spPr>
-        <p:txBody>
-          <a:bodyPr wrap="square" lIns="0" tIns="0" rIns="0" bIns="0">
-            <a:spAutoFit/>
-          </a:bodyPr>
-          <a:lstStyle/>
-          <a:p>
-            <a:pPr algn="l">
-              <a:lnSpc>
-                <a:spcPct val="120000"/>
-              </a:lnSpc>
-              <a:spcAft>
-                <a:spcPts val="0"/>
-              </a:spcAft>
-            </a:pPr>
-            <a:r>
-              <a:rPr sz="1300" b="0" i="0">
-                <a:solidFill>
-                  <a:srgbClr val="1F2937"/>
-                </a:solidFill>
-                <a:latin typeface="Calibri"/>
-              </a:rPr>
-              <a:t>Reservoir lead — to be assigned</a:t>
-            </a:r>
-          </a:p>
-        </p:txBody>
-      </p:sp>
-      <p:sp>
-        <p:nvSpPr>
-          <p:cNvPr id="25" name="Rectangle 24"/>
-          <p:cNvSpPr/>
-          <p:nvPr/>
-        </p:nvSpPr>
-        <p:spPr>
-          <a:xfrm>
-            <a:off x="8641080" y="3776472"/>
-            <a:ext cx="91440" cy="91440"/>
-          </a:xfrm>
-          <a:prstGeom prst="rect">
-            <a:avLst/>
-          </a:prstGeom>
-          <a:solidFill>
-            <a:srgbClr val="3577B5"/>
-          </a:solidFill>
-          <a:ln>
-            <a:noFill/>
-          </a:ln>
-        </p:spPr>
-        <p:style>
-          <a:lnRef idx="1">
-            <a:schemeClr val="accent1"/>
-          </a:lnRef>
-          <a:fillRef idx="3">
-            <a:schemeClr val="accent1"/>
-          </a:fillRef>
-          <a:effectRef idx="2">
-            <a:schemeClr val="accent1"/>
-          </a:effectRef>
-          <a:fontRef idx="minor">
-            <a:schemeClr val="lt1"/>
-          </a:fontRef>
-        </p:style>
-        <p:txBody>
-          <a:bodyPr rtlCol="0" anchor="ctr"/>
-          <a:lstStyle/>
-          <a:p>
-            <a:pPr algn="ctr"/>
-            <a:endParaRPr/>
-          </a:p>
-        </p:txBody>
-      </p:sp>
-      <p:sp>
-        <p:nvSpPr>
-          <p:cNvPr id="26" name="TextBox 25"/>
-          <p:cNvSpPr txBox="1"/>
-          <p:nvPr/>
-        </p:nvSpPr>
-        <p:spPr>
-          <a:xfrm>
-            <a:off x="8897112" y="3611880"/>
-            <a:ext cx="2624328" cy="457200"/>
-          </a:xfrm>
-          <a:prstGeom prst="rect">
-            <a:avLst/>
-          </a:prstGeom>
-          <a:noFill/>
-        </p:spPr>
-        <p:txBody>
-          <a:bodyPr wrap="square" lIns="0" tIns="0" rIns="0" bIns="0">
-            <a:spAutoFit/>
-          </a:bodyPr>
-          <a:lstStyle/>
-          <a:p>
-            <a:pPr algn="l">
-              <a:lnSpc>
-                <a:spcPct val="120000"/>
-              </a:lnSpc>
-              <a:spcAft>
-                <a:spcPts val="0"/>
-              </a:spcAft>
-            </a:pPr>
-            <a:r>
-              <a:rPr sz="1300" b="0" i="0">
-                <a:solidFill>
-                  <a:srgbClr val="1F2937"/>
-                </a:solidFill>
-                <a:latin typeface="Calibri"/>
-              </a:rPr>
-              <a:t>Pilot users — volunteers welcome</a:t>
-            </a:r>
-          </a:p>
-        </p:txBody>
-      </p:sp>
     </p:spTree>
+    <p:extLst>
+      <p:ext uri="{BB962C8B-B14F-4D97-AF65-F5344CB8AC3E}">
+        <p14:creationId xmlns:p14="http://schemas.microsoft.com/office/powerpoint/2010/main" val="3514742604"/>
+      </p:ext>
+    </p:extLst>
   </p:cSld>
   <p:clrMapOvr>
     <a:masterClrMapping/>
@@ -5700,7 +6149,7 @@
           <a:lstStyle/>
           <a:p>
             <a:pPr algn="ctr"/>
-            <a:endParaRPr/>
+            <a:endParaRPr dirty="0"/>
           </a:p>
         </p:txBody>
       </p:sp>
@@ -5968,7 +6417,7 @@
           <a:p>
             <a:pPr algn="l"/>
             <a:r>
-              <a:rPr sz="1000" b="0" i="0">
+              <a:rPr sz="1000" b="0" i="0" dirty="0">
                 <a:solidFill>
                   <a:srgbClr val="6B7280"/>
                 </a:solidFill>
@@ -6229,7 +6678,7 @@
         </p:nvSpPr>
         <p:spPr>
           <a:xfrm>
-            <a:off x="1051560" y="5193792"/>
+            <a:off x="1051560" y="4974068"/>
             <a:ext cx="91440" cy="91440"/>
           </a:xfrm>
           <a:prstGeom prst="rect">
@@ -6273,8 +6722,8 @@
         </p:nvSpPr>
         <p:spPr>
           <a:xfrm>
-            <a:off x="1307592" y="5029200"/>
-            <a:ext cx="4453128" cy="457200"/>
+            <a:off x="1307592" y="4906129"/>
+            <a:ext cx="4453128" cy="224036"/>
           </a:xfrm>
           <a:prstGeom prst="rect">
             <a:avLst/>
@@ -6296,14 +6745,20 @@
               </a:spcAft>
             </a:pPr>
             <a:r>
-              <a:rPr sz="1300" b="0" i="0">
+              <a:rPr lang="en-CA" sz="1300" b="0" i="0" dirty="0">
                 <a:solidFill>
                   <a:srgbClr val="1F2937"/>
                 </a:solidFill>
                 <a:latin typeface="Calibri"/>
               </a:rPr>
-              <a:t>&lt;email or ticket link&gt;</a:t>
-            </a:r>
+              <a:t>Ticket to adobelservicesinc@gmail.com</a:t>
+            </a:r>
+            <a:endParaRPr sz="1300" b="0" i="0" dirty="0">
+              <a:solidFill>
+                <a:srgbClr val="1F2937"/>
+              </a:solidFill>
+              <a:latin typeface="Calibri"/>
+            </a:endParaRPr>
           </a:p>
         </p:txBody>
       </p:sp>
@@ -6315,7 +6770,7 @@
         </p:nvSpPr>
         <p:spPr>
           <a:xfrm>
-            <a:off x="1051560" y="5650992"/>
+            <a:off x="1051560" y="5527414"/>
             <a:ext cx="91440" cy="91440"/>
           </a:xfrm>
           <a:prstGeom prst="rect">
@@ -6528,7 +6983,7 @@
         </p:nvSpPr>
         <p:spPr>
           <a:xfrm>
-            <a:off x="6766560" y="5193792"/>
+            <a:off x="6766560" y="4869180"/>
             <a:ext cx="91440" cy="91440"/>
           </a:xfrm>
           <a:prstGeom prst="rect">
@@ -6572,7 +7027,7 @@
         </p:nvSpPr>
         <p:spPr>
           <a:xfrm>
-            <a:off x="7022592" y="5029200"/>
+            <a:off x="7022592" y="4790558"/>
             <a:ext cx="4453128" cy="457200"/>
           </a:xfrm>
           <a:prstGeom prst="rect">
@@ -6595,7 +7050,7 @@
               </a:spcAft>
             </a:pPr>
             <a:r>
-              <a:rPr sz="1300" b="0" i="0">
+              <a:rPr sz="1300" b="0" i="0" dirty="0">
                 <a:solidFill>
                   <a:srgbClr val="1F2937"/>
                 </a:solidFill>
@@ -6614,7 +7069,7 @@
         </p:nvSpPr>
         <p:spPr>
           <a:xfrm>
-            <a:off x="6766560" y="5650992"/>
+            <a:off x="6766560" y="5280660"/>
             <a:ext cx="91440" cy="91440"/>
           </a:xfrm>
           <a:prstGeom prst="rect">
@@ -6658,7 +7113,7 @@
         </p:nvSpPr>
         <p:spPr>
           <a:xfrm>
-            <a:off x="7022592" y="5486400"/>
+            <a:off x="7022592" y="5193792"/>
             <a:ext cx="4453128" cy="457200"/>
           </a:xfrm>
           <a:prstGeom prst="rect">
@@ -6681,7 +7136,7 @@
               </a:spcAft>
             </a:pPr>
             <a:r>
-              <a:rPr sz="1300" b="0" i="0">
+              <a:rPr sz="1300" b="0" i="0" dirty="0">
                 <a:solidFill>
                   <a:srgbClr val="1F2937"/>
                 </a:solidFill>
@@ -6700,7 +7155,7 @@
         </p:nvSpPr>
         <p:spPr>
           <a:xfrm>
-            <a:off x="6766560" y="6108192"/>
+            <a:off x="6766560" y="5721967"/>
             <a:ext cx="91440" cy="91440"/>
           </a:xfrm>
           <a:prstGeom prst="rect">
@@ -6744,7 +7199,7 @@
         </p:nvSpPr>
         <p:spPr>
           <a:xfrm>
-            <a:off x="7022592" y="5943600"/>
+            <a:off x="7022592" y="5650992"/>
             <a:ext cx="4453128" cy="457200"/>
           </a:xfrm>
           <a:prstGeom prst="rect">
@@ -6767,7 +7222,7 @@
               </a:spcAft>
             </a:pPr>
             <a:r>
-              <a:rPr sz="1300" b="0" i="0">
+              <a:rPr sz="1300" b="0" i="0" dirty="0">
                 <a:solidFill>
                   <a:srgbClr val="1F2937"/>
                 </a:solidFill>
@@ -6775,6 +7230,74 @@
               </a:rPr>
               <a:t>docs/DEV_GUIDE_LAYOUT.md — deep technical map</a:t>
             </a:r>
+          </a:p>
+        </p:txBody>
+      </p:sp>
+      <p:sp>
+        <p:nvSpPr>
+          <p:cNvPr id="29" name="TextBox 28">
+            <a:extLst>
+              <a:ext uri="{FF2B5EF4-FFF2-40B4-BE49-F238E27FC236}">
+                <a16:creationId xmlns:a16="http://schemas.microsoft.com/office/drawing/2014/main" id="{8D14D6AB-8086-12E1-DDC1-E75E4DFB0EB3}"/>
+              </a:ext>
+            </a:extLst>
+          </p:cNvPr>
+          <p:cNvSpPr txBox="1"/>
+          <p:nvPr/>
+        </p:nvSpPr>
+        <p:spPr>
+          <a:xfrm>
+            <a:off x="10600509" y="6605468"/>
+            <a:ext cx="4082448" cy="338554"/>
+          </a:xfrm>
+          <a:prstGeom prst="rect">
+            <a:avLst/>
+          </a:prstGeom>
+          <a:noFill/>
+        </p:spPr>
+        <p:txBody>
+          <a:bodyPr wrap="square" lIns="0" tIns="0" rIns="0" bIns="0" anchor="t">
+            <a:spAutoFit/>
+          </a:bodyPr>
+          <a:lstStyle/>
+          <a:p>
+            <a:r>
+              <a:rPr lang="en-CA" sz="1200" b="0" i="0" dirty="0" err="1">
+                <a:solidFill>
+                  <a:srgbClr val="6B7280"/>
+                </a:solidFill>
+                <a:latin typeface="Calibri"/>
+              </a:rPr>
+              <a:t>Adobel</a:t>
+            </a:r>
+            <a:r>
+              <a:rPr lang="en-CA" sz="1200" b="0" i="0" dirty="0">
+                <a:solidFill>
+                  <a:srgbClr val="6B7280"/>
+                </a:solidFill>
+                <a:latin typeface="Calibri"/>
+              </a:rPr>
+              <a:t> Services Inc </a:t>
+            </a:r>
+            <a:r>
+              <a:rPr lang="en-CA" sz="1200" dirty="0">
+                <a:solidFill>
+                  <a:schemeClr val="bg1">
+                    <a:lumMod val="50000"/>
+                  </a:schemeClr>
+                </a:solidFill>
+              </a:rPr>
+              <a:t>©</a:t>
+            </a:r>
+          </a:p>
+          <a:p>
+            <a:pPr algn="l"/>
+            <a:endParaRPr sz="1000" b="0" i="0" dirty="0">
+              <a:solidFill>
+                <a:srgbClr val="6B7280"/>
+              </a:solidFill>
+              <a:latin typeface="Calibri"/>
+            </a:endParaRPr>
           </a:p>
         </p:txBody>
       </p:sp>
@@ -6805,51 +7328,6 @@
       </p:grpSpPr>
       <p:sp>
         <p:nvSpPr>
-          <p:cNvPr id="2" name="Rectangle 1"/>
-          <p:cNvSpPr/>
-          <p:nvPr/>
-        </p:nvSpPr>
-        <p:spPr>
-          <a:xfrm>
-            <a:off x="0" y="0"/>
-            <a:ext cx="12191695" cy="6858000"/>
-          </a:xfrm>
-          <a:prstGeom prst="rect">
-            <a:avLst/>
-          </a:prstGeom>
-          <a:solidFill>
-            <a:srgbClr val="FFFFFF"/>
-          </a:solidFill>
-          <a:ln>
-            <a:noFill/>
-          </a:ln>
-          <a:effectLst/>
-        </p:spPr>
-        <p:style>
-          <a:lnRef idx="1">
-            <a:schemeClr val="accent1"/>
-          </a:lnRef>
-          <a:fillRef idx="3">
-            <a:schemeClr val="accent1"/>
-          </a:fillRef>
-          <a:effectRef idx="2">
-            <a:schemeClr val="accent1"/>
-          </a:effectRef>
-          <a:fontRef idx="minor">
-            <a:schemeClr val="lt1"/>
-          </a:fontRef>
-        </p:style>
-        <p:txBody>
-          <a:bodyPr rtlCol="0" anchor="ctr"/>
-          <a:lstStyle/>
-          <a:p>
-            <a:pPr algn="ctr"/>
-            <a:endParaRPr/>
-          </a:p>
-        </p:txBody>
-      </p:sp>
-      <p:sp>
-        <p:nvSpPr>
           <p:cNvPr id="3" name="Rectangle 2"/>
           <p:cNvSpPr/>
           <p:nvPr/>
@@ -6947,7 +7425,7 @@
         <p:spPr>
           <a:xfrm>
             <a:off x="548640" y="164592"/>
-            <a:ext cx="7315200" cy="320040"/>
+            <a:ext cx="7315200" cy="200055"/>
           </a:xfrm>
           <a:prstGeom prst="rect">
             <a:avLst/>
@@ -6962,7 +7440,7 @@
           <a:p>
             <a:pPr algn="l"/>
             <a:r>
-              <a:rPr sz="1100" b="1" i="0">
+              <a:rPr sz="1300" b="1" i="0" dirty="0">
                 <a:solidFill>
                   <a:srgbClr val="82BC3F"/>
                 </a:solidFill>
@@ -7166,7 +7644,7 @@
         </p:nvSpPr>
         <p:spPr>
           <a:xfrm>
-            <a:off x="548640" y="2496312"/>
+            <a:off x="548640" y="2398776"/>
             <a:ext cx="91440" cy="91440"/>
           </a:xfrm>
           <a:prstGeom prst="rect">
@@ -7210,7 +7688,7 @@
         </p:nvSpPr>
         <p:spPr>
           <a:xfrm>
-            <a:off x="804672" y="2331720"/>
+            <a:off x="804672" y="2286000"/>
             <a:ext cx="6510528" cy="457200"/>
           </a:xfrm>
           <a:prstGeom prst="rect">
@@ -7233,7 +7711,7 @@
               </a:spcAft>
             </a:pPr>
             <a:r>
-              <a:rPr sz="1700" b="0" i="0">
+              <a:rPr sz="1700" b="0" i="0" dirty="0">
                 <a:solidFill>
                   <a:srgbClr val="1F2937"/>
                 </a:solidFill>
@@ -7252,7 +7730,7 @@
         </p:nvSpPr>
         <p:spPr>
           <a:xfrm>
-            <a:off x="548640" y="2953512"/>
+            <a:off x="548640" y="3081963"/>
             <a:ext cx="91440" cy="91440"/>
           </a:xfrm>
           <a:prstGeom prst="rect">
@@ -7296,7 +7774,7 @@
         </p:nvSpPr>
         <p:spPr>
           <a:xfrm>
-            <a:off x="804672" y="2788920"/>
+            <a:off x="792915" y="2973977"/>
             <a:ext cx="6510528" cy="457200"/>
           </a:xfrm>
           <a:prstGeom prst="rect">
@@ -7319,7 +7797,7 @@
               </a:spcAft>
             </a:pPr>
             <a:r>
-              <a:rPr sz="1700" b="0" i="0">
+              <a:rPr sz="1700" b="0" i="0" dirty="0">
                 <a:solidFill>
                   <a:srgbClr val="1F2937"/>
                 </a:solidFill>
@@ -7338,7 +7816,7 @@
         </p:nvSpPr>
         <p:spPr>
           <a:xfrm>
-            <a:off x="548640" y="3410712"/>
+            <a:off x="548640" y="3538728"/>
             <a:ext cx="91440" cy="91440"/>
           </a:xfrm>
           <a:prstGeom prst="rect">
@@ -7382,7 +7860,7 @@
         </p:nvSpPr>
         <p:spPr>
           <a:xfrm>
-            <a:off x="804672" y="3246120"/>
+            <a:off x="804672" y="3438579"/>
             <a:ext cx="6510528" cy="457200"/>
           </a:xfrm>
           <a:prstGeom prst="rect">
@@ -7405,7 +7883,7 @@
               </a:spcAft>
             </a:pPr>
             <a:r>
-              <a:rPr sz="1700" b="0" i="0">
+              <a:rPr sz="1700" b="0" i="0" dirty="0">
                 <a:solidFill>
                   <a:srgbClr val="1F2937"/>
                 </a:solidFill>
@@ -7424,7 +7902,7 @@
         </p:nvSpPr>
         <p:spPr>
           <a:xfrm>
-            <a:off x="548640" y="3867912"/>
+            <a:off x="536883" y="4096512"/>
             <a:ext cx="91440" cy="91440"/>
           </a:xfrm>
           <a:prstGeom prst="rect">
@@ -7468,7 +7946,7 @@
         </p:nvSpPr>
         <p:spPr>
           <a:xfrm>
-            <a:off x="804672" y="3703320"/>
+            <a:off x="792915" y="3993642"/>
             <a:ext cx="6510528" cy="457200"/>
           </a:xfrm>
           <a:prstGeom prst="rect">
@@ -7491,7 +7969,7 @@
               </a:spcAft>
             </a:pPr>
             <a:r>
-              <a:rPr sz="1700" b="0" i="0">
+              <a:rPr sz="1700" b="0" i="0" dirty="0">
                 <a:solidFill>
                   <a:srgbClr val="1F2937"/>
                 </a:solidFill>
@@ -7510,7 +7988,7 @@
         </p:nvSpPr>
         <p:spPr>
           <a:xfrm>
-            <a:off x="548640" y="4325112"/>
+            <a:off x="536883" y="4628388"/>
             <a:ext cx="91440" cy="91440"/>
           </a:xfrm>
           <a:prstGeom prst="rect">
@@ -7554,7 +8032,7 @@
         </p:nvSpPr>
         <p:spPr>
           <a:xfrm>
-            <a:off x="804672" y="4160520"/>
+            <a:off x="804672" y="4539996"/>
             <a:ext cx="6510528" cy="457200"/>
           </a:xfrm>
           <a:prstGeom prst="rect">
@@ -7577,7 +8055,7 @@
               </a:spcAft>
             </a:pPr>
             <a:r>
-              <a:rPr sz="1700" b="0" i="0">
+              <a:rPr sz="1700" b="0" i="0" dirty="0">
                 <a:solidFill>
                   <a:srgbClr val="1F2937"/>
                 </a:solidFill>
@@ -7689,7 +8167,7 @@
         <p:spPr>
           <a:xfrm>
             <a:off x="8183880" y="2468880"/>
-            <a:ext cx="3337560" cy="457200"/>
+            <a:ext cx="3337560" cy="246221"/>
           </a:xfrm>
           <a:prstGeom prst="rect">
             <a:avLst/>
@@ -7704,14 +8182,29 @@
           <a:p>
             <a:pPr algn="l"/>
             <a:r>
-              <a:rPr sz="1600" b="1" i="0">
+              <a:rPr sz="1600" b="1" i="0" dirty="0">
                 <a:solidFill>
                   <a:srgbClr val="1A2C5C"/>
                 </a:solidFill>
                 <a:latin typeface="Calibri"/>
               </a:rPr>
-              <a:t>Common failure modes</a:t>
-            </a:r>
+              <a:t>Common </a:t>
+            </a:r>
+            <a:r>
+              <a:rPr lang="en-CA" sz="1600" b="1" dirty="0">
+                <a:solidFill>
+                  <a:srgbClr val="1A2C5C"/>
+                </a:solidFill>
+                <a:latin typeface="Calibri"/>
+              </a:rPr>
+              <a:t>hiccups/ time wasters</a:t>
+            </a:r>
+            <a:endParaRPr sz="1600" b="1" i="0" dirty="0">
+              <a:solidFill>
+                <a:srgbClr val="1A2C5C"/>
+              </a:solidFill>
+              <a:latin typeface="Calibri"/>
+            </a:endParaRPr>
           </a:p>
         </p:txBody>
       </p:sp>
@@ -7761,48 +8254,6 @@
       </p:sp>
       <p:sp>
         <p:nvSpPr>
-          <p:cNvPr id="25" name="TextBox 24"/>
-          <p:cNvSpPr txBox="1"/>
-          <p:nvPr/>
-        </p:nvSpPr>
-        <p:spPr>
-          <a:xfrm>
-            <a:off x="8439912" y="3063240"/>
-            <a:ext cx="2990088" cy="457200"/>
-          </a:xfrm>
-          <a:prstGeom prst="rect">
-            <a:avLst/>
-          </a:prstGeom>
-          <a:noFill/>
-        </p:spPr>
-        <p:txBody>
-          <a:bodyPr wrap="square" lIns="0" tIns="0" rIns="0" bIns="0">
-            <a:spAutoFit/>
-          </a:bodyPr>
-          <a:lstStyle/>
-          <a:p>
-            <a:pPr algn="l">
-              <a:lnSpc>
-                <a:spcPct val="120000"/>
-              </a:lnSpc>
-              <a:spcAft>
-                <a:spcPts val="0"/>
-              </a:spcAft>
-            </a:pPr>
-            <a:r>
-              <a:rPr sz="1300" b="0" i="0">
-                <a:solidFill>
-                  <a:srgbClr val="1F2937"/>
-                </a:solidFill>
-                <a:latin typeface="Calibri"/>
-              </a:rPr>
-              <a:t>Two engineers editing copies of the same workbook</a:t>
-            </a:r>
-          </a:p>
-        </p:txBody>
-      </p:sp>
-      <p:sp>
-        <p:nvSpPr>
           <p:cNvPr id="26" name="Rectangle 25"/>
           <p:cNvSpPr/>
           <p:nvPr/>
@@ -7847,48 +8298,6 @@
       </p:sp>
       <p:sp>
         <p:nvSpPr>
-          <p:cNvPr id="27" name="TextBox 26"/>
-          <p:cNvSpPr txBox="1"/>
-          <p:nvPr/>
-        </p:nvSpPr>
-        <p:spPr>
-          <a:xfrm>
-            <a:off x="8439912" y="3520440"/>
-            <a:ext cx="2990088" cy="457200"/>
-          </a:xfrm>
-          <a:prstGeom prst="rect">
-            <a:avLst/>
-          </a:prstGeom>
-          <a:noFill/>
-        </p:spPr>
-        <p:txBody>
-          <a:bodyPr wrap="square" lIns="0" tIns="0" rIns="0" bIns="0">
-            <a:spAutoFit/>
-          </a:bodyPr>
-          <a:lstStyle/>
-          <a:p>
-            <a:pPr algn="l">
-              <a:lnSpc>
-                <a:spcPct val="120000"/>
-              </a:lnSpc>
-              <a:spcAft>
-                <a:spcPts val="0"/>
-              </a:spcAft>
-            </a:pPr>
-            <a:r>
-              <a:rPr sz="1300" b="0" i="0">
-                <a:solidFill>
-                  <a:srgbClr val="1F2937"/>
-                </a:solidFill>
-                <a:latin typeface="Calibri"/>
-              </a:rPr>
-              <a:t>Mis-pasted columns silently changing totals</a:t>
-            </a:r>
-          </a:p>
-        </p:txBody>
-      </p:sp>
-      <p:sp>
-        <p:nvSpPr>
           <p:cNvPr id="28" name="Rectangle 27"/>
           <p:cNvSpPr/>
           <p:nvPr/>
@@ -7933,48 +8342,6 @@
       </p:sp>
       <p:sp>
         <p:nvSpPr>
-          <p:cNvPr id="29" name="TextBox 28"/>
-          <p:cNvSpPr txBox="1"/>
-          <p:nvPr/>
-        </p:nvSpPr>
-        <p:spPr>
-          <a:xfrm>
-            <a:off x="8439912" y="3977640"/>
-            <a:ext cx="2990088" cy="457200"/>
-          </a:xfrm>
-          <a:prstGeom prst="rect">
-            <a:avLst/>
-          </a:prstGeom>
-          <a:noFill/>
-        </p:spPr>
-        <p:txBody>
-          <a:bodyPr wrap="square" lIns="0" tIns="0" rIns="0" bIns="0">
-            <a:spAutoFit/>
-          </a:bodyPr>
-          <a:lstStyle/>
-          <a:p>
-            <a:pPr algn="l">
-              <a:lnSpc>
-                <a:spcPct val="120000"/>
-              </a:lnSpc>
-              <a:spcAft>
-                <a:spcPts val="0"/>
-              </a:spcAft>
-            </a:pPr>
-            <a:r>
-              <a:rPr sz="1300" b="0" i="0">
-                <a:solidFill>
-                  <a:srgbClr val="1F2937"/>
-                </a:solidFill>
-                <a:latin typeface="Calibri"/>
-              </a:rPr>
-              <a:t>Lost public-sales data when re-doing PA</a:t>
-            </a:r>
-          </a:p>
-        </p:txBody>
-      </p:sp>
-      <p:sp>
-        <p:nvSpPr>
           <p:cNvPr id="30" name="Rectangle 29"/>
           <p:cNvSpPr/>
           <p:nvPr/>
@@ -8019,43 +8386,69 @@
       </p:sp>
       <p:sp>
         <p:nvSpPr>
-          <p:cNvPr id="31" name="TextBox 30"/>
-          <p:cNvSpPr txBox="1"/>
-          <p:nvPr/>
-        </p:nvSpPr>
-        <p:spPr>
-          <a:xfrm>
-            <a:off x="8439912" y="4434840"/>
-            <a:ext cx="2990088" cy="457200"/>
-          </a:xfrm>
-          <a:prstGeom prst="rect">
-            <a:avLst/>
-          </a:prstGeom>
-          <a:noFill/>
-        </p:spPr>
-        <p:txBody>
-          <a:bodyPr wrap="square" lIns="0" tIns="0" rIns="0" bIns="0">
-            <a:spAutoFit/>
-          </a:bodyPr>
-          <a:lstStyle/>
-          <a:p>
-            <a:pPr algn="l">
-              <a:lnSpc>
-                <a:spcPct val="120000"/>
-              </a:lnSpc>
-              <a:spcAft>
-                <a:spcPts val="0"/>
-              </a:spcAft>
-            </a:pPr>
-            <a:r>
-              <a:rPr sz="1300" b="0" i="0">
-                <a:solidFill>
-                  <a:srgbClr val="1F2937"/>
-                </a:solidFill>
-                <a:latin typeface="Calibri"/>
-              </a:rPr>
-              <a:t>Different answers for the same month</a:t>
-            </a:r>
+          <p:cNvPr id="32" name="TextBox 31">
+            <a:extLst>
+              <a:ext uri="{FF2B5EF4-FFF2-40B4-BE49-F238E27FC236}">
+                <a16:creationId xmlns:a16="http://schemas.microsoft.com/office/drawing/2014/main" id="{96501D17-42F5-A663-7879-FB19A92BEE4C}"/>
+              </a:ext>
+            </a:extLst>
+          </p:cNvPr>
+          <p:cNvSpPr txBox="1"/>
+          <p:nvPr/>
+        </p:nvSpPr>
+        <p:spPr>
+          <a:xfrm>
+            <a:off x="10600509" y="6605468"/>
+            <a:ext cx="4082448" cy="338554"/>
+          </a:xfrm>
+          <a:prstGeom prst="rect">
+            <a:avLst/>
+          </a:prstGeom>
+          <a:noFill/>
+        </p:spPr>
+        <p:txBody>
+          <a:bodyPr wrap="square" lIns="0" tIns="0" rIns="0" bIns="0" anchor="t">
+            <a:spAutoFit/>
+          </a:bodyPr>
+          <a:lstStyle/>
+          <a:p>
+            <a:r>
+              <a:rPr lang="en-CA" sz="1200" b="0" i="0" dirty="0" err="1">
+                <a:solidFill>
+                  <a:srgbClr val="6B7280"/>
+                </a:solidFill>
+                <a:latin typeface="Calibri"/>
+              </a:rPr>
+              <a:t>Adobel</a:t>
+            </a:r>
+            <a:r>
+              <a:rPr lang="en-CA" sz="1200" b="0" i="0" dirty="0">
+                <a:solidFill>
+                  <a:srgbClr val="6B7280"/>
+                </a:solidFill>
+                <a:latin typeface="Calibri"/>
+              </a:rPr>
+              <a:t> Services Inc </a:t>
+            </a:r>
+            <a:r>
+              <a:rPr lang="en-CA" sz="1200" dirty="0">
+                <a:solidFill>
+                  <a:schemeClr val="bg1">
+                    <a:lumMod val="50000"/>
+                  </a:schemeClr>
+                </a:solidFill>
+              </a:rPr>
+              <a:t>©</a:t>
+            </a:r>
+          </a:p>
+          <a:p>
+            <a:pPr algn="l"/>
+            <a:endParaRPr sz="1000" b="0" i="0" dirty="0">
+              <a:solidFill>
+                <a:srgbClr val="6B7280"/>
+              </a:solidFill>
+              <a:latin typeface="Calibri"/>
+            </a:endParaRPr>
           </a:p>
         </p:txBody>
       </p:sp>
@@ -8086,51 +8479,6 @@
       </p:grpSpPr>
       <p:sp>
         <p:nvSpPr>
-          <p:cNvPr id="2" name="Rectangle 1"/>
-          <p:cNvSpPr/>
-          <p:nvPr/>
-        </p:nvSpPr>
-        <p:spPr>
-          <a:xfrm>
-            <a:off x="0" y="0"/>
-            <a:ext cx="12191695" cy="6858000"/>
-          </a:xfrm>
-          <a:prstGeom prst="rect">
-            <a:avLst/>
-          </a:prstGeom>
-          <a:solidFill>
-            <a:srgbClr val="FFFFFF"/>
-          </a:solidFill>
-          <a:ln>
-            <a:noFill/>
-          </a:ln>
-          <a:effectLst/>
-        </p:spPr>
-        <p:style>
-          <a:lnRef idx="1">
-            <a:schemeClr val="accent1"/>
-          </a:lnRef>
-          <a:fillRef idx="3">
-            <a:schemeClr val="accent1"/>
-          </a:fillRef>
-          <a:effectRef idx="2">
-            <a:schemeClr val="accent1"/>
-          </a:effectRef>
-          <a:fontRef idx="minor">
-            <a:schemeClr val="lt1"/>
-          </a:fontRef>
-        </p:style>
-        <p:txBody>
-          <a:bodyPr rtlCol="0" anchor="ctr"/>
-          <a:lstStyle/>
-          <a:p>
-            <a:pPr algn="ctr"/>
-            <a:endParaRPr/>
-          </a:p>
-        </p:txBody>
-      </p:sp>
-      <p:sp>
-        <p:nvSpPr>
           <p:cNvPr id="3" name="Rectangle 2"/>
           <p:cNvSpPr/>
           <p:nvPr/>
@@ -8618,7 +8966,7 @@
         </p:nvSpPr>
         <p:spPr>
           <a:xfrm>
-            <a:off x="1307592" y="3063240"/>
+            <a:off x="1307592" y="3139440"/>
             <a:ext cx="4270248" cy="457200"/>
           </a:xfrm>
           <a:prstGeom prst="rect">
@@ -8704,7 +9052,7 @@
         </p:nvSpPr>
         <p:spPr>
           <a:xfrm>
-            <a:off x="1307592" y="3520440"/>
+            <a:off x="1307592" y="3596640"/>
             <a:ext cx="4270248" cy="457200"/>
           </a:xfrm>
           <a:prstGeom prst="rect">
@@ -8727,7 +9075,7 @@
               </a:spcAft>
             </a:pPr>
             <a:r>
-              <a:rPr sz="1400" b="0" i="0">
+              <a:rPr sz="1400" b="0" i="0" dirty="0">
                 <a:solidFill>
                   <a:srgbClr val="1F2937"/>
                 </a:solidFill>
@@ -8790,7 +9138,7 @@
         </p:nvSpPr>
         <p:spPr>
           <a:xfrm>
-            <a:off x="1307592" y="3977640"/>
+            <a:off x="1307592" y="4049486"/>
             <a:ext cx="4270248" cy="457200"/>
           </a:xfrm>
           <a:prstGeom prst="rect">
@@ -8813,7 +9161,7 @@
               </a:spcAft>
             </a:pPr>
             <a:r>
-              <a:rPr sz="1400" b="0" i="0">
+              <a:rPr sz="1400" b="0" i="0" dirty="0">
                 <a:solidFill>
                   <a:srgbClr val="1F2937"/>
                 </a:solidFill>
@@ -8876,7 +9224,7 @@
         </p:nvSpPr>
         <p:spPr>
           <a:xfrm>
-            <a:off x="1307592" y="4434840"/>
+            <a:off x="1307592" y="4506686"/>
             <a:ext cx="4270248" cy="457200"/>
           </a:xfrm>
           <a:prstGeom prst="rect">
@@ -8899,13 +9247,22 @@
               </a:spcAft>
             </a:pPr>
             <a:r>
-              <a:rPr sz="1400" b="0" i="0">
+              <a:rPr sz="1400" b="0" i="0" dirty="0" err="1">
                 <a:solidFill>
                   <a:srgbClr val="1F2937"/>
                 </a:solidFill>
                 <a:latin typeface="Calibri"/>
               </a:rPr>
-              <a:t>Allocation_Factors — PA &amp; Public Sales factors</a:t>
+              <a:t>Allocation_Factors</a:t>
+            </a:r>
+            <a:r>
+              <a:rPr sz="1400" b="0" i="0" dirty="0">
+                <a:solidFill>
+                  <a:srgbClr val="1F2937"/>
+                </a:solidFill>
+                <a:latin typeface="Calibri"/>
+              </a:rPr>
+              <a:t> — PA &amp; Public Sales factors</a:t>
             </a:r>
           </a:p>
         </p:txBody>
@@ -8962,7 +9319,7 @@
         </p:nvSpPr>
         <p:spPr>
           <a:xfrm>
-            <a:off x="1307592" y="4892040"/>
+            <a:off x="1307592" y="4983480"/>
             <a:ext cx="4270248" cy="457200"/>
           </a:xfrm>
           <a:prstGeom prst="rect">
@@ -8985,7 +9342,7 @@
               </a:spcAft>
             </a:pPr>
             <a:r>
-              <a:rPr sz="1400" b="0" i="0">
+              <a:rPr sz="1400" b="0" i="0" dirty="0">
                 <a:solidFill>
                   <a:srgbClr val="1F2937"/>
                 </a:solidFill>
@@ -9219,7 +9576,7 @@
         </p:nvSpPr>
         <p:spPr>
           <a:xfrm>
-            <a:off x="7205472" y="3063240"/>
+            <a:off x="7205472" y="3139440"/>
             <a:ext cx="4270248" cy="457200"/>
           </a:xfrm>
           <a:prstGeom prst="rect">
@@ -9242,7 +9599,7 @@
               </a:spcAft>
             </a:pPr>
             <a:r>
-              <a:rPr sz="1400" b="0" i="0">
+              <a:rPr sz="1400" b="0" i="0" dirty="0">
                 <a:solidFill>
                   <a:srgbClr val="1F2937"/>
                 </a:solidFill>
@@ -9305,7 +9662,7 @@
         </p:nvSpPr>
         <p:spPr>
           <a:xfrm>
-            <a:off x="7205472" y="3520440"/>
+            <a:off x="7205472" y="3606546"/>
             <a:ext cx="4270248" cy="457200"/>
           </a:xfrm>
           <a:prstGeom prst="rect">
@@ -9328,7 +9685,7 @@
               </a:spcAft>
             </a:pPr>
             <a:r>
-              <a:rPr sz="1400" b="0" i="0">
+              <a:rPr sz="1400" b="0" i="0" dirty="0">
                 <a:solidFill>
                   <a:srgbClr val="1F2937"/>
                 </a:solidFill>
@@ -9391,7 +9748,7 @@
         </p:nvSpPr>
         <p:spPr>
           <a:xfrm>
-            <a:off x="7205472" y="3977640"/>
+            <a:off x="7205472" y="4064726"/>
             <a:ext cx="4270248" cy="457200"/>
           </a:xfrm>
           <a:prstGeom prst="rect">
@@ -9414,7 +9771,7 @@
               </a:spcAft>
             </a:pPr>
             <a:r>
-              <a:rPr sz="1400" b="0" i="0">
+              <a:rPr sz="1400" b="0" i="0" dirty="0">
                 <a:solidFill>
                   <a:srgbClr val="1F2937"/>
                 </a:solidFill>
@@ -9477,7 +9834,7 @@
         </p:nvSpPr>
         <p:spPr>
           <a:xfrm>
-            <a:off x="7205472" y="4434840"/>
+            <a:off x="7205472" y="4506686"/>
             <a:ext cx="4270248" cy="457200"/>
           </a:xfrm>
           <a:prstGeom prst="rect">
@@ -9500,7 +9857,7 @@
               </a:spcAft>
             </a:pPr>
             <a:r>
-              <a:rPr sz="1400" b="0" i="0">
+              <a:rPr sz="1400" b="0" i="0" dirty="0">
                 <a:solidFill>
                   <a:srgbClr val="1F2937"/>
                 </a:solidFill>
@@ -9508,6 +9865,74 @@
               </a:rPr>
               <a:t>Background workers; cancel &amp; summary on every run</a:t>
             </a:r>
+          </a:p>
+        </p:txBody>
+      </p:sp>
+      <p:sp>
+        <p:nvSpPr>
+          <p:cNvPr id="36" name="TextBox 35">
+            <a:extLst>
+              <a:ext uri="{FF2B5EF4-FFF2-40B4-BE49-F238E27FC236}">
+                <a16:creationId xmlns:a16="http://schemas.microsoft.com/office/drawing/2014/main" id="{79841BDA-280F-A821-9AA4-A29BE39D6AA4}"/>
+              </a:ext>
+            </a:extLst>
+          </p:cNvPr>
+          <p:cNvSpPr txBox="1"/>
+          <p:nvPr/>
+        </p:nvSpPr>
+        <p:spPr>
+          <a:xfrm>
+            <a:off x="10600509" y="6605468"/>
+            <a:ext cx="4082448" cy="338554"/>
+          </a:xfrm>
+          <a:prstGeom prst="rect">
+            <a:avLst/>
+          </a:prstGeom>
+          <a:noFill/>
+        </p:spPr>
+        <p:txBody>
+          <a:bodyPr wrap="square" lIns="0" tIns="0" rIns="0" bIns="0" anchor="t">
+            <a:spAutoFit/>
+          </a:bodyPr>
+          <a:lstStyle/>
+          <a:p>
+            <a:r>
+              <a:rPr lang="en-CA" sz="1200" b="0" i="0" dirty="0" err="1">
+                <a:solidFill>
+                  <a:srgbClr val="6B7280"/>
+                </a:solidFill>
+                <a:latin typeface="Calibri"/>
+              </a:rPr>
+              <a:t>Adobel</a:t>
+            </a:r>
+            <a:r>
+              <a:rPr lang="en-CA" sz="1200" b="0" i="0" dirty="0">
+                <a:solidFill>
+                  <a:srgbClr val="6B7280"/>
+                </a:solidFill>
+                <a:latin typeface="Calibri"/>
+              </a:rPr>
+              <a:t> Services Inc </a:t>
+            </a:r>
+            <a:r>
+              <a:rPr lang="en-CA" sz="1200" dirty="0">
+                <a:solidFill>
+                  <a:schemeClr val="bg1">
+                    <a:lumMod val="50000"/>
+                  </a:schemeClr>
+                </a:solidFill>
+              </a:rPr>
+              <a:t>©</a:t>
+            </a:r>
+          </a:p>
+          <a:p>
+            <a:pPr algn="l"/>
+            <a:endParaRPr sz="1000" b="0" i="0" dirty="0">
+              <a:solidFill>
+                <a:srgbClr val="6B7280"/>
+              </a:solidFill>
+              <a:latin typeface="Calibri"/>
+            </a:endParaRPr>
           </a:p>
         </p:txBody>
       </p:sp>
@@ -9538,51 +9963,6 @@
       </p:grpSpPr>
       <p:sp>
         <p:nvSpPr>
-          <p:cNvPr id="2" name="Rectangle 1"/>
-          <p:cNvSpPr/>
-          <p:nvPr/>
-        </p:nvSpPr>
-        <p:spPr>
-          <a:xfrm>
-            <a:off x="0" y="0"/>
-            <a:ext cx="12191695" cy="6858000"/>
-          </a:xfrm>
-          <a:prstGeom prst="rect">
-            <a:avLst/>
-          </a:prstGeom>
-          <a:solidFill>
-            <a:srgbClr val="FFFFFF"/>
-          </a:solidFill>
-          <a:ln>
-            <a:noFill/>
-          </a:ln>
-          <a:effectLst/>
-        </p:spPr>
-        <p:style>
-          <a:lnRef idx="1">
-            <a:schemeClr val="accent1"/>
-          </a:lnRef>
-          <a:fillRef idx="3">
-            <a:schemeClr val="accent1"/>
-          </a:fillRef>
-          <a:effectRef idx="2">
-            <a:schemeClr val="accent1"/>
-          </a:effectRef>
-          <a:fontRef idx="minor">
-            <a:schemeClr val="lt1"/>
-          </a:fontRef>
-        </p:style>
-        <p:txBody>
-          <a:bodyPr rtlCol="0" anchor="ctr"/>
-          <a:lstStyle/>
-          <a:p>
-            <a:pPr algn="ctr"/>
-            <a:endParaRPr/>
-          </a:p>
-        </p:txBody>
-      </p:sp>
-      <p:sp>
-        <p:nvSpPr>
           <p:cNvPr id="3" name="Rectangle 2"/>
           <p:cNvSpPr/>
           <p:nvPr/>
@@ -10966,7 +11346,7 @@
         </p:nvSpPr>
         <p:spPr>
           <a:xfrm>
-            <a:off x="8165592" y="2697480"/>
+            <a:off x="8165592" y="2774768"/>
             <a:ext cx="3203143" cy="457200"/>
           </a:xfrm>
           <a:prstGeom prst="rect">
@@ -10989,7 +11369,7 @@
               </a:spcAft>
             </a:pPr>
             <a:r>
-              <a:rPr sz="1400" b="0" i="0">
+              <a:rPr sz="1400" b="0" i="0" dirty="0">
                 <a:solidFill>
                   <a:srgbClr val="1F2937"/>
                 </a:solidFill>
@@ -11052,7 +11432,7 @@
         </p:nvSpPr>
         <p:spPr>
           <a:xfrm>
-            <a:off x="8165592" y="3154680"/>
+            <a:off x="8165592" y="3231968"/>
             <a:ext cx="3203143" cy="457200"/>
           </a:xfrm>
           <a:prstGeom prst="rect">
@@ -11075,7 +11455,7 @@
               </a:spcAft>
             </a:pPr>
             <a:r>
-              <a:rPr sz="1400" b="0" i="0">
+              <a:rPr sz="1400" b="0" i="0" dirty="0">
                 <a:solidFill>
                   <a:srgbClr val="1F2937"/>
                 </a:solidFill>
@@ -11138,7 +11518,7 @@
         </p:nvSpPr>
         <p:spPr>
           <a:xfrm>
-            <a:off x="8165592" y="3611880"/>
+            <a:off x="8165592" y="3666309"/>
             <a:ext cx="3203143" cy="457200"/>
           </a:xfrm>
           <a:prstGeom prst="rect">
@@ -11161,7 +11541,7 @@
               </a:spcAft>
             </a:pPr>
             <a:r>
-              <a:rPr sz="1400" b="0" i="0">
+              <a:rPr sz="1400" b="0" i="0" dirty="0">
                 <a:solidFill>
                   <a:srgbClr val="1F2937"/>
                 </a:solidFill>
@@ -11224,7 +11604,7 @@
         </p:nvSpPr>
         <p:spPr>
           <a:xfrm>
-            <a:off x="8165592" y="4069080"/>
+            <a:off x="8165592" y="4122420"/>
             <a:ext cx="3203143" cy="457200"/>
           </a:xfrm>
           <a:prstGeom prst="rect">
@@ -11247,7 +11627,7 @@
               </a:spcAft>
             </a:pPr>
             <a:r>
-              <a:rPr sz="1400" b="0" i="0">
+              <a:rPr sz="1400" b="0" i="0" dirty="0" err="1">
                 <a:solidFill>
                   <a:srgbClr val="1F2937"/>
                 </a:solidFill>
@@ -11255,6 +11635,12 @@
               </a:rPr>
               <a:t>Allocation_Factors</a:t>
             </a:r>
+            <a:endParaRPr sz="1400" b="0" i="0" dirty="0">
+              <a:solidFill>
+                <a:srgbClr val="1F2937"/>
+              </a:solidFill>
+              <a:latin typeface="Calibri"/>
+            </a:endParaRPr>
           </a:p>
         </p:txBody>
       </p:sp>
@@ -11310,7 +11696,7 @@
         </p:nvSpPr>
         <p:spPr>
           <a:xfrm>
-            <a:off x="8165592" y="4526280"/>
+            <a:off x="8165592" y="4603568"/>
             <a:ext cx="3203143" cy="457200"/>
           </a:xfrm>
           <a:prstGeom prst="rect">
@@ -11396,7 +11782,7 @@
         </p:nvSpPr>
         <p:spPr>
           <a:xfrm>
-            <a:off x="8165592" y="4983480"/>
+            <a:off x="8165592" y="5073831"/>
             <a:ext cx="3203143" cy="457200"/>
           </a:xfrm>
           <a:prstGeom prst="rect">
@@ -11419,7 +11805,7 @@
               </a:spcAft>
             </a:pPr>
             <a:r>
-              <a:rPr sz="1400" b="0" i="0">
+              <a:rPr sz="1400" b="0" i="0" dirty="0">
                 <a:solidFill>
                   <a:srgbClr val="1F2937"/>
                 </a:solidFill>
@@ -11427,6 +11813,74 @@
               </a:rPr>
               <a:t>PCE_TC</a:t>
             </a:r>
+          </a:p>
+        </p:txBody>
+      </p:sp>
+      <p:sp>
+        <p:nvSpPr>
+          <p:cNvPr id="48" name="TextBox 47">
+            <a:extLst>
+              <a:ext uri="{FF2B5EF4-FFF2-40B4-BE49-F238E27FC236}">
+                <a16:creationId xmlns:a16="http://schemas.microsoft.com/office/drawing/2014/main" id="{EDB4A443-9DB0-E4F2-8C83-6DE99903F85F}"/>
+              </a:ext>
+            </a:extLst>
+          </p:cNvPr>
+          <p:cNvSpPr txBox="1"/>
+          <p:nvPr/>
+        </p:nvSpPr>
+        <p:spPr>
+          <a:xfrm>
+            <a:off x="10600509" y="6605468"/>
+            <a:ext cx="4082448" cy="338554"/>
+          </a:xfrm>
+          <a:prstGeom prst="rect">
+            <a:avLst/>
+          </a:prstGeom>
+          <a:noFill/>
+        </p:spPr>
+        <p:txBody>
+          <a:bodyPr wrap="square" lIns="0" tIns="0" rIns="0" bIns="0" anchor="t">
+            <a:spAutoFit/>
+          </a:bodyPr>
+          <a:lstStyle/>
+          <a:p>
+            <a:r>
+              <a:rPr lang="en-CA" sz="1200" b="0" i="0" dirty="0" err="1">
+                <a:solidFill>
+                  <a:srgbClr val="6B7280"/>
+                </a:solidFill>
+                <a:latin typeface="Calibri"/>
+              </a:rPr>
+              <a:t>Adobel</a:t>
+            </a:r>
+            <a:r>
+              <a:rPr lang="en-CA" sz="1200" b="0" i="0" dirty="0">
+                <a:solidFill>
+                  <a:srgbClr val="6B7280"/>
+                </a:solidFill>
+                <a:latin typeface="Calibri"/>
+              </a:rPr>
+              <a:t> Services Inc </a:t>
+            </a:r>
+            <a:r>
+              <a:rPr lang="en-CA" sz="1200" dirty="0">
+                <a:solidFill>
+                  <a:schemeClr val="bg1">
+                    <a:lumMod val="50000"/>
+                  </a:schemeClr>
+                </a:solidFill>
+              </a:rPr>
+              <a:t>©</a:t>
+            </a:r>
+          </a:p>
+          <a:p>
+            <a:pPr algn="l"/>
+            <a:endParaRPr sz="1000" b="0" i="0" dirty="0">
+              <a:solidFill>
+                <a:srgbClr val="6B7280"/>
+              </a:solidFill>
+              <a:latin typeface="Calibri"/>
+            </a:endParaRPr>
           </a:p>
         </p:txBody>
       </p:sp>
@@ -11457,51 +11911,6 @@
       </p:grpSpPr>
       <p:sp>
         <p:nvSpPr>
-          <p:cNvPr id="2" name="Rectangle 1"/>
-          <p:cNvSpPr/>
-          <p:nvPr/>
-        </p:nvSpPr>
-        <p:spPr>
-          <a:xfrm>
-            <a:off x="0" y="0"/>
-            <a:ext cx="12191695" cy="6858000"/>
-          </a:xfrm>
-          <a:prstGeom prst="rect">
-            <a:avLst/>
-          </a:prstGeom>
-          <a:solidFill>
-            <a:srgbClr val="FFFFFF"/>
-          </a:solidFill>
-          <a:ln>
-            <a:noFill/>
-          </a:ln>
-          <a:effectLst/>
-        </p:spPr>
-        <p:style>
-          <a:lnRef idx="1">
-            <a:schemeClr val="accent1"/>
-          </a:lnRef>
-          <a:fillRef idx="3">
-            <a:schemeClr val="accent1"/>
-          </a:fillRef>
-          <a:effectRef idx="2">
-            <a:schemeClr val="accent1"/>
-          </a:effectRef>
-          <a:fontRef idx="minor">
-            <a:schemeClr val="lt1"/>
-          </a:fontRef>
-        </p:style>
-        <p:txBody>
-          <a:bodyPr rtlCol="0" anchor="ctr"/>
-          <a:lstStyle/>
-          <a:p>
-            <a:pPr algn="ctr"/>
-            <a:endParaRPr/>
-          </a:p>
-        </p:txBody>
-      </p:sp>
-      <p:sp>
-        <p:nvSpPr>
           <p:cNvPr id="3" name="Rectangle 2"/>
           <p:cNvSpPr/>
           <p:nvPr/>
@@ -12876,41 +13285,6 @@
       </p:sp>
       <p:sp>
         <p:nvSpPr>
-          <p:cNvPr id="37" name="TextBox 36"/>
-          <p:cNvSpPr txBox="1"/>
-          <p:nvPr/>
-        </p:nvSpPr>
-        <p:spPr>
-          <a:xfrm>
-            <a:off x="6461607" y="4846320"/>
-            <a:ext cx="2087803" cy="1280160"/>
-          </a:xfrm>
-          <a:prstGeom prst="rect">
-            <a:avLst/>
-          </a:prstGeom>
-          <a:noFill/>
-        </p:spPr>
-        <p:txBody>
-          <a:bodyPr wrap="square" lIns="0" tIns="0" rIns="0" bIns="0" anchor="t">
-            <a:spAutoFit/>
-          </a:bodyPr>
-          <a:lstStyle/>
-          <a:p>
-            <a:pPr algn="l"/>
-            <a:r>
-              <a:rPr sz="1200" b="0" i="0">
-                <a:solidFill>
-                  <a:srgbClr val="6B7280"/>
-                </a:solidFill>
-                <a:latin typeface="Calibri"/>
-              </a:rPr>
-              <a:t>Placeholder for next phase</a:t>
-            </a:r>
-          </a:p>
-        </p:txBody>
-      </p:sp>
-      <p:sp>
-        <p:nvSpPr>
           <p:cNvPr id="38" name="Rectangle 37"/>
           <p:cNvSpPr/>
           <p:nvPr/>
@@ -13038,14 +13412,20 @@
       </p:sp>
       <p:sp>
         <p:nvSpPr>
-          <p:cNvPr id="41" name="TextBox 40"/>
-          <p:cNvSpPr txBox="1"/>
-          <p:nvPr/>
-        </p:nvSpPr>
-        <p:spPr>
-          <a:xfrm>
-            <a:off x="9280931" y="4846320"/>
-            <a:ext cx="2087803" cy="1280160"/>
+          <p:cNvPr id="42" name="TextBox 41">
+            <a:extLst>
+              <a:ext uri="{FF2B5EF4-FFF2-40B4-BE49-F238E27FC236}">
+                <a16:creationId xmlns:a16="http://schemas.microsoft.com/office/drawing/2014/main" id="{442A337B-E848-CE1E-671F-E240523F70AE}"/>
+              </a:ext>
+            </a:extLst>
+          </p:cNvPr>
+          <p:cNvSpPr txBox="1"/>
+          <p:nvPr/>
+        </p:nvSpPr>
+        <p:spPr>
+          <a:xfrm>
+            <a:off x="10600509" y="6605468"/>
+            <a:ext cx="4082448" cy="338554"/>
           </a:xfrm>
           <a:prstGeom prst="rect">
             <a:avLst/>
@@ -13058,16 +13438,43 @@
           </a:bodyPr>
           <a:lstStyle/>
           <a:p>
+            <a:r>
+              <a:rPr lang="en-CA" sz="1200" b="0" i="0" dirty="0" err="1">
+                <a:solidFill>
+                  <a:srgbClr val="6B7280"/>
+                </a:solidFill>
+                <a:latin typeface="Calibri"/>
+              </a:rPr>
+              <a:t>Adobel</a:t>
+            </a:r>
+            <a:r>
+              <a:rPr lang="en-CA" sz="1200" b="0" i="0" dirty="0">
+                <a:solidFill>
+                  <a:srgbClr val="6B7280"/>
+                </a:solidFill>
+                <a:latin typeface="Calibri"/>
+              </a:rPr>
+              <a:t> Services Inc </a:t>
+            </a:r>
+            <a:r>
+              <a:rPr lang="en-CA" sz="1200" dirty="0">
+                <a:solidFill>
+                  <a:schemeClr val="bg1">
+                    <a:lumMod val="50000"/>
+                  </a:schemeClr>
+                </a:solidFill>
+              </a:rPr>
+              <a:t>©</a:t>
+            </a:r>
+          </a:p>
+          <a:p>
             <a:pPr algn="l"/>
-            <a:r>
-              <a:rPr sz="1200" b="0" i="0">
-                <a:solidFill>
-                  <a:srgbClr val="6B7280"/>
-                </a:solidFill>
-                <a:latin typeface="Calibri"/>
-              </a:rPr>
-              <a:t>Placeholder for next phase</a:t>
-            </a:r>
+            <a:endParaRPr sz="1000" b="0" i="0" dirty="0">
+              <a:solidFill>
+                <a:srgbClr val="6B7280"/>
+              </a:solidFill>
+              <a:latin typeface="Calibri"/>
+            </a:endParaRPr>
           </a:p>
         </p:txBody>
       </p:sp>
@@ -13098,51 +13505,6 @@
       </p:grpSpPr>
       <p:sp>
         <p:nvSpPr>
-          <p:cNvPr id="2" name="Rectangle 1"/>
-          <p:cNvSpPr/>
-          <p:nvPr/>
-        </p:nvSpPr>
-        <p:spPr>
-          <a:xfrm>
-            <a:off x="0" y="0"/>
-            <a:ext cx="12191695" cy="6858000"/>
-          </a:xfrm>
-          <a:prstGeom prst="rect">
-            <a:avLst/>
-          </a:prstGeom>
-          <a:solidFill>
-            <a:srgbClr val="FFFFFF"/>
-          </a:solidFill>
-          <a:ln>
-            <a:noFill/>
-          </a:ln>
-          <a:effectLst/>
-        </p:spPr>
-        <p:style>
-          <a:lnRef idx="1">
-            <a:schemeClr val="accent1"/>
-          </a:lnRef>
-          <a:fillRef idx="3">
-            <a:schemeClr val="accent1"/>
-          </a:fillRef>
-          <a:effectRef idx="2">
-            <a:schemeClr val="accent1"/>
-          </a:effectRef>
-          <a:fontRef idx="minor">
-            <a:schemeClr val="lt1"/>
-          </a:fontRef>
-        </p:style>
-        <p:txBody>
-          <a:bodyPr rtlCol="0" anchor="ctr"/>
-          <a:lstStyle/>
-          <a:p>
-            <a:pPr algn="ctr"/>
-            <a:endParaRPr/>
-          </a:p>
-        </p:txBody>
-      </p:sp>
-      <p:sp>
-        <p:nvSpPr>
           <p:cNvPr id="3" name="Rectangle 2"/>
           <p:cNvSpPr/>
           <p:nvPr/>
@@ -14445,7 +14807,7 @@
         <p:spPr>
           <a:xfrm>
             <a:off x="548640" y="5577840"/>
-            <a:ext cx="11094415" cy="411480"/>
+            <a:ext cx="11094415" cy="200055"/>
           </a:xfrm>
           <a:prstGeom prst="rect">
             <a:avLst/>
@@ -14460,14 +14822,97 @@
           <a:p>
             <a:pPr algn="ctr"/>
             <a:r>
-              <a:rPr sz="1300" b="0" i="0">
+              <a:rPr sz="1300" b="0" i="0" dirty="0">
                 <a:solidFill>
                   <a:srgbClr val="6B7280"/>
                 </a:solidFill>
                 <a:latin typeface="Calibri"/>
               </a:rPr>
-              <a:t>Exception wells skipped automatically · type-curve &amp; YE2 rows protected</a:t>
-            </a:r>
+              <a:t>Exception wells skipped automatically · type-curve</a:t>
+            </a:r>
+            <a:r>
+              <a:rPr lang="en-CA" sz="1300" b="0" i="0" dirty="0">
+                <a:solidFill>
+                  <a:srgbClr val="6B7280"/>
+                </a:solidFill>
+                <a:latin typeface="Calibri"/>
+              </a:rPr>
+              <a:t>s are protected</a:t>
+            </a:r>
+            <a:endParaRPr sz="1300" b="0" i="0" dirty="0">
+              <a:solidFill>
+                <a:srgbClr val="6B7280"/>
+              </a:solidFill>
+              <a:latin typeface="Calibri"/>
+            </a:endParaRPr>
+          </a:p>
+        </p:txBody>
+      </p:sp>
+      <p:sp>
+        <p:nvSpPr>
+          <p:cNvPr id="37" name="TextBox 36">
+            <a:extLst>
+              <a:ext uri="{FF2B5EF4-FFF2-40B4-BE49-F238E27FC236}">
+                <a16:creationId xmlns:a16="http://schemas.microsoft.com/office/drawing/2014/main" id="{68643A4D-138E-8251-59E1-BECAA3B57E93}"/>
+              </a:ext>
+            </a:extLst>
+          </p:cNvPr>
+          <p:cNvSpPr txBox="1"/>
+          <p:nvPr/>
+        </p:nvSpPr>
+        <p:spPr>
+          <a:xfrm>
+            <a:off x="10600509" y="6605468"/>
+            <a:ext cx="4082448" cy="338554"/>
+          </a:xfrm>
+          <a:prstGeom prst="rect">
+            <a:avLst/>
+          </a:prstGeom>
+          <a:noFill/>
+        </p:spPr>
+        <p:txBody>
+          <a:bodyPr wrap="square" lIns="0" tIns="0" rIns="0" bIns="0" anchor="t">
+            <a:spAutoFit/>
+          </a:bodyPr>
+          <a:lstStyle/>
+          <a:p>
+            <a:r>
+              <a:rPr lang="en-CA" sz="1200" b="0" i="0" dirty="0" err="1">
+                <a:solidFill>
+                  <a:srgbClr val="6B7280"/>
+                </a:solidFill>
+                <a:latin typeface="Calibri"/>
+              </a:rPr>
+              <a:t>Adobel</a:t>
+            </a:r>
+            <a:r>
+              <a:rPr lang="en-CA" sz="1200" b="0" i="0" dirty="0">
+                <a:solidFill>
+                  <a:srgbClr val="6B7280"/>
+                </a:solidFill>
+                <a:latin typeface="Calibri"/>
+              </a:rPr>
+              <a:t> Services Inc </a:t>
+            </a:r>
+            <a:r>
+              <a:rPr lang="en-CA" sz="1200" dirty="0">
+                <a:solidFill>
+                  <a:schemeClr val="bg1">
+                    <a:lumMod val="50000"/>
+                  </a:schemeClr>
+                </a:solidFill>
+              </a:rPr>
+              <a:t>©</a:t>
+            </a:r>
+          </a:p>
+          <a:p>
+            <a:pPr algn="l"/>
+            <a:endParaRPr sz="1000" b="0" i="0" dirty="0">
+              <a:solidFill>
+                <a:srgbClr val="6B7280"/>
+              </a:solidFill>
+              <a:latin typeface="Calibri"/>
+            </a:endParaRPr>
           </a:p>
         </p:txBody>
       </p:sp>
@@ -14498,51 +14943,6 @@
       </p:grpSpPr>
       <p:sp>
         <p:nvSpPr>
-          <p:cNvPr id="2" name="Rectangle 1"/>
-          <p:cNvSpPr/>
-          <p:nvPr/>
-        </p:nvSpPr>
-        <p:spPr>
-          <a:xfrm>
-            <a:off x="0" y="0"/>
-            <a:ext cx="12191695" cy="6858000"/>
-          </a:xfrm>
-          <a:prstGeom prst="rect">
-            <a:avLst/>
-          </a:prstGeom>
-          <a:solidFill>
-            <a:srgbClr val="FFFFFF"/>
-          </a:solidFill>
-          <a:ln>
-            <a:noFill/>
-          </a:ln>
-          <a:effectLst/>
-        </p:spPr>
-        <p:style>
-          <a:lnRef idx="1">
-            <a:schemeClr val="accent1"/>
-          </a:lnRef>
-          <a:fillRef idx="3">
-            <a:schemeClr val="accent1"/>
-          </a:fillRef>
-          <a:effectRef idx="2">
-            <a:schemeClr val="accent1"/>
-          </a:effectRef>
-          <a:fontRef idx="minor">
-            <a:schemeClr val="lt1"/>
-          </a:fontRef>
-        </p:style>
-        <p:txBody>
-          <a:bodyPr rtlCol="0" anchor="ctr"/>
-          <a:lstStyle/>
-          <a:p>
-            <a:pPr algn="ctr"/>
-            <a:endParaRPr/>
-          </a:p>
-        </p:txBody>
-      </p:sp>
-      <p:sp>
-        <p:nvSpPr>
           <p:cNvPr id="3" name="Rectangle 2"/>
           <p:cNvSpPr/>
           <p:nvPr/>
@@ -14868,7 +15268,7 @@
         </p:nvSpPr>
         <p:spPr>
           <a:xfrm>
-            <a:off x="804672" y="1828800"/>
+            <a:off x="804672" y="1887365"/>
             <a:ext cx="6693408" cy="457200"/>
           </a:xfrm>
           <a:prstGeom prst="rect">
@@ -14891,7 +15291,7 @@
               </a:spcAft>
             </a:pPr>
             <a:r>
-              <a:rPr sz="1600" b="1" i="0">
+              <a:rPr sz="1600" b="1" i="0" dirty="0">
                 <a:solidFill>
                   <a:srgbClr val="1F2937"/>
                 </a:solidFill>
@@ -14900,14 +15300,29 @@
               <a:t>PA Allocations (ValNav)</a:t>
             </a:r>
             <a:r>
-              <a:rPr sz="1600" b="0" i="0">
+              <a:rPr sz="1600" b="0" i="0" dirty="0">
                 <a:solidFill>
                   <a:srgbClr val="1F2937"/>
                 </a:solidFill>
                 <a:latin typeface="Calibri"/>
               </a:rPr>
-              <a:t> — Writes monthly factors to Allocation_Factors</a:t>
-            </a:r>
+              <a:t> — Writes monthly factors to </a:t>
+            </a:r>
+            <a:r>
+              <a:rPr sz="1600" b="0" i="0" dirty="0" err="1">
+                <a:solidFill>
+                  <a:srgbClr val="1F2937"/>
+                </a:solidFill>
+                <a:latin typeface="Calibri"/>
+              </a:rPr>
+              <a:t>Allocation_Factors</a:t>
+            </a:r>
+            <a:endParaRPr sz="1600" b="0" i="0" dirty="0">
+              <a:solidFill>
+                <a:srgbClr val="1F2937"/>
+              </a:solidFill>
+              <a:latin typeface="Calibri"/>
+            </a:endParaRPr>
           </a:p>
         </p:txBody>
       </p:sp>
@@ -14963,7 +15378,7 @@
         </p:nvSpPr>
         <p:spPr>
           <a:xfrm>
-            <a:off x="804672" y="2286000"/>
+            <a:off x="804672" y="2366554"/>
             <a:ext cx="6693408" cy="457200"/>
           </a:xfrm>
           <a:prstGeom prst="rect">
@@ -14986,7 +15401,7 @@
               </a:spcAft>
             </a:pPr>
             <a:r>
-              <a:rPr sz="1600" b="1" i="0">
+              <a:rPr sz="1600" b="1" i="0" dirty="0">
                 <a:solidFill>
                   <a:srgbClr val="1F2937"/>
                 </a:solidFill>
@@ -14995,7 +15410,7 @@
               <a:t>Public Sales (Accumap)</a:t>
             </a:r>
             <a:r>
-              <a:rPr sz="1600" b="0" i="0">
+              <a:rPr sz="1600" b="0" i="0" dirty="0">
                 <a:solidFill>
                   <a:srgbClr val="1F2937"/>
                 </a:solidFill>
@@ -15058,7 +15473,7 @@
         </p:nvSpPr>
         <p:spPr>
           <a:xfrm>
-            <a:off x="804672" y="2743200"/>
+            <a:off x="804672" y="2808732"/>
             <a:ext cx="6693408" cy="457200"/>
           </a:xfrm>
           <a:prstGeom prst="rect">
@@ -15103,7 +15518,7 @@
       </p:sp>
       <p:sp>
         <p:nvSpPr>
-          <p:cNvPr id="16" name="Rectangle 15"/>
+          <p:cNvPr id="18" name="Rectangle 17"/>
           <p:cNvSpPr/>
           <p:nvPr/>
         </p:nvSpPr>
@@ -15147,13 +15562,13 @@
       </p:sp>
       <p:sp>
         <p:nvSpPr>
-          <p:cNvPr id="17" name="TextBox 16"/>
-          <p:cNvSpPr txBox="1"/>
-          <p:nvPr/>
-        </p:nvSpPr>
-        <p:spPr>
-          <a:xfrm>
-            <a:off x="804672" y="3200400"/>
+          <p:cNvPr id="19" name="TextBox 18"/>
+          <p:cNvSpPr txBox="1"/>
+          <p:nvPr/>
+        </p:nvSpPr>
+        <p:spPr>
+          <a:xfrm>
+            <a:off x="804672" y="3271919"/>
             <a:ext cx="6693408" cy="457200"/>
           </a:xfrm>
           <a:prstGeom prst="rect">
@@ -15176,116 +15591,21 @@
               </a:spcAft>
             </a:pPr>
             <a:r>
-              <a:rPr sz="1600" b="1" i="0">
+              <a:rPr sz="1600" b="1" i="0" dirty="0">
                 <a:solidFill>
                   <a:srgbClr val="1F2937"/>
                 </a:solidFill>
                 <a:latin typeface="Calibri"/>
               </a:rPr>
-              <a:t>Sales_Gas preserved</a:t>
-            </a:r>
-            <a:r>
-              <a:rPr sz="1600" b="0" i="0">
+              <a:t>Idempotent month</a:t>
+            </a:r>
+            <a:r>
+              <a:rPr sz="1600" b="0" i="0" dirty="0">
                 <a:solidFill>
                   <a:srgbClr val="1F2937"/>
                 </a:solidFill>
                 <a:latin typeface="Calibri"/>
               </a:rPr>
-              <a:t> — Re-running PA does not erase Public Sales data</a:t>
-            </a:r>
-          </a:p>
-        </p:txBody>
-      </p:sp>
-      <p:sp>
-        <p:nvSpPr>
-          <p:cNvPr id="18" name="Rectangle 17"/>
-          <p:cNvSpPr/>
-          <p:nvPr/>
-        </p:nvSpPr>
-        <p:spPr>
-          <a:xfrm>
-            <a:off x="548640" y="3822192"/>
-            <a:ext cx="91440" cy="91440"/>
-          </a:xfrm>
-          <a:prstGeom prst="rect">
-            <a:avLst/>
-          </a:prstGeom>
-          <a:solidFill>
-            <a:srgbClr val="82BC3F"/>
-          </a:solidFill>
-          <a:ln>
-            <a:noFill/>
-          </a:ln>
-        </p:spPr>
-        <p:style>
-          <a:lnRef idx="1">
-            <a:schemeClr val="accent1"/>
-          </a:lnRef>
-          <a:fillRef idx="3">
-            <a:schemeClr val="accent1"/>
-          </a:fillRef>
-          <a:effectRef idx="2">
-            <a:schemeClr val="accent1"/>
-          </a:effectRef>
-          <a:fontRef idx="minor">
-            <a:schemeClr val="lt1"/>
-          </a:fontRef>
-        </p:style>
-        <p:txBody>
-          <a:bodyPr rtlCol="0" anchor="ctr"/>
-          <a:lstStyle/>
-          <a:p>
-            <a:pPr algn="ctr"/>
-            <a:endParaRPr/>
-          </a:p>
-        </p:txBody>
-      </p:sp>
-      <p:sp>
-        <p:nvSpPr>
-          <p:cNvPr id="19" name="TextBox 18"/>
-          <p:cNvSpPr txBox="1"/>
-          <p:nvPr/>
-        </p:nvSpPr>
-        <p:spPr>
-          <a:xfrm>
-            <a:off x="804672" y="3657600"/>
-            <a:ext cx="6693408" cy="457200"/>
-          </a:xfrm>
-          <a:prstGeom prst="rect">
-            <a:avLst/>
-          </a:prstGeom>
-          <a:noFill/>
-        </p:spPr>
-        <p:txBody>
-          <a:bodyPr wrap="square" lIns="0" tIns="0" rIns="0" bIns="0">
-            <a:spAutoFit/>
-          </a:bodyPr>
-          <a:lstStyle/>
-          <a:p>
-            <a:pPr algn="l">
-              <a:lnSpc>
-                <a:spcPct val="120000"/>
-              </a:lnSpc>
-              <a:spcAft>
-                <a:spcPts val="0"/>
-              </a:spcAft>
-            </a:pPr>
-            <a:r>
-              <a:rPr sz="1600" b="1" i="0">
-                <a:solidFill>
-                  <a:srgbClr val="1F2937"/>
-                </a:solidFill>
-                <a:latin typeface="Calibri"/>
-              </a:rPr>
-              <a:t>Idempotent month</a:t>
-            </a:r>
-            <a:r>
-              <a:rPr sz="1600" b="0" i="0">
-                <a:solidFill>
-                  <a:srgbClr val="1F2937"/>
-                </a:solidFill>
-                <a:latin typeface="Calibri"/>
-              </a:rPr>
               <a:t> — Existing month is deleted and rebuilt consistently</a:t>
             </a:r>
           </a:p>
@@ -15293,106 +15613,20 @@
       </p:sp>
       <p:sp>
         <p:nvSpPr>
-          <p:cNvPr id="20" name="Rectangle 19"/>
-          <p:cNvSpPr/>
-          <p:nvPr/>
-        </p:nvSpPr>
-        <p:spPr>
-          <a:xfrm>
-            <a:off x="7680960" y="1828800"/>
-            <a:ext cx="4023360" cy="4206240"/>
-          </a:xfrm>
-          <a:prstGeom prst="rect">
-            <a:avLst/>
-          </a:prstGeom>
-          <a:solidFill>
-            <a:srgbClr val="EFF6E2"/>
-          </a:solidFill>
-          <a:ln w="9525">
-            <a:solidFill>
-              <a:srgbClr val="E5E7EB"/>
-            </a:solidFill>
-          </a:ln>
-          <a:effectLst/>
-        </p:spPr>
-        <p:style>
-          <a:lnRef idx="1">
-            <a:schemeClr val="accent1"/>
-          </a:lnRef>
-          <a:fillRef idx="3">
-            <a:schemeClr val="accent1"/>
-          </a:fillRef>
-          <a:effectRef idx="2">
-            <a:schemeClr val="accent1"/>
-          </a:effectRef>
-          <a:fontRef idx="minor">
-            <a:schemeClr val="lt1"/>
-          </a:fontRef>
-        </p:style>
-        <p:txBody>
-          <a:bodyPr rtlCol="0" anchor="ctr"/>
-          <a:lstStyle/>
-          <a:p>
-            <a:pPr algn="ctr"/>
-            <a:endParaRPr/>
-          </a:p>
-        </p:txBody>
-      </p:sp>
-      <p:sp>
-        <p:nvSpPr>
-          <p:cNvPr id="21" name="Rectangle 20"/>
-          <p:cNvSpPr/>
-          <p:nvPr/>
-        </p:nvSpPr>
-        <p:spPr>
-          <a:xfrm>
-            <a:off x="7680960" y="1828800"/>
-            <a:ext cx="164592" cy="4206240"/>
-          </a:xfrm>
-          <a:prstGeom prst="rect">
-            <a:avLst/>
-          </a:prstGeom>
-          <a:solidFill>
-            <a:srgbClr val="82BC3F"/>
-          </a:solidFill>
-          <a:ln>
-            <a:noFill/>
-          </a:ln>
-          <a:effectLst/>
-        </p:spPr>
-        <p:style>
-          <a:lnRef idx="1">
-            <a:schemeClr val="accent1"/>
-          </a:lnRef>
-          <a:fillRef idx="3">
-            <a:schemeClr val="accent1"/>
-          </a:fillRef>
-          <a:effectRef idx="2">
-            <a:schemeClr val="accent1"/>
-          </a:effectRef>
-          <a:fontRef idx="minor">
-            <a:schemeClr val="lt1"/>
-          </a:fontRef>
-        </p:style>
-        <p:txBody>
-          <a:bodyPr rtlCol="0" anchor="ctr"/>
-          <a:lstStyle/>
-          <a:p>
-            <a:pPr algn="ctr"/>
-            <a:endParaRPr/>
-          </a:p>
-        </p:txBody>
-      </p:sp>
-      <p:sp>
-        <p:nvSpPr>
-          <p:cNvPr id="22" name="TextBox 21"/>
-          <p:cNvSpPr txBox="1"/>
-          <p:nvPr/>
-        </p:nvSpPr>
-        <p:spPr>
-          <a:xfrm>
-            <a:off x="8183880" y="2103120"/>
-            <a:ext cx="3337560" cy="457200"/>
+          <p:cNvPr id="31" name="TextBox 30">
+            <a:extLst>
+              <a:ext uri="{FF2B5EF4-FFF2-40B4-BE49-F238E27FC236}">
+                <a16:creationId xmlns:a16="http://schemas.microsoft.com/office/drawing/2014/main" id="{DC0A89AF-C104-0647-344C-C6C15235D61C}"/>
+              </a:ext>
+            </a:extLst>
+          </p:cNvPr>
+          <p:cNvSpPr txBox="1"/>
+          <p:nvPr/>
+        </p:nvSpPr>
+        <p:spPr>
+          <a:xfrm>
+            <a:off x="10600509" y="6605468"/>
+            <a:ext cx="4082448" cy="338554"/>
           </a:xfrm>
           <a:prstGeom prst="rect">
             <a:avLst/>
@@ -15405,360 +15639,43 @@
           </a:bodyPr>
           <a:lstStyle/>
           <a:p>
+            <a:r>
+              <a:rPr lang="en-CA" sz="1200" b="0" i="0" dirty="0" err="1">
+                <a:solidFill>
+                  <a:srgbClr val="6B7280"/>
+                </a:solidFill>
+                <a:latin typeface="Calibri"/>
+              </a:rPr>
+              <a:t>Adobel</a:t>
+            </a:r>
+            <a:r>
+              <a:rPr lang="en-CA" sz="1200" b="0" i="0" dirty="0">
+                <a:solidFill>
+                  <a:srgbClr val="6B7280"/>
+                </a:solidFill>
+                <a:latin typeface="Calibri"/>
+              </a:rPr>
+              <a:t> Services Inc </a:t>
+            </a:r>
+            <a:r>
+              <a:rPr lang="en-CA" sz="1200" dirty="0">
+                <a:solidFill>
+                  <a:schemeClr val="bg1">
+                    <a:lumMod val="50000"/>
+                  </a:schemeClr>
+                </a:solidFill>
+              </a:rPr>
+              <a:t>©</a:t>
+            </a:r>
+          </a:p>
+          <a:p>
             <a:pPr algn="l"/>
-            <a:r>
-              <a:rPr sz="1600" b="1" i="0">
-                <a:solidFill>
-                  <a:srgbClr val="1A2C5C"/>
-                </a:solidFill>
-                <a:latin typeface="Calibri"/>
-              </a:rPr>
-              <a:t>The old foot-gun</a:t>
-            </a:r>
-          </a:p>
-        </p:txBody>
-      </p:sp>
-      <p:sp>
-        <p:nvSpPr>
-          <p:cNvPr id="23" name="Rectangle 22"/>
-          <p:cNvSpPr/>
-          <p:nvPr/>
-        </p:nvSpPr>
-        <p:spPr>
-          <a:xfrm>
-            <a:off x="8183880" y="2862072"/>
-            <a:ext cx="91440" cy="91440"/>
-          </a:xfrm>
-          <a:prstGeom prst="rect">
-            <a:avLst/>
-          </a:prstGeom>
-          <a:solidFill>
-            <a:srgbClr val="82BC3F"/>
-          </a:solidFill>
-          <a:ln>
-            <a:noFill/>
-          </a:ln>
-        </p:spPr>
-        <p:style>
-          <a:lnRef idx="1">
-            <a:schemeClr val="accent1"/>
-          </a:lnRef>
-          <a:fillRef idx="3">
-            <a:schemeClr val="accent1"/>
-          </a:fillRef>
-          <a:effectRef idx="2">
-            <a:schemeClr val="accent1"/>
-          </a:effectRef>
-          <a:fontRef idx="minor">
-            <a:schemeClr val="lt1"/>
-          </a:fontRef>
-        </p:style>
-        <p:txBody>
-          <a:bodyPr rtlCol="0" anchor="ctr"/>
-          <a:lstStyle/>
-          <a:p>
-            <a:pPr algn="ctr"/>
-            <a:endParaRPr/>
-          </a:p>
-        </p:txBody>
-      </p:sp>
-      <p:sp>
-        <p:nvSpPr>
-          <p:cNvPr id="24" name="TextBox 23"/>
-          <p:cNvSpPr txBox="1"/>
-          <p:nvPr/>
-        </p:nvSpPr>
-        <p:spPr>
-          <a:xfrm>
-            <a:off x="8439912" y="2697480"/>
-            <a:ext cx="2990088" cy="457200"/>
-          </a:xfrm>
-          <a:prstGeom prst="rect">
-            <a:avLst/>
-          </a:prstGeom>
-          <a:noFill/>
-        </p:spPr>
-        <p:txBody>
-          <a:bodyPr wrap="square" lIns="0" tIns="0" rIns="0" bIns="0">
-            <a:spAutoFit/>
-          </a:bodyPr>
-          <a:lstStyle/>
-          <a:p>
-            <a:pPr algn="l">
-              <a:lnSpc>
-                <a:spcPct val="120000"/>
-              </a:lnSpc>
-              <a:spcAft>
-                <a:spcPts val="0"/>
-              </a:spcAft>
-            </a:pPr>
-            <a:r>
-              <a:rPr sz="1300" b="0" i="0">
-                <a:solidFill>
-                  <a:srgbClr val="1F2937"/>
-                </a:solidFill>
-                <a:latin typeface="Calibri"/>
-              </a:rPr>
-              <a:t>Doing PA after Public Sales used to wipe Sales_Gas to zero</a:t>
-            </a:r>
-          </a:p>
-        </p:txBody>
-      </p:sp>
-      <p:sp>
-        <p:nvSpPr>
-          <p:cNvPr id="25" name="Rectangle 24"/>
-          <p:cNvSpPr/>
-          <p:nvPr/>
-        </p:nvSpPr>
-        <p:spPr>
-          <a:xfrm>
-            <a:off x="8183880" y="3319272"/>
-            <a:ext cx="91440" cy="91440"/>
-          </a:xfrm>
-          <a:prstGeom prst="rect">
-            <a:avLst/>
-          </a:prstGeom>
-          <a:solidFill>
-            <a:srgbClr val="82BC3F"/>
-          </a:solidFill>
-          <a:ln>
-            <a:noFill/>
-          </a:ln>
-        </p:spPr>
-        <p:style>
-          <a:lnRef idx="1">
-            <a:schemeClr val="accent1"/>
-          </a:lnRef>
-          <a:fillRef idx="3">
-            <a:schemeClr val="accent1"/>
-          </a:fillRef>
-          <a:effectRef idx="2">
-            <a:schemeClr val="accent1"/>
-          </a:effectRef>
-          <a:fontRef idx="minor">
-            <a:schemeClr val="lt1"/>
-          </a:fontRef>
-        </p:style>
-        <p:txBody>
-          <a:bodyPr rtlCol="0" anchor="ctr"/>
-          <a:lstStyle/>
-          <a:p>
-            <a:pPr algn="ctr"/>
-            <a:endParaRPr/>
-          </a:p>
-        </p:txBody>
-      </p:sp>
-      <p:sp>
-        <p:nvSpPr>
-          <p:cNvPr id="26" name="TextBox 25"/>
-          <p:cNvSpPr txBox="1"/>
-          <p:nvPr/>
-        </p:nvSpPr>
-        <p:spPr>
-          <a:xfrm>
-            <a:off x="8439912" y="3154680"/>
-            <a:ext cx="2990088" cy="457200"/>
-          </a:xfrm>
-          <a:prstGeom prst="rect">
-            <a:avLst/>
-          </a:prstGeom>
-          <a:noFill/>
-        </p:spPr>
-        <p:txBody>
-          <a:bodyPr wrap="square" lIns="0" tIns="0" rIns="0" bIns="0">
-            <a:spAutoFit/>
-          </a:bodyPr>
-          <a:lstStyle/>
-          <a:p>
-            <a:pPr algn="l">
-              <a:lnSpc>
-                <a:spcPct val="120000"/>
-              </a:lnSpc>
-              <a:spcAft>
-                <a:spcPts val="0"/>
-              </a:spcAft>
-            </a:pPr>
-            <a:r>
-              <a:rPr sz="1300" b="0" i="0">
-                <a:solidFill>
-                  <a:srgbClr val="1F2937"/>
-                </a:solidFill>
-                <a:latin typeface="Calibri"/>
-              </a:rPr>
-              <a:t>Engineers had to restore Accumap data by hand</a:t>
-            </a:r>
-          </a:p>
-        </p:txBody>
-      </p:sp>
-      <p:sp>
-        <p:nvSpPr>
-          <p:cNvPr id="27" name="Rectangle 26"/>
-          <p:cNvSpPr/>
-          <p:nvPr/>
-        </p:nvSpPr>
-        <p:spPr>
-          <a:xfrm>
-            <a:off x="8183880" y="3776472"/>
-            <a:ext cx="91440" cy="91440"/>
-          </a:xfrm>
-          <a:prstGeom prst="rect">
-            <a:avLst/>
-          </a:prstGeom>
-          <a:solidFill>
-            <a:srgbClr val="82BC3F"/>
-          </a:solidFill>
-          <a:ln>
-            <a:noFill/>
-          </a:ln>
-        </p:spPr>
-        <p:style>
-          <a:lnRef idx="1">
-            <a:schemeClr val="accent1"/>
-          </a:lnRef>
-          <a:fillRef idx="3">
-            <a:schemeClr val="accent1"/>
-          </a:fillRef>
-          <a:effectRef idx="2">
-            <a:schemeClr val="accent1"/>
-          </a:effectRef>
-          <a:fontRef idx="minor">
-            <a:schemeClr val="lt1"/>
-          </a:fontRef>
-        </p:style>
-        <p:txBody>
-          <a:bodyPr rtlCol="0" anchor="ctr"/>
-          <a:lstStyle/>
-          <a:p>
-            <a:pPr algn="ctr"/>
-            <a:endParaRPr/>
-          </a:p>
-        </p:txBody>
-      </p:sp>
-      <p:sp>
-        <p:nvSpPr>
-          <p:cNvPr id="28" name="TextBox 27"/>
-          <p:cNvSpPr txBox="1"/>
-          <p:nvPr/>
-        </p:nvSpPr>
-        <p:spPr>
-          <a:xfrm>
-            <a:off x="8439912" y="3611880"/>
-            <a:ext cx="2990088" cy="457200"/>
-          </a:xfrm>
-          <a:prstGeom prst="rect">
-            <a:avLst/>
-          </a:prstGeom>
-          <a:noFill/>
-        </p:spPr>
-        <p:txBody>
-          <a:bodyPr wrap="square" lIns="0" tIns="0" rIns="0" bIns="0">
-            <a:spAutoFit/>
-          </a:bodyPr>
-          <a:lstStyle/>
-          <a:p>
-            <a:pPr algn="l">
-              <a:lnSpc>
-                <a:spcPct val="120000"/>
-              </a:lnSpc>
-              <a:spcAft>
-                <a:spcPts val="0"/>
-              </a:spcAft>
-            </a:pPr>
-            <a:r>
-              <a:rPr sz="1300" b="0" i="0">
-                <a:solidFill>
-                  <a:srgbClr val="1F2937"/>
-                </a:solidFill>
-                <a:latin typeface="Calibri"/>
-              </a:rPr>
-              <a:t>Now: PA reads existing Sales_Gas first, then writes</a:t>
-            </a:r>
-          </a:p>
-        </p:txBody>
-      </p:sp>
-      <p:sp>
-        <p:nvSpPr>
-          <p:cNvPr id="29" name="Rectangle 28"/>
-          <p:cNvSpPr/>
-          <p:nvPr/>
-        </p:nvSpPr>
-        <p:spPr>
-          <a:xfrm>
-            <a:off x="8183880" y="4233672"/>
-            <a:ext cx="91440" cy="91440"/>
-          </a:xfrm>
-          <a:prstGeom prst="rect">
-            <a:avLst/>
-          </a:prstGeom>
-          <a:solidFill>
-            <a:srgbClr val="82BC3F"/>
-          </a:solidFill>
-          <a:ln>
-            <a:noFill/>
-          </a:ln>
-        </p:spPr>
-        <p:style>
-          <a:lnRef idx="1">
-            <a:schemeClr val="accent1"/>
-          </a:lnRef>
-          <a:fillRef idx="3">
-            <a:schemeClr val="accent1"/>
-          </a:fillRef>
-          <a:effectRef idx="2">
-            <a:schemeClr val="accent1"/>
-          </a:effectRef>
-          <a:fontRef idx="minor">
-            <a:schemeClr val="lt1"/>
-          </a:fontRef>
-        </p:style>
-        <p:txBody>
-          <a:bodyPr rtlCol="0" anchor="ctr"/>
-          <a:lstStyle/>
-          <a:p>
-            <a:pPr algn="ctr"/>
-            <a:endParaRPr/>
-          </a:p>
-        </p:txBody>
-      </p:sp>
-      <p:sp>
-        <p:nvSpPr>
-          <p:cNvPr id="30" name="TextBox 29"/>
-          <p:cNvSpPr txBox="1"/>
-          <p:nvPr/>
-        </p:nvSpPr>
-        <p:spPr>
-          <a:xfrm>
-            <a:off x="8439912" y="4069080"/>
-            <a:ext cx="2990088" cy="457200"/>
-          </a:xfrm>
-          <a:prstGeom prst="rect">
-            <a:avLst/>
-          </a:prstGeom>
-          <a:noFill/>
-        </p:spPr>
-        <p:txBody>
-          <a:bodyPr wrap="square" lIns="0" tIns="0" rIns="0" bIns="0">
-            <a:spAutoFit/>
-          </a:bodyPr>
-          <a:lstStyle/>
-          <a:p>
-            <a:pPr algn="l">
-              <a:lnSpc>
-                <a:spcPct val="120000"/>
-              </a:lnSpc>
-              <a:spcAft>
-                <a:spcPts val="0"/>
-              </a:spcAft>
-            </a:pPr>
-            <a:r>
-              <a:rPr sz="1300" b="0" i="0">
-                <a:solidFill>
-                  <a:srgbClr val="1F2937"/>
-                </a:solidFill>
-                <a:latin typeface="Calibri"/>
-              </a:rPr>
-              <a:t>Public Sales data survives PA reloads</a:t>
-            </a:r>
+            <a:endParaRPr sz="1000" b="0" i="0" dirty="0">
+              <a:solidFill>
+                <a:srgbClr val="6B7280"/>
+              </a:solidFill>
+              <a:latin typeface="Calibri"/>
+            </a:endParaRPr>
           </a:p>
         </p:txBody>
       </p:sp>
@@ -15789,51 +15706,6 @@
       </p:grpSpPr>
       <p:sp>
         <p:nvSpPr>
-          <p:cNvPr id="2" name="Rectangle 1"/>
-          <p:cNvSpPr/>
-          <p:nvPr/>
-        </p:nvSpPr>
-        <p:spPr>
-          <a:xfrm>
-            <a:off x="0" y="0"/>
-            <a:ext cx="12191695" cy="6858000"/>
-          </a:xfrm>
-          <a:prstGeom prst="rect">
-            <a:avLst/>
-          </a:prstGeom>
-          <a:solidFill>
-            <a:srgbClr val="FFFFFF"/>
-          </a:solidFill>
-          <a:ln>
-            <a:noFill/>
-          </a:ln>
-          <a:effectLst/>
-        </p:spPr>
-        <p:style>
-          <a:lnRef idx="1">
-            <a:schemeClr val="accent1"/>
-          </a:lnRef>
-          <a:fillRef idx="3">
-            <a:schemeClr val="accent1"/>
-          </a:fillRef>
-          <a:effectRef idx="2">
-            <a:schemeClr val="accent1"/>
-          </a:effectRef>
-          <a:fontRef idx="minor">
-            <a:schemeClr val="lt1"/>
-          </a:fontRef>
-        </p:style>
-        <p:txBody>
-          <a:bodyPr rtlCol="0" anchor="ctr"/>
-          <a:lstStyle/>
-          <a:p>
-            <a:pPr algn="ctr"/>
-            <a:endParaRPr/>
-          </a:p>
-        </p:txBody>
-      </p:sp>
-      <p:sp>
-        <p:nvSpPr>
           <p:cNvPr id="3" name="Rectangle 2"/>
           <p:cNvSpPr/>
           <p:nvPr/>
@@ -16286,7 +16158,7 @@
         </p:nvSpPr>
         <p:spPr>
           <a:xfrm>
-            <a:off x="1307592" y="2697480"/>
+            <a:off x="1307592" y="2783586"/>
             <a:ext cx="2624328" cy="457200"/>
           </a:xfrm>
           <a:prstGeom prst="rect">
@@ -16309,7 +16181,7 @@
               </a:spcAft>
             </a:pPr>
             <a:r>
-              <a:rPr sz="1300" b="0" i="0">
+              <a:rPr sz="1300" b="0" i="0" dirty="0">
                 <a:solidFill>
                   <a:srgbClr val="1F2937"/>
                 </a:solidFill>
@@ -16372,7 +16244,7 @@
         </p:nvSpPr>
         <p:spPr>
           <a:xfrm>
-            <a:off x="1307592" y="3154680"/>
+            <a:off x="1307592" y="3240786"/>
             <a:ext cx="2624328" cy="457200"/>
           </a:xfrm>
           <a:prstGeom prst="rect">
@@ -16395,7 +16267,7 @@
               </a:spcAft>
             </a:pPr>
             <a:r>
-              <a:rPr sz="1300" b="0" i="0">
+              <a:rPr sz="1300" b="0" i="0" dirty="0">
                 <a:solidFill>
                   <a:srgbClr val="1F2937"/>
                 </a:solidFill>
@@ -16414,7 +16286,7 @@
         </p:nvSpPr>
         <p:spPr>
           <a:xfrm>
-            <a:off x="1051560" y="3776472"/>
+            <a:off x="1051560" y="3928110"/>
             <a:ext cx="91440" cy="91440"/>
           </a:xfrm>
           <a:prstGeom prst="rect">
@@ -16458,7 +16330,7 @@
         </p:nvSpPr>
         <p:spPr>
           <a:xfrm>
-            <a:off x="1307592" y="3611880"/>
+            <a:off x="1307592" y="3867912"/>
             <a:ext cx="2624328" cy="457200"/>
           </a:xfrm>
           <a:prstGeom prst="rect">
@@ -16481,7 +16353,7 @@
               </a:spcAft>
             </a:pPr>
             <a:r>
-              <a:rPr sz="1300" b="0" i="0">
+              <a:rPr sz="1300" b="0" i="0" dirty="0">
                 <a:solidFill>
                   <a:srgbClr val="1F2937"/>
                 </a:solidFill>
@@ -16671,7 +16543,7 @@
         </p:nvSpPr>
         <p:spPr>
           <a:xfrm>
-            <a:off x="5193792" y="2697480"/>
+            <a:off x="5193792" y="2781300"/>
             <a:ext cx="2624328" cy="457200"/>
           </a:xfrm>
           <a:prstGeom prst="rect">
@@ -16694,7 +16566,7 @@
               </a:spcAft>
             </a:pPr>
             <a:r>
-              <a:rPr sz="1300" b="0" i="0">
+              <a:rPr sz="1300" b="0" i="0" dirty="0">
                 <a:solidFill>
                   <a:srgbClr val="1F2937"/>
                 </a:solidFill>
@@ -16757,7 +16629,7 @@
         </p:nvSpPr>
         <p:spPr>
           <a:xfrm>
-            <a:off x="5193792" y="3154680"/>
+            <a:off x="5193792" y="3240786"/>
             <a:ext cx="2624328" cy="457200"/>
           </a:xfrm>
           <a:prstGeom prst="rect">
@@ -16780,7 +16652,7 @@
               </a:spcAft>
             </a:pPr>
             <a:r>
-              <a:rPr sz="1300" b="0" i="0">
+              <a:rPr sz="1300" b="0" i="0" dirty="0">
                 <a:solidFill>
                   <a:srgbClr val="1F2937"/>
                 </a:solidFill>
@@ -16799,7 +16671,7 @@
         </p:nvSpPr>
         <p:spPr>
           <a:xfrm>
-            <a:off x="4937760" y="3776472"/>
+            <a:off x="4932840" y="3916681"/>
             <a:ext cx="91440" cy="91440"/>
           </a:xfrm>
           <a:prstGeom prst="rect">
@@ -16843,7 +16715,7 @@
         </p:nvSpPr>
         <p:spPr>
           <a:xfrm>
-            <a:off x="5193792" y="3611880"/>
+            <a:off x="5193792" y="3843964"/>
             <a:ext cx="2624328" cy="457200"/>
           </a:xfrm>
           <a:prstGeom prst="rect">
@@ -16866,7 +16738,7 @@
               </a:spcAft>
             </a:pPr>
             <a:r>
-              <a:rPr sz="1300" b="0" i="0">
+              <a:rPr sz="1300" b="0" i="0" dirty="0">
                 <a:solidFill>
                   <a:srgbClr val="1F2937"/>
                 </a:solidFill>
@@ -17056,7 +16928,7 @@
         </p:nvSpPr>
         <p:spPr>
           <a:xfrm>
-            <a:off x="9079992" y="2697480"/>
+            <a:off x="9079992" y="2783586"/>
             <a:ext cx="2350008" cy="457200"/>
           </a:xfrm>
           <a:prstGeom prst="rect">
@@ -17079,7 +16951,7 @@
               </a:spcAft>
             </a:pPr>
             <a:r>
-              <a:rPr sz="1300" b="0" i="0">
+              <a:rPr sz="1300" b="0" i="0" dirty="0">
                 <a:solidFill>
                   <a:srgbClr val="1F2937"/>
                 </a:solidFill>
@@ -17142,7 +17014,7 @@
         </p:nvSpPr>
         <p:spPr>
           <a:xfrm>
-            <a:off x="9079992" y="3154680"/>
+            <a:off x="9079992" y="3236323"/>
             <a:ext cx="2350008" cy="457200"/>
           </a:xfrm>
           <a:prstGeom prst="rect">
@@ -17165,14 +17037,29 @@
               </a:spcAft>
             </a:pPr>
             <a:r>
-              <a:rPr sz="1300" b="0" i="0">
+              <a:rPr sz="1300" b="0" i="0" dirty="0">
                 <a:solidFill>
                   <a:srgbClr val="1F2937"/>
                 </a:solidFill>
                 <a:latin typeface="Calibri"/>
               </a:rPr>
-              <a:t>Synced into PCE_Production at ImportDate</a:t>
-            </a:r>
+              <a:t>Synced into PCE_Production at </a:t>
+            </a:r>
+            <a:r>
+              <a:rPr sz="1300" b="0" i="0" dirty="0" err="1">
+                <a:solidFill>
+                  <a:srgbClr val="1F2937"/>
+                </a:solidFill>
+                <a:latin typeface="Calibri"/>
+              </a:rPr>
+              <a:t>ImportDate</a:t>
+            </a:r>
+            <a:endParaRPr sz="1300" b="0" i="0" dirty="0">
+              <a:solidFill>
+                <a:srgbClr val="1F2937"/>
+              </a:solidFill>
+              <a:latin typeface="Calibri"/>
+            </a:endParaRPr>
           </a:p>
         </p:txBody>
       </p:sp>
@@ -17184,7 +17071,7 @@
         </p:nvSpPr>
         <p:spPr>
           <a:xfrm>
-            <a:off x="8823960" y="3776472"/>
+            <a:off x="8823960" y="3890010"/>
             <a:ext cx="91440" cy="91440"/>
           </a:xfrm>
           <a:prstGeom prst="rect">
@@ -17228,7 +17115,7 @@
         </p:nvSpPr>
         <p:spPr>
           <a:xfrm>
-            <a:off x="9079992" y="3611880"/>
+            <a:off x="9079992" y="3802380"/>
             <a:ext cx="2350008" cy="457200"/>
           </a:xfrm>
           <a:prstGeom prst="rect">
@@ -17251,7 +17138,7 @@
               </a:spcAft>
             </a:pPr>
             <a:r>
-              <a:rPr sz="1300" b="0" i="0">
+              <a:rPr sz="1300" b="0" i="0" dirty="0">
                 <a:solidFill>
                   <a:srgbClr val="1F2937"/>
                 </a:solidFill>
@@ -17259,6 +17146,74 @@
               </a:rPr>
               <a:t>Protected on every rebuild</a:t>
             </a:r>
+          </a:p>
+        </p:txBody>
+      </p:sp>
+      <p:sp>
+        <p:nvSpPr>
+          <p:cNvPr id="37" name="TextBox 36">
+            <a:extLst>
+              <a:ext uri="{FF2B5EF4-FFF2-40B4-BE49-F238E27FC236}">
+                <a16:creationId xmlns:a16="http://schemas.microsoft.com/office/drawing/2014/main" id="{390BE732-3C87-623B-7CA6-EF1AC8F0C6AC}"/>
+              </a:ext>
+            </a:extLst>
+          </p:cNvPr>
+          <p:cNvSpPr txBox="1"/>
+          <p:nvPr/>
+        </p:nvSpPr>
+        <p:spPr>
+          <a:xfrm>
+            <a:off x="10600509" y="6605468"/>
+            <a:ext cx="4082448" cy="338554"/>
+          </a:xfrm>
+          <a:prstGeom prst="rect">
+            <a:avLst/>
+          </a:prstGeom>
+          <a:noFill/>
+        </p:spPr>
+        <p:txBody>
+          <a:bodyPr wrap="square" lIns="0" tIns="0" rIns="0" bIns="0" anchor="t">
+            <a:spAutoFit/>
+          </a:bodyPr>
+          <a:lstStyle/>
+          <a:p>
+            <a:r>
+              <a:rPr lang="en-CA" sz="1200" b="0" i="0" dirty="0" err="1">
+                <a:solidFill>
+                  <a:srgbClr val="6B7280"/>
+                </a:solidFill>
+                <a:latin typeface="Calibri"/>
+              </a:rPr>
+              <a:t>Adobel</a:t>
+            </a:r>
+            <a:r>
+              <a:rPr lang="en-CA" sz="1200" b="0" i="0" dirty="0">
+                <a:solidFill>
+                  <a:srgbClr val="6B7280"/>
+                </a:solidFill>
+                <a:latin typeface="Calibri"/>
+              </a:rPr>
+              <a:t> Services Inc </a:t>
+            </a:r>
+            <a:r>
+              <a:rPr lang="en-CA" sz="1200" dirty="0">
+                <a:solidFill>
+                  <a:schemeClr val="bg1">
+                    <a:lumMod val="50000"/>
+                  </a:schemeClr>
+                </a:solidFill>
+              </a:rPr>
+              <a:t>©</a:t>
+            </a:r>
+          </a:p>
+          <a:p>
+            <a:pPr algn="l"/>
+            <a:endParaRPr sz="1000" b="0" i="0" dirty="0">
+              <a:solidFill>
+                <a:srgbClr val="6B7280"/>
+              </a:solidFill>
+              <a:latin typeface="Calibri"/>
+            </a:endParaRPr>
           </a:p>
         </p:txBody>
       </p:sp>
@@ -17289,14 +17244,529 @@
       </p:grpSpPr>
       <p:sp>
         <p:nvSpPr>
-          <p:cNvPr id="2" name="Rectangle 1"/>
+          <p:cNvPr id="3" name="Rectangle 2"/>
           <p:cNvSpPr/>
           <p:nvPr/>
         </p:nvSpPr>
         <p:spPr>
           <a:xfrm>
             <a:off x="0" y="0"/>
-            <a:ext cx="12191695" cy="6858000"/>
+            <a:ext cx="12191695" cy="1143000"/>
+          </a:xfrm>
+          <a:prstGeom prst="rect">
+            <a:avLst/>
+          </a:prstGeom>
+          <a:solidFill>
+            <a:srgbClr val="1A2C5C"/>
+          </a:solidFill>
+          <a:ln>
+            <a:noFill/>
+          </a:ln>
+          <a:effectLst/>
+        </p:spPr>
+        <p:style>
+          <a:lnRef idx="1">
+            <a:schemeClr val="accent1"/>
+          </a:lnRef>
+          <a:fillRef idx="3">
+            <a:schemeClr val="accent1"/>
+          </a:fillRef>
+          <a:effectRef idx="2">
+            <a:schemeClr val="accent1"/>
+          </a:effectRef>
+          <a:fontRef idx="minor">
+            <a:schemeClr val="lt1"/>
+          </a:fontRef>
+        </p:style>
+        <p:txBody>
+          <a:bodyPr rtlCol="0" anchor="ctr"/>
+          <a:lstStyle/>
+          <a:p>
+            <a:pPr algn="ctr"/>
+            <a:endParaRPr/>
+          </a:p>
+        </p:txBody>
+      </p:sp>
+      <p:sp>
+        <p:nvSpPr>
+          <p:cNvPr id="4" name="Rectangle 3"/>
+          <p:cNvSpPr/>
+          <p:nvPr/>
+        </p:nvSpPr>
+        <p:spPr>
+          <a:xfrm>
+            <a:off x="0" y="1143000"/>
+            <a:ext cx="12191695" cy="38100"/>
+          </a:xfrm>
+          <a:prstGeom prst="rect">
+            <a:avLst/>
+          </a:prstGeom>
+          <a:solidFill>
+            <a:srgbClr val="82BC3F"/>
+          </a:solidFill>
+          <a:ln>
+            <a:noFill/>
+          </a:ln>
+          <a:effectLst/>
+        </p:spPr>
+        <p:style>
+          <a:lnRef idx="1">
+            <a:schemeClr val="accent1"/>
+          </a:lnRef>
+          <a:fillRef idx="3">
+            <a:schemeClr val="accent1"/>
+          </a:fillRef>
+          <a:effectRef idx="2">
+            <a:schemeClr val="accent1"/>
+          </a:effectRef>
+          <a:fontRef idx="minor">
+            <a:schemeClr val="lt1"/>
+          </a:fontRef>
+        </p:style>
+        <p:txBody>
+          <a:bodyPr rtlCol="0" anchor="ctr"/>
+          <a:lstStyle/>
+          <a:p>
+            <a:pPr algn="ctr"/>
+            <a:endParaRPr/>
+          </a:p>
+        </p:txBody>
+      </p:sp>
+      <p:sp>
+        <p:nvSpPr>
+          <p:cNvPr id="5" name="TextBox 4"/>
+          <p:cNvSpPr txBox="1"/>
+          <p:nvPr/>
+        </p:nvSpPr>
+        <p:spPr>
+          <a:xfrm>
+            <a:off x="548640" y="164592"/>
+            <a:ext cx="7315200" cy="320040"/>
+          </a:xfrm>
+          <a:prstGeom prst="rect">
+            <a:avLst/>
+          </a:prstGeom>
+          <a:noFill/>
+        </p:spPr>
+        <p:txBody>
+          <a:bodyPr wrap="square" lIns="0" tIns="0" rIns="0" bIns="0" anchor="t">
+            <a:spAutoFit/>
+          </a:bodyPr>
+          <a:lstStyle/>
+          <a:p>
+            <a:pPr algn="l"/>
+            <a:r>
+              <a:rPr sz="1100" b="1" i="0">
+                <a:solidFill>
+                  <a:srgbClr val="82BC3F"/>
+                </a:solidFill>
+                <a:latin typeface="Calibri"/>
+              </a:rPr>
+              <a:t>BEFORE VS AFTER</a:t>
+            </a:r>
+          </a:p>
+        </p:txBody>
+      </p:sp>
+      <p:sp>
+        <p:nvSpPr>
+          <p:cNvPr id="6" name="TextBox 5"/>
+          <p:cNvSpPr txBox="1"/>
+          <p:nvPr/>
+        </p:nvSpPr>
+        <p:spPr>
+          <a:xfrm>
+            <a:off x="548640" y="457200"/>
+            <a:ext cx="10058400" cy="777240"/>
+          </a:xfrm>
+          <a:prstGeom prst="rect">
+            <a:avLst/>
+          </a:prstGeom>
+          <a:noFill/>
+        </p:spPr>
+        <p:txBody>
+          <a:bodyPr wrap="square" lIns="0" tIns="0" rIns="0" bIns="0" anchor="t">
+            <a:spAutoFit/>
+          </a:bodyPr>
+          <a:lstStyle/>
+          <a:p>
+            <a:pPr algn="l"/>
+            <a:r>
+              <a:rPr sz="3000" b="1" i="0">
+                <a:solidFill>
+                  <a:srgbClr val="FFFFFF"/>
+                </a:solidFill>
+                <a:latin typeface="Calibri"/>
+              </a:rPr>
+              <a:t>How this saves engineers time.</a:t>
+            </a:r>
+          </a:p>
+        </p:txBody>
+      </p:sp>
+      <p:sp>
+        <p:nvSpPr>
+          <p:cNvPr id="7" name="TextBox 6"/>
+          <p:cNvSpPr txBox="1"/>
+          <p:nvPr/>
+        </p:nvSpPr>
+        <p:spPr>
+          <a:xfrm>
+            <a:off x="10607040" y="274320"/>
+            <a:ext cx="1280160" cy="685800"/>
+          </a:xfrm>
+          <a:prstGeom prst="rect">
+            <a:avLst/>
+          </a:prstGeom>
+          <a:noFill/>
+        </p:spPr>
+        <p:txBody>
+          <a:bodyPr wrap="square" lIns="0" tIns="0" rIns="0" bIns="0" anchor="ctr">
+            <a:spAutoFit/>
+          </a:bodyPr>
+          <a:lstStyle/>
+          <a:p>
+            <a:pPr algn="r"/>
+            <a:r>
+              <a:rPr sz="1400" b="1" i="0">
+                <a:solidFill>
+                  <a:srgbClr val="82BC3F"/>
+                </a:solidFill>
+                <a:latin typeface="Calibri"/>
+              </a:rPr>
+              <a:t>09 / 12</a:t>
+            </a:r>
+          </a:p>
+        </p:txBody>
+      </p:sp>
+      <p:sp>
+        <p:nvSpPr>
+          <p:cNvPr id="8" name="Rectangle 7"/>
+          <p:cNvSpPr/>
+          <p:nvPr/>
+        </p:nvSpPr>
+        <p:spPr>
+          <a:xfrm>
+            <a:off x="548640" y="6492240"/>
+            <a:ext cx="11094415" cy="9525"/>
+          </a:xfrm>
+          <a:prstGeom prst="rect">
+            <a:avLst/>
+          </a:prstGeom>
+          <a:solidFill>
+            <a:srgbClr val="E5E7EB"/>
+          </a:solidFill>
+          <a:ln>
+            <a:noFill/>
+          </a:ln>
+          <a:effectLst/>
+        </p:spPr>
+        <p:style>
+          <a:lnRef idx="1">
+            <a:schemeClr val="accent1"/>
+          </a:lnRef>
+          <a:fillRef idx="3">
+            <a:schemeClr val="accent1"/>
+          </a:fillRef>
+          <a:effectRef idx="2">
+            <a:schemeClr val="accent1"/>
+          </a:effectRef>
+          <a:fontRef idx="minor">
+            <a:schemeClr val="lt1"/>
+          </a:fontRef>
+        </p:style>
+        <p:txBody>
+          <a:bodyPr rtlCol="0" anchor="ctr"/>
+          <a:lstStyle/>
+          <a:p>
+            <a:pPr algn="ctr"/>
+            <a:endParaRPr/>
+          </a:p>
+        </p:txBody>
+      </p:sp>
+      <p:sp>
+        <p:nvSpPr>
+          <p:cNvPr id="9" name="TextBox 8"/>
+          <p:cNvSpPr txBox="1"/>
+          <p:nvPr/>
+        </p:nvSpPr>
+        <p:spPr>
+          <a:xfrm>
+            <a:off x="548640" y="6565392"/>
+            <a:ext cx="7315200" cy="228600"/>
+          </a:xfrm>
+          <a:prstGeom prst="rect">
+            <a:avLst/>
+          </a:prstGeom>
+          <a:noFill/>
+        </p:spPr>
+        <p:txBody>
+          <a:bodyPr wrap="square" lIns="0" tIns="0" rIns="0" bIns="0" anchor="t">
+            <a:spAutoFit/>
+          </a:bodyPr>
+          <a:lstStyle/>
+          <a:p>
+            <a:pPr algn="l"/>
+            <a:r>
+              <a:rPr sz="1000" b="0" i="0">
+                <a:solidFill>
+                  <a:srgbClr val="6B7280"/>
+                </a:solidFill>
+                <a:latin typeface="Calibri"/>
+              </a:rPr>
+              <a:t>Production Update System  ·  Pacific Canbriam Energy</a:t>
+            </a:r>
+          </a:p>
+        </p:txBody>
+      </p:sp>
+      <p:sp>
+        <p:nvSpPr>
+          <p:cNvPr id="10" name="Rectangle 9"/>
+          <p:cNvSpPr/>
+          <p:nvPr/>
+        </p:nvSpPr>
+        <p:spPr>
+          <a:xfrm>
+            <a:off x="548640" y="1691640"/>
+            <a:ext cx="3698138" cy="502920"/>
+          </a:xfrm>
+          <a:prstGeom prst="rect">
+            <a:avLst/>
+          </a:prstGeom>
+          <a:solidFill>
+            <a:srgbClr val="1A2C5C"/>
+          </a:solidFill>
+          <a:ln>
+            <a:noFill/>
+          </a:ln>
+          <a:effectLst/>
+        </p:spPr>
+        <p:style>
+          <a:lnRef idx="1">
+            <a:schemeClr val="accent1"/>
+          </a:lnRef>
+          <a:fillRef idx="3">
+            <a:schemeClr val="accent1"/>
+          </a:fillRef>
+          <a:effectRef idx="2">
+            <a:schemeClr val="accent1"/>
+          </a:effectRef>
+          <a:fontRef idx="minor">
+            <a:schemeClr val="lt1"/>
+          </a:fontRef>
+        </p:style>
+        <p:txBody>
+          <a:bodyPr rtlCol="0" anchor="ctr"/>
+          <a:lstStyle/>
+          <a:p>
+            <a:pPr algn="ctr"/>
+            <a:endParaRPr/>
+          </a:p>
+        </p:txBody>
+      </p:sp>
+      <p:sp>
+        <p:nvSpPr>
+          <p:cNvPr id="11" name="TextBox 10"/>
+          <p:cNvSpPr txBox="1"/>
+          <p:nvPr/>
+        </p:nvSpPr>
+        <p:spPr>
+          <a:xfrm>
+            <a:off x="713232" y="1691640"/>
+            <a:ext cx="3368954" cy="502920"/>
+          </a:xfrm>
+          <a:prstGeom prst="rect">
+            <a:avLst/>
+          </a:prstGeom>
+          <a:noFill/>
+        </p:spPr>
+        <p:txBody>
+          <a:bodyPr wrap="square" lIns="0" tIns="0" rIns="0" bIns="0" anchor="ctr">
+            <a:spAutoFit/>
+          </a:bodyPr>
+          <a:lstStyle/>
+          <a:p>
+            <a:pPr algn="l"/>
+            <a:r>
+              <a:rPr sz="1400" b="1" i="0">
+                <a:solidFill>
+                  <a:srgbClr val="FFFFFF"/>
+                </a:solidFill>
+                <a:latin typeface="Calibri"/>
+              </a:rPr>
+              <a:t>Task</a:t>
+            </a:r>
+          </a:p>
+        </p:txBody>
+      </p:sp>
+      <p:sp>
+        <p:nvSpPr>
+          <p:cNvPr id="12" name="Rectangle 11"/>
+          <p:cNvSpPr/>
+          <p:nvPr/>
+        </p:nvSpPr>
+        <p:spPr>
+          <a:xfrm>
+            <a:off x="4246778" y="1691640"/>
+            <a:ext cx="3698138" cy="502920"/>
+          </a:xfrm>
+          <a:prstGeom prst="rect">
+            <a:avLst/>
+          </a:prstGeom>
+          <a:solidFill>
+            <a:srgbClr val="1A2C5C"/>
+          </a:solidFill>
+          <a:ln>
+            <a:noFill/>
+          </a:ln>
+          <a:effectLst/>
+        </p:spPr>
+        <p:style>
+          <a:lnRef idx="1">
+            <a:schemeClr val="accent1"/>
+          </a:lnRef>
+          <a:fillRef idx="3">
+            <a:schemeClr val="accent1"/>
+          </a:fillRef>
+          <a:effectRef idx="2">
+            <a:schemeClr val="accent1"/>
+          </a:effectRef>
+          <a:fontRef idx="minor">
+            <a:schemeClr val="lt1"/>
+          </a:fontRef>
+        </p:style>
+        <p:txBody>
+          <a:bodyPr rtlCol="0" anchor="ctr"/>
+          <a:lstStyle/>
+          <a:p>
+            <a:pPr algn="ctr"/>
+            <a:endParaRPr/>
+          </a:p>
+        </p:txBody>
+      </p:sp>
+      <p:sp>
+        <p:nvSpPr>
+          <p:cNvPr id="13" name="TextBox 12"/>
+          <p:cNvSpPr txBox="1"/>
+          <p:nvPr/>
+        </p:nvSpPr>
+        <p:spPr>
+          <a:xfrm>
+            <a:off x="4411370" y="1691640"/>
+            <a:ext cx="3368954" cy="502920"/>
+          </a:xfrm>
+          <a:prstGeom prst="rect">
+            <a:avLst/>
+          </a:prstGeom>
+          <a:noFill/>
+        </p:spPr>
+        <p:txBody>
+          <a:bodyPr wrap="square" lIns="0" tIns="0" rIns="0" bIns="0" anchor="ctr">
+            <a:spAutoFit/>
+          </a:bodyPr>
+          <a:lstStyle/>
+          <a:p>
+            <a:pPr algn="l"/>
+            <a:r>
+              <a:rPr sz="1400" b="1" i="0">
+                <a:solidFill>
+                  <a:srgbClr val="FFFFFF"/>
+                </a:solidFill>
+                <a:latin typeface="Calibri"/>
+              </a:rPr>
+              <a:t>Before — Excel only</a:t>
+            </a:r>
+          </a:p>
+        </p:txBody>
+      </p:sp>
+      <p:sp>
+        <p:nvSpPr>
+          <p:cNvPr id="14" name="Rectangle 13"/>
+          <p:cNvSpPr/>
+          <p:nvPr/>
+        </p:nvSpPr>
+        <p:spPr>
+          <a:xfrm>
+            <a:off x="7944916" y="1691640"/>
+            <a:ext cx="3698139" cy="502920"/>
+          </a:xfrm>
+          <a:prstGeom prst="rect">
+            <a:avLst/>
+          </a:prstGeom>
+          <a:solidFill>
+            <a:srgbClr val="1A2C5C"/>
+          </a:solidFill>
+          <a:ln>
+            <a:noFill/>
+          </a:ln>
+          <a:effectLst/>
+        </p:spPr>
+        <p:style>
+          <a:lnRef idx="1">
+            <a:schemeClr val="accent1"/>
+          </a:lnRef>
+          <a:fillRef idx="3">
+            <a:schemeClr val="accent1"/>
+          </a:fillRef>
+          <a:effectRef idx="2">
+            <a:schemeClr val="accent1"/>
+          </a:effectRef>
+          <a:fontRef idx="minor">
+            <a:schemeClr val="lt1"/>
+          </a:fontRef>
+        </p:style>
+        <p:txBody>
+          <a:bodyPr rtlCol="0" anchor="ctr"/>
+          <a:lstStyle/>
+          <a:p>
+            <a:pPr algn="ctr"/>
+            <a:endParaRPr/>
+          </a:p>
+        </p:txBody>
+      </p:sp>
+      <p:sp>
+        <p:nvSpPr>
+          <p:cNvPr id="15" name="TextBox 14"/>
+          <p:cNvSpPr txBox="1"/>
+          <p:nvPr/>
+        </p:nvSpPr>
+        <p:spPr>
+          <a:xfrm>
+            <a:off x="8109508" y="1691640"/>
+            <a:ext cx="3368955" cy="502920"/>
+          </a:xfrm>
+          <a:prstGeom prst="rect">
+            <a:avLst/>
+          </a:prstGeom>
+          <a:noFill/>
+        </p:spPr>
+        <p:txBody>
+          <a:bodyPr wrap="square" lIns="0" tIns="0" rIns="0" bIns="0" anchor="ctr">
+            <a:spAutoFit/>
+          </a:bodyPr>
+          <a:lstStyle/>
+          <a:p>
+            <a:pPr algn="l"/>
+            <a:r>
+              <a:rPr sz="1400" b="1" i="0">
+                <a:solidFill>
+                  <a:srgbClr val="FFFFFF"/>
+                </a:solidFill>
+                <a:latin typeface="Calibri"/>
+              </a:rPr>
+              <a:t>After — App + SQL</a:t>
+            </a:r>
+          </a:p>
+        </p:txBody>
+      </p:sp>
+      <p:sp>
+        <p:nvSpPr>
+          <p:cNvPr id="16" name="Rectangle 15"/>
+          <p:cNvSpPr/>
+          <p:nvPr/>
+        </p:nvSpPr>
+        <p:spPr>
+          <a:xfrm>
+            <a:off x="548640" y="2194560"/>
+            <a:ext cx="3698138" cy="601980"/>
           </a:xfrm>
           <a:prstGeom prst="rect">
             <a:avLst/>
@@ -17334,528 +17804,48 @@
       </p:sp>
       <p:sp>
         <p:nvSpPr>
-          <p:cNvPr id="3" name="Rectangle 2"/>
+          <p:cNvPr id="17" name="TextBox 16"/>
+          <p:cNvSpPr txBox="1"/>
+          <p:nvPr/>
+        </p:nvSpPr>
+        <p:spPr>
+          <a:xfrm>
+            <a:off x="713232" y="2194560"/>
+            <a:ext cx="3368954" cy="601980"/>
+          </a:xfrm>
+          <a:prstGeom prst="rect">
+            <a:avLst/>
+          </a:prstGeom>
+          <a:noFill/>
+        </p:spPr>
+        <p:txBody>
+          <a:bodyPr wrap="square" lIns="0" tIns="0" rIns="0" bIns="0" anchor="ctr">
+            <a:spAutoFit/>
+          </a:bodyPr>
+          <a:lstStyle/>
+          <a:p>
+            <a:pPr algn="l"/>
+            <a:r>
+              <a:rPr sz="1200" b="1" i="0">
+                <a:solidFill>
+                  <a:srgbClr val="1F2937"/>
+                </a:solidFill>
+                <a:latin typeface="Calibri"/>
+              </a:rPr>
+              <a:t>Daily Snowflake → CDA → Production</a:t>
+            </a:r>
+          </a:p>
+        </p:txBody>
+      </p:sp>
+      <p:sp>
+        <p:nvSpPr>
+          <p:cNvPr id="18" name="Rectangle 17"/>
           <p:cNvSpPr/>
           <p:nvPr/>
         </p:nvSpPr>
         <p:spPr>
           <a:xfrm>
-            <a:off x="0" y="0"/>
-            <a:ext cx="12191695" cy="1143000"/>
-          </a:xfrm>
-          <a:prstGeom prst="rect">
-            <a:avLst/>
-          </a:prstGeom>
-          <a:solidFill>
-            <a:srgbClr val="1A2C5C"/>
-          </a:solidFill>
-          <a:ln>
-            <a:noFill/>
-          </a:ln>
-          <a:effectLst/>
-        </p:spPr>
-        <p:style>
-          <a:lnRef idx="1">
-            <a:schemeClr val="accent1"/>
-          </a:lnRef>
-          <a:fillRef idx="3">
-            <a:schemeClr val="accent1"/>
-          </a:fillRef>
-          <a:effectRef idx="2">
-            <a:schemeClr val="accent1"/>
-          </a:effectRef>
-          <a:fontRef idx="minor">
-            <a:schemeClr val="lt1"/>
-          </a:fontRef>
-        </p:style>
-        <p:txBody>
-          <a:bodyPr rtlCol="0" anchor="ctr"/>
-          <a:lstStyle/>
-          <a:p>
-            <a:pPr algn="ctr"/>
-            <a:endParaRPr/>
-          </a:p>
-        </p:txBody>
-      </p:sp>
-      <p:sp>
-        <p:nvSpPr>
-          <p:cNvPr id="4" name="Rectangle 3"/>
-          <p:cNvSpPr/>
-          <p:nvPr/>
-        </p:nvSpPr>
-        <p:spPr>
-          <a:xfrm>
-            <a:off x="0" y="1143000"/>
-            <a:ext cx="12191695" cy="38100"/>
-          </a:xfrm>
-          <a:prstGeom prst="rect">
-            <a:avLst/>
-          </a:prstGeom>
-          <a:solidFill>
-            <a:srgbClr val="82BC3F"/>
-          </a:solidFill>
-          <a:ln>
-            <a:noFill/>
-          </a:ln>
-          <a:effectLst/>
-        </p:spPr>
-        <p:style>
-          <a:lnRef idx="1">
-            <a:schemeClr val="accent1"/>
-          </a:lnRef>
-          <a:fillRef idx="3">
-            <a:schemeClr val="accent1"/>
-          </a:fillRef>
-          <a:effectRef idx="2">
-            <a:schemeClr val="accent1"/>
-          </a:effectRef>
-          <a:fontRef idx="minor">
-            <a:schemeClr val="lt1"/>
-          </a:fontRef>
-        </p:style>
-        <p:txBody>
-          <a:bodyPr rtlCol="0" anchor="ctr"/>
-          <a:lstStyle/>
-          <a:p>
-            <a:pPr algn="ctr"/>
-            <a:endParaRPr/>
-          </a:p>
-        </p:txBody>
-      </p:sp>
-      <p:sp>
-        <p:nvSpPr>
-          <p:cNvPr id="5" name="TextBox 4"/>
-          <p:cNvSpPr txBox="1"/>
-          <p:nvPr/>
-        </p:nvSpPr>
-        <p:spPr>
-          <a:xfrm>
-            <a:off x="548640" y="164592"/>
-            <a:ext cx="7315200" cy="320040"/>
-          </a:xfrm>
-          <a:prstGeom prst="rect">
-            <a:avLst/>
-          </a:prstGeom>
-          <a:noFill/>
-        </p:spPr>
-        <p:txBody>
-          <a:bodyPr wrap="square" lIns="0" tIns="0" rIns="0" bIns="0" anchor="t">
-            <a:spAutoFit/>
-          </a:bodyPr>
-          <a:lstStyle/>
-          <a:p>
-            <a:pPr algn="l"/>
-            <a:r>
-              <a:rPr sz="1100" b="1" i="0">
-                <a:solidFill>
-                  <a:srgbClr val="82BC3F"/>
-                </a:solidFill>
-                <a:latin typeface="Calibri"/>
-              </a:rPr>
-              <a:t>BEFORE VS AFTER</a:t>
-            </a:r>
-          </a:p>
-        </p:txBody>
-      </p:sp>
-      <p:sp>
-        <p:nvSpPr>
-          <p:cNvPr id="6" name="TextBox 5"/>
-          <p:cNvSpPr txBox="1"/>
-          <p:nvPr/>
-        </p:nvSpPr>
-        <p:spPr>
-          <a:xfrm>
-            <a:off x="548640" y="457200"/>
-            <a:ext cx="10058400" cy="777240"/>
-          </a:xfrm>
-          <a:prstGeom prst="rect">
-            <a:avLst/>
-          </a:prstGeom>
-          <a:noFill/>
-        </p:spPr>
-        <p:txBody>
-          <a:bodyPr wrap="square" lIns="0" tIns="0" rIns="0" bIns="0" anchor="t">
-            <a:spAutoFit/>
-          </a:bodyPr>
-          <a:lstStyle/>
-          <a:p>
-            <a:pPr algn="l"/>
-            <a:r>
-              <a:rPr sz="3000" b="1" i="0">
-                <a:solidFill>
-                  <a:srgbClr val="FFFFFF"/>
-                </a:solidFill>
-                <a:latin typeface="Calibri"/>
-              </a:rPr>
-              <a:t>How this saves engineers time.</a:t>
-            </a:r>
-          </a:p>
-        </p:txBody>
-      </p:sp>
-      <p:sp>
-        <p:nvSpPr>
-          <p:cNvPr id="7" name="TextBox 6"/>
-          <p:cNvSpPr txBox="1"/>
-          <p:nvPr/>
-        </p:nvSpPr>
-        <p:spPr>
-          <a:xfrm>
-            <a:off x="10607040" y="274320"/>
-            <a:ext cx="1280160" cy="685800"/>
-          </a:xfrm>
-          <a:prstGeom prst="rect">
-            <a:avLst/>
-          </a:prstGeom>
-          <a:noFill/>
-        </p:spPr>
-        <p:txBody>
-          <a:bodyPr wrap="square" lIns="0" tIns="0" rIns="0" bIns="0" anchor="ctr">
-            <a:spAutoFit/>
-          </a:bodyPr>
-          <a:lstStyle/>
-          <a:p>
-            <a:pPr algn="r"/>
-            <a:r>
-              <a:rPr sz="1400" b="1" i="0">
-                <a:solidFill>
-                  <a:srgbClr val="82BC3F"/>
-                </a:solidFill>
-                <a:latin typeface="Calibri"/>
-              </a:rPr>
-              <a:t>09 / 12</a:t>
-            </a:r>
-          </a:p>
-        </p:txBody>
-      </p:sp>
-      <p:sp>
-        <p:nvSpPr>
-          <p:cNvPr id="8" name="Rectangle 7"/>
-          <p:cNvSpPr/>
-          <p:nvPr/>
-        </p:nvSpPr>
-        <p:spPr>
-          <a:xfrm>
-            <a:off x="548640" y="6492240"/>
-            <a:ext cx="11094415" cy="9525"/>
-          </a:xfrm>
-          <a:prstGeom prst="rect">
-            <a:avLst/>
-          </a:prstGeom>
-          <a:solidFill>
-            <a:srgbClr val="E5E7EB"/>
-          </a:solidFill>
-          <a:ln>
-            <a:noFill/>
-          </a:ln>
-          <a:effectLst/>
-        </p:spPr>
-        <p:style>
-          <a:lnRef idx="1">
-            <a:schemeClr val="accent1"/>
-          </a:lnRef>
-          <a:fillRef idx="3">
-            <a:schemeClr val="accent1"/>
-          </a:fillRef>
-          <a:effectRef idx="2">
-            <a:schemeClr val="accent1"/>
-          </a:effectRef>
-          <a:fontRef idx="minor">
-            <a:schemeClr val="lt1"/>
-          </a:fontRef>
-        </p:style>
-        <p:txBody>
-          <a:bodyPr rtlCol="0" anchor="ctr"/>
-          <a:lstStyle/>
-          <a:p>
-            <a:pPr algn="ctr"/>
-            <a:endParaRPr/>
-          </a:p>
-        </p:txBody>
-      </p:sp>
-      <p:sp>
-        <p:nvSpPr>
-          <p:cNvPr id="9" name="TextBox 8"/>
-          <p:cNvSpPr txBox="1"/>
-          <p:nvPr/>
-        </p:nvSpPr>
-        <p:spPr>
-          <a:xfrm>
-            <a:off x="548640" y="6565392"/>
-            <a:ext cx="7315200" cy="228600"/>
-          </a:xfrm>
-          <a:prstGeom prst="rect">
-            <a:avLst/>
-          </a:prstGeom>
-          <a:noFill/>
-        </p:spPr>
-        <p:txBody>
-          <a:bodyPr wrap="square" lIns="0" tIns="0" rIns="0" bIns="0" anchor="t">
-            <a:spAutoFit/>
-          </a:bodyPr>
-          <a:lstStyle/>
-          <a:p>
-            <a:pPr algn="l"/>
-            <a:r>
-              <a:rPr sz="1000" b="0" i="0">
-                <a:solidFill>
-                  <a:srgbClr val="6B7280"/>
-                </a:solidFill>
-                <a:latin typeface="Calibri"/>
-              </a:rPr>
-              <a:t>Production Update System  ·  Pacific Canbriam Energy</a:t>
-            </a:r>
-          </a:p>
-        </p:txBody>
-      </p:sp>
-      <p:sp>
-        <p:nvSpPr>
-          <p:cNvPr id="10" name="Rectangle 9"/>
-          <p:cNvSpPr/>
-          <p:nvPr/>
-        </p:nvSpPr>
-        <p:spPr>
-          <a:xfrm>
-            <a:off x="548640" y="1691640"/>
-            <a:ext cx="3698138" cy="502920"/>
-          </a:xfrm>
-          <a:prstGeom prst="rect">
-            <a:avLst/>
-          </a:prstGeom>
-          <a:solidFill>
-            <a:srgbClr val="1A2C5C"/>
-          </a:solidFill>
-          <a:ln>
-            <a:noFill/>
-          </a:ln>
-          <a:effectLst/>
-        </p:spPr>
-        <p:style>
-          <a:lnRef idx="1">
-            <a:schemeClr val="accent1"/>
-          </a:lnRef>
-          <a:fillRef idx="3">
-            <a:schemeClr val="accent1"/>
-          </a:fillRef>
-          <a:effectRef idx="2">
-            <a:schemeClr val="accent1"/>
-          </a:effectRef>
-          <a:fontRef idx="minor">
-            <a:schemeClr val="lt1"/>
-          </a:fontRef>
-        </p:style>
-        <p:txBody>
-          <a:bodyPr rtlCol="0" anchor="ctr"/>
-          <a:lstStyle/>
-          <a:p>
-            <a:pPr algn="ctr"/>
-            <a:endParaRPr/>
-          </a:p>
-        </p:txBody>
-      </p:sp>
-      <p:sp>
-        <p:nvSpPr>
-          <p:cNvPr id="11" name="TextBox 10"/>
-          <p:cNvSpPr txBox="1"/>
-          <p:nvPr/>
-        </p:nvSpPr>
-        <p:spPr>
-          <a:xfrm>
-            <a:off x="713232" y="1691640"/>
-            <a:ext cx="3368954" cy="502920"/>
-          </a:xfrm>
-          <a:prstGeom prst="rect">
-            <a:avLst/>
-          </a:prstGeom>
-          <a:noFill/>
-        </p:spPr>
-        <p:txBody>
-          <a:bodyPr wrap="square" lIns="0" tIns="0" rIns="0" bIns="0" anchor="ctr">
-            <a:spAutoFit/>
-          </a:bodyPr>
-          <a:lstStyle/>
-          <a:p>
-            <a:pPr algn="l"/>
-            <a:r>
-              <a:rPr sz="1400" b="1" i="0">
-                <a:solidFill>
-                  <a:srgbClr val="FFFFFF"/>
-                </a:solidFill>
-                <a:latin typeface="Calibri"/>
-              </a:rPr>
-              <a:t>Task</a:t>
-            </a:r>
-          </a:p>
-        </p:txBody>
-      </p:sp>
-      <p:sp>
-        <p:nvSpPr>
-          <p:cNvPr id="12" name="Rectangle 11"/>
-          <p:cNvSpPr/>
-          <p:nvPr/>
-        </p:nvSpPr>
-        <p:spPr>
-          <a:xfrm>
-            <a:off x="4246778" y="1691640"/>
-            <a:ext cx="3698138" cy="502920"/>
-          </a:xfrm>
-          <a:prstGeom prst="rect">
-            <a:avLst/>
-          </a:prstGeom>
-          <a:solidFill>
-            <a:srgbClr val="1A2C5C"/>
-          </a:solidFill>
-          <a:ln>
-            <a:noFill/>
-          </a:ln>
-          <a:effectLst/>
-        </p:spPr>
-        <p:style>
-          <a:lnRef idx="1">
-            <a:schemeClr val="accent1"/>
-          </a:lnRef>
-          <a:fillRef idx="3">
-            <a:schemeClr val="accent1"/>
-          </a:fillRef>
-          <a:effectRef idx="2">
-            <a:schemeClr val="accent1"/>
-          </a:effectRef>
-          <a:fontRef idx="minor">
-            <a:schemeClr val="lt1"/>
-          </a:fontRef>
-        </p:style>
-        <p:txBody>
-          <a:bodyPr rtlCol="0" anchor="ctr"/>
-          <a:lstStyle/>
-          <a:p>
-            <a:pPr algn="ctr"/>
-            <a:endParaRPr/>
-          </a:p>
-        </p:txBody>
-      </p:sp>
-      <p:sp>
-        <p:nvSpPr>
-          <p:cNvPr id="13" name="TextBox 12"/>
-          <p:cNvSpPr txBox="1"/>
-          <p:nvPr/>
-        </p:nvSpPr>
-        <p:spPr>
-          <a:xfrm>
-            <a:off x="4411370" y="1691640"/>
-            <a:ext cx="3368954" cy="502920"/>
-          </a:xfrm>
-          <a:prstGeom prst="rect">
-            <a:avLst/>
-          </a:prstGeom>
-          <a:noFill/>
-        </p:spPr>
-        <p:txBody>
-          <a:bodyPr wrap="square" lIns="0" tIns="0" rIns="0" bIns="0" anchor="ctr">
-            <a:spAutoFit/>
-          </a:bodyPr>
-          <a:lstStyle/>
-          <a:p>
-            <a:pPr algn="l"/>
-            <a:r>
-              <a:rPr sz="1400" b="1" i="0">
-                <a:solidFill>
-                  <a:srgbClr val="FFFFFF"/>
-                </a:solidFill>
-                <a:latin typeface="Calibri"/>
-              </a:rPr>
-              <a:t>Before — Excel only</a:t>
-            </a:r>
-          </a:p>
-        </p:txBody>
-      </p:sp>
-      <p:sp>
-        <p:nvSpPr>
-          <p:cNvPr id="14" name="Rectangle 13"/>
-          <p:cNvSpPr/>
-          <p:nvPr/>
-        </p:nvSpPr>
-        <p:spPr>
-          <a:xfrm>
-            <a:off x="7944916" y="1691640"/>
-            <a:ext cx="3698139" cy="502920"/>
-          </a:xfrm>
-          <a:prstGeom prst="rect">
-            <a:avLst/>
-          </a:prstGeom>
-          <a:solidFill>
-            <a:srgbClr val="1A2C5C"/>
-          </a:solidFill>
-          <a:ln>
-            <a:noFill/>
-          </a:ln>
-          <a:effectLst/>
-        </p:spPr>
-        <p:style>
-          <a:lnRef idx="1">
-            <a:schemeClr val="accent1"/>
-          </a:lnRef>
-          <a:fillRef idx="3">
-            <a:schemeClr val="accent1"/>
-          </a:fillRef>
-          <a:effectRef idx="2">
-            <a:schemeClr val="accent1"/>
-          </a:effectRef>
-          <a:fontRef idx="minor">
-            <a:schemeClr val="lt1"/>
-          </a:fontRef>
-        </p:style>
-        <p:txBody>
-          <a:bodyPr rtlCol="0" anchor="ctr"/>
-          <a:lstStyle/>
-          <a:p>
-            <a:pPr algn="ctr"/>
-            <a:endParaRPr/>
-          </a:p>
-        </p:txBody>
-      </p:sp>
-      <p:sp>
-        <p:nvSpPr>
-          <p:cNvPr id="15" name="TextBox 14"/>
-          <p:cNvSpPr txBox="1"/>
-          <p:nvPr/>
-        </p:nvSpPr>
-        <p:spPr>
-          <a:xfrm>
-            <a:off x="8109508" y="1691640"/>
-            <a:ext cx="3368955" cy="502920"/>
-          </a:xfrm>
-          <a:prstGeom prst="rect">
-            <a:avLst/>
-          </a:prstGeom>
-          <a:noFill/>
-        </p:spPr>
-        <p:txBody>
-          <a:bodyPr wrap="square" lIns="0" tIns="0" rIns="0" bIns="0" anchor="ctr">
-            <a:spAutoFit/>
-          </a:bodyPr>
-          <a:lstStyle/>
-          <a:p>
-            <a:pPr algn="l"/>
-            <a:r>
-              <a:rPr sz="1400" b="1" i="0">
-                <a:solidFill>
-                  <a:srgbClr val="FFFFFF"/>
-                </a:solidFill>
-                <a:latin typeface="Calibri"/>
-              </a:rPr>
-              <a:t>After — App + SQL</a:t>
-            </a:r>
-          </a:p>
-        </p:txBody>
-      </p:sp>
-      <p:sp>
-        <p:nvSpPr>
-          <p:cNvPr id="16" name="Rectangle 15"/>
-          <p:cNvSpPr/>
-          <p:nvPr/>
-        </p:nvSpPr>
-        <p:spPr>
-          <a:xfrm>
-            <a:off x="548640" y="2194560"/>
+            <a:off x="4246778" y="2194560"/>
             <a:ext cx="3698138" cy="601980"/>
           </a:xfrm>
           <a:prstGeom prst="rect">
@@ -17894,13 +17884,13 @@
       </p:sp>
       <p:sp>
         <p:nvSpPr>
-          <p:cNvPr id="17" name="TextBox 16"/>
-          <p:cNvSpPr txBox="1"/>
-          <p:nvPr/>
-        </p:nvSpPr>
-        <p:spPr>
-          <a:xfrm>
-            <a:off x="713232" y="2194560"/>
+          <p:cNvPr id="19" name="TextBox 18"/>
+          <p:cNvSpPr txBox="1"/>
+          <p:nvPr/>
+        </p:nvSpPr>
+        <p:spPr>
+          <a:xfrm>
+            <a:off x="4411370" y="2194560"/>
             <a:ext cx="3368954" cy="601980"/>
           </a:xfrm>
           <a:prstGeom prst="rect">
@@ -17916,27 +17906,27 @@
           <a:p>
             <a:pPr algn="l"/>
             <a:r>
-              <a:rPr sz="1200" b="1" i="0">
+              <a:rPr sz="1200" b="0" i="0">
                 <a:solidFill>
                   <a:srgbClr val="1F2937"/>
                 </a:solidFill>
                 <a:latin typeface="Calibri"/>
               </a:rPr>
-              <a:t>Daily Snowflake → CDA → Production</a:t>
-            </a:r>
-          </a:p>
-        </p:txBody>
-      </p:sp>
-      <p:sp>
-        <p:nvSpPr>
-          <p:cNvPr id="18" name="Rectangle 17"/>
+              <a:t>Half-day spreadsheet round-trip</a:t>
+            </a:r>
+          </a:p>
+        </p:txBody>
+      </p:sp>
+      <p:sp>
+        <p:nvSpPr>
+          <p:cNvPr id="20" name="Rectangle 19"/>
           <p:cNvSpPr/>
           <p:nvPr/>
         </p:nvSpPr>
         <p:spPr>
           <a:xfrm>
-            <a:off x="4246778" y="2194560"/>
-            <a:ext cx="3698138" cy="601980"/>
+            <a:off x="7944916" y="2194560"/>
+            <a:ext cx="3698139" cy="601980"/>
           </a:xfrm>
           <a:prstGeom prst="rect">
             <a:avLst/>
@@ -17974,13 +17964,93 @@
       </p:sp>
       <p:sp>
         <p:nvSpPr>
-          <p:cNvPr id="19" name="TextBox 18"/>
-          <p:cNvSpPr txBox="1"/>
-          <p:nvPr/>
-        </p:nvSpPr>
-        <p:spPr>
-          <a:xfrm>
-            <a:off x="4411370" y="2194560"/>
+          <p:cNvPr id="21" name="TextBox 20"/>
+          <p:cNvSpPr txBox="1"/>
+          <p:nvPr/>
+        </p:nvSpPr>
+        <p:spPr>
+          <a:xfrm>
+            <a:off x="8109508" y="2194560"/>
+            <a:ext cx="3368955" cy="601980"/>
+          </a:xfrm>
+          <a:prstGeom prst="rect">
+            <a:avLst/>
+          </a:prstGeom>
+          <a:noFill/>
+        </p:spPr>
+        <p:txBody>
+          <a:bodyPr wrap="square" lIns="0" tIns="0" rIns="0" bIns="0" anchor="ctr">
+            <a:spAutoFit/>
+          </a:bodyPr>
+          <a:lstStyle/>
+          <a:p>
+            <a:pPr algn="l"/>
+            <a:r>
+              <a:rPr sz="1200" b="0" i="0">
+                <a:solidFill>
+                  <a:srgbClr val="1F2937"/>
+                </a:solidFill>
+                <a:latin typeface="Calibri"/>
+              </a:rPr>
+              <a:t>One dialog, hands-off, logged summary</a:t>
+            </a:r>
+          </a:p>
+        </p:txBody>
+      </p:sp>
+      <p:sp>
+        <p:nvSpPr>
+          <p:cNvPr id="22" name="Rectangle 21"/>
+          <p:cNvSpPr/>
+          <p:nvPr/>
+        </p:nvSpPr>
+        <p:spPr>
+          <a:xfrm>
+            <a:off x="548640" y="2796540"/>
+            <a:ext cx="3698138" cy="601980"/>
+          </a:xfrm>
+          <a:prstGeom prst="rect">
+            <a:avLst/>
+          </a:prstGeom>
+          <a:solidFill>
+            <a:srgbClr val="EFF6E2"/>
+          </a:solidFill>
+          <a:ln>
+            <a:noFill/>
+          </a:ln>
+          <a:effectLst/>
+        </p:spPr>
+        <p:style>
+          <a:lnRef idx="1">
+            <a:schemeClr val="accent1"/>
+          </a:lnRef>
+          <a:fillRef idx="3">
+            <a:schemeClr val="accent1"/>
+          </a:fillRef>
+          <a:effectRef idx="2">
+            <a:schemeClr val="accent1"/>
+          </a:effectRef>
+          <a:fontRef idx="minor">
+            <a:schemeClr val="lt1"/>
+          </a:fontRef>
+        </p:style>
+        <p:txBody>
+          <a:bodyPr rtlCol="0" anchor="ctr"/>
+          <a:lstStyle/>
+          <a:p>
+            <a:pPr algn="ctr"/>
+            <a:endParaRPr/>
+          </a:p>
+        </p:txBody>
+      </p:sp>
+      <p:sp>
+        <p:nvSpPr>
+          <p:cNvPr id="23" name="TextBox 22"/>
+          <p:cNvSpPr txBox="1"/>
+          <p:nvPr/>
+        </p:nvSpPr>
+        <p:spPr>
+          <a:xfrm>
+            <a:off x="713232" y="2796540"/>
             <a:ext cx="3368954" cy="601980"/>
           </a:xfrm>
           <a:prstGeom prst="rect">
@@ -17996,27 +18066,187 @@
           <a:p>
             <a:pPr algn="l"/>
             <a:r>
+              <a:rPr sz="1200" b="1" i="0">
+                <a:solidFill>
+                  <a:srgbClr val="1F2937"/>
+                </a:solidFill>
+                <a:latin typeface="Calibri"/>
+              </a:rPr>
+              <a:t>Monthly PA (ValNav)</a:t>
+            </a:r>
+          </a:p>
+        </p:txBody>
+      </p:sp>
+      <p:sp>
+        <p:nvSpPr>
+          <p:cNvPr id="24" name="Rectangle 23"/>
+          <p:cNvSpPr/>
+          <p:nvPr/>
+        </p:nvSpPr>
+        <p:spPr>
+          <a:xfrm>
+            <a:off x="4246778" y="2796540"/>
+            <a:ext cx="3698138" cy="601980"/>
+          </a:xfrm>
+          <a:prstGeom prst="rect">
+            <a:avLst/>
+          </a:prstGeom>
+          <a:solidFill>
+            <a:srgbClr val="EFF6E2"/>
+          </a:solidFill>
+          <a:ln>
+            <a:noFill/>
+          </a:ln>
+          <a:effectLst/>
+        </p:spPr>
+        <p:style>
+          <a:lnRef idx="1">
+            <a:schemeClr val="accent1"/>
+          </a:lnRef>
+          <a:fillRef idx="3">
+            <a:schemeClr val="accent1"/>
+          </a:fillRef>
+          <a:effectRef idx="2">
+            <a:schemeClr val="accent1"/>
+          </a:effectRef>
+          <a:fontRef idx="minor">
+            <a:schemeClr val="lt1"/>
+          </a:fontRef>
+        </p:style>
+        <p:txBody>
+          <a:bodyPr rtlCol="0" anchor="ctr"/>
+          <a:lstStyle/>
+          <a:p>
+            <a:pPr algn="ctr"/>
+            <a:endParaRPr/>
+          </a:p>
+        </p:txBody>
+      </p:sp>
+      <p:sp>
+        <p:nvSpPr>
+          <p:cNvPr id="25" name="TextBox 24"/>
+          <p:cNvSpPr txBox="1"/>
+          <p:nvPr/>
+        </p:nvSpPr>
+        <p:spPr>
+          <a:xfrm>
+            <a:off x="4411370" y="2796540"/>
+            <a:ext cx="3368954" cy="601980"/>
+          </a:xfrm>
+          <a:prstGeom prst="rect">
+            <a:avLst/>
+          </a:prstGeom>
+          <a:noFill/>
+        </p:spPr>
+        <p:txBody>
+          <a:bodyPr wrap="square" lIns="0" tIns="0" rIns="0" bIns="0" anchor="ctr">
+            <a:spAutoFit/>
+          </a:bodyPr>
+          <a:lstStyle/>
+          <a:p>
+            <a:pPr algn="l"/>
+            <a:r>
               <a:rPr sz="1200" b="0" i="0">
                 <a:solidFill>
                   <a:srgbClr val="1F2937"/>
                 </a:solidFill>
                 <a:latin typeface="Calibri"/>
               </a:rPr>
-              <a:t>Half-day spreadsheet round-trip</a:t>
-            </a:r>
-          </a:p>
-        </p:txBody>
-      </p:sp>
-      <p:sp>
-        <p:nvSpPr>
-          <p:cNvPr id="20" name="Rectangle 19"/>
+              <a:t>Manual factor calc + manual propagation</a:t>
+            </a:r>
+          </a:p>
+        </p:txBody>
+      </p:sp>
+      <p:sp>
+        <p:nvSpPr>
+          <p:cNvPr id="26" name="Rectangle 25"/>
           <p:cNvSpPr/>
           <p:nvPr/>
         </p:nvSpPr>
         <p:spPr>
           <a:xfrm>
-            <a:off x="7944916" y="2194560"/>
+            <a:off x="7944916" y="2796540"/>
             <a:ext cx="3698139" cy="601980"/>
+          </a:xfrm>
+          <a:prstGeom prst="rect">
+            <a:avLst/>
+          </a:prstGeom>
+          <a:solidFill>
+            <a:srgbClr val="EFF6E2"/>
+          </a:solidFill>
+          <a:ln>
+            <a:noFill/>
+          </a:ln>
+          <a:effectLst/>
+        </p:spPr>
+        <p:style>
+          <a:lnRef idx="1">
+            <a:schemeClr val="accent1"/>
+          </a:lnRef>
+          <a:fillRef idx="3">
+            <a:schemeClr val="accent1"/>
+          </a:fillRef>
+          <a:effectRef idx="2">
+            <a:schemeClr val="accent1"/>
+          </a:effectRef>
+          <a:fontRef idx="minor">
+            <a:schemeClr val="lt1"/>
+          </a:fontRef>
+        </p:style>
+        <p:txBody>
+          <a:bodyPr rtlCol="0" anchor="ctr"/>
+          <a:lstStyle/>
+          <a:p>
+            <a:pPr algn="ctr"/>
+            <a:endParaRPr/>
+          </a:p>
+        </p:txBody>
+      </p:sp>
+      <p:sp>
+        <p:nvSpPr>
+          <p:cNvPr id="27" name="TextBox 26"/>
+          <p:cNvSpPr txBox="1"/>
+          <p:nvPr/>
+        </p:nvSpPr>
+        <p:spPr>
+          <a:xfrm>
+            <a:off x="8109508" y="2796540"/>
+            <a:ext cx="3368955" cy="601980"/>
+          </a:xfrm>
+          <a:prstGeom prst="rect">
+            <a:avLst/>
+          </a:prstGeom>
+          <a:noFill/>
+        </p:spPr>
+        <p:txBody>
+          <a:bodyPr wrap="square" lIns="0" tIns="0" rIns="0" bIns="0" anchor="ctr">
+            <a:spAutoFit/>
+          </a:bodyPr>
+          <a:lstStyle/>
+          <a:p>
+            <a:pPr algn="l"/>
+            <a:r>
+              <a:rPr sz="1200" b="0" i="0">
+                <a:solidFill>
+                  <a:srgbClr val="1F2937"/>
+                </a:solidFill>
+                <a:latin typeface="Calibri"/>
+              </a:rPr>
+              <a:t>One dialog; CDA / Production update automatically</a:t>
+            </a:r>
+          </a:p>
+        </p:txBody>
+      </p:sp>
+      <p:sp>
+        <p:nvSpPr>
+          <p:cNvPr id="28" name="Rectangle 27"/>
+          <p:cNvSpPr/>
+          <p:nvPr/>
+        </p:nvSpPr>
+        <p:spPr>
+          <a:xfrm>
+            <a:off x="548640" y="3398520"/>
+            <a:ext cx="3698138" cy="601980"/>
           </a:xfrm>
           <a:prstGeom prst="rect">
             <a:avLst/>
@@ -18054,13 +18284,173 @@
       </p:sp>
       <p:sp>
         <p:nvSpPr>
-          <p:cNvPr id="21" name="TextBox 20"/>
-          <p:cNvSpPr txBox="1"/>
-          <p:nvPr/>
-        </p:nvSpPr>
-        <p:spPr>
-          <a:xfrm>
-            <a:off x="8109508" y="2194560"/>
+          <p:cNvPr id="29" name="TextBox 28"/>
+          <p:cNvSpPr txBox="1"/>
+          <p:nvPr/>
+        </p:nvSpPr>
+        <p:spPr>
+          <a:xfrm>
+            <a:off x="713232" y="3398520"/>
+            <a:ext cx="3368954" cy="601980"/>
+          </a:xfrm>
+          <a:prstGeom prst="rect">
+            <a:avLst/>
+          </a:prstGeom>
+          <a:noFill/>
+        </p:spPr>
+        <p:txBody>
+          <a:bodyPr wrap="square" lIns="0" tIns="0" rIns="0" bIns="0" anchor="ctr">
+            <a:spAutoFit/>
+          </a:bodyPr>
+          <a:lstStyle/>
+          <a:p>
+            <a:pPr algn="l"/>
+            <a:r>
+              <a:rPr sz="1200" b="1" i="0">
+                <a:solidFill>
+                  <a:srgbClr val="1F2937"/>
+                </a:solidFill>
+                <a:latin typeface="Calibri"/>
+              </a:rPr>
+              <a:t>Public Sales (Accumap)</a:t>
+            </a:r>
+          </a:p>
+        </p:txBody>
+      </p:sp>
+      <p:sp>
+        <p:nvSpPr>
+          <p:cNvPr id="30" name="Rectangle 29"/>
+          <p:cNvSpPr/>
+          <p:nvPr/>
+        </p:nvSpPr>
+        <p:spPr>
+          <a:xfrm>
+            <a:off x="4246778" y="3398520"/>
+            <a:ext cx="3698138" cy="601980"/>
+          </a:xfrm>
+          <a:prstGeom prst="rect">
+            <a:avLst/>
+          </a:prstGeom>
+          <a:solidFill>
+            <a:srgbClr val="FFFFFF"/>
+          </a:solidFill>
+          <a:ln>
+            <a:noFill/>
+          </a:ln>
+          <a:effectLst/>
+        </p:spPr>
+        <p:style>
+          <a:lnRef idx="1">
+            <a:schemeClr val="accent1"/>
+          </a:lnRef>
+          <a:fillRef idx="3">
+            <a:schemeClr val="accent1"/>
+          </a:fillRef>
+          <a:effectRef idx="2">
+            <a:schemeClr val="accent1"/>
+          </a:effectRef>
+          <a:fontRef idx="minor">
+            <a:schemeClr val="lt1"/>
+          </a:fontRef>
+        </p:style>
+        <p:txBody>
+          <a:bodyPr rtlCol="0" anchor="ctr"/>
+          <a:lstStyle/>
+          <a:p>
+            <a:pPr algn="ctr"/>
+            <a:endParaRPr/>
+          </a:p>
+        </p:txBody>
+      </p:sp>
+      <p:sp>
+        <p:nvSpPr>
+          <p:cNvPr id="31" name="TextBox 30"/>
+          <p:cNvSpPr txBox="1"/>
+          <p:nvPr/>
+        </p:nvSpPr>
+        <p:spPr>
+          <a:xfrm>
+            <a:off x="4411370" y="3398520"/>
+            <a:ext cx="3368954" cy="601980"/>
+          </a:xfrm>
+          <a:prstGeom prst="rect">
+            <a:avLst/>
+          </a:prstGeom>
+          <a:noFill/>
+        </p:spPr>
+        <p:txBody>
+          <a:bodyPr wrap="square" lIns="0" tIns="0" rIns="0" bIns="0" anchor="ctr">
+            <a:spAutoFit/>
+          </a:bodyPr>
+          <a:lstStyle/>
+          <a:p>
+            <a:pPr algn="l"/>
+            <a:r>
+              <a:rPr sz="1200" b="0" i="0">
+                <a:solidFill>
+                  <a:srgbClr val="1F2937"/>
+                </a:solidFill>
+                <a:latin typeface="Calibri"/>
+              </a:rPr>
+              <a:t>Manual UWI matching; risk of erasing PA</a:t>
+            </a:r>
+          </a:p>
+        </p:txBody>
+      </p:sp>
+      <p:sp>
+        <p:nvSpPr>
+          <p:cNvPr id="32" name="Rectangle 31"/>
+          <p:cNvSpPr/>
+          <p:nvPr/>
+        </p:nvSpPr>
+        <p:spPr>
+          <a:xfrm>
+            <a:off x="7944916" y="3398520"/>
+            <a:ext cx="3698139" cy="601980"/>
+          </a:xfrm>
+          <a:prstGeom prst="rect">
+            <a:avLst/>
+          </a:prstGeom>
+          <a:solidFill>
+            <a:srgbClr val="FFFFFF"/>
+          </a:solidFill>
+          <a:ln>
+            <a:noFill/>
+          </a:ln>
+          <a:effectLst/>
+        </p:spPr>
+        <p:style>
+          <a:lnRef idx="1">
+            <a:schemeClr val="accent1"/>
+          </a:lnRef>
+          <a:fillRef idx="3">
+            <a:schemeClr val="accent1"/>
+          </a:fillRef>
+          <a:effectRef idx="2">
+            <a:schemeClr val="accent1"/>
+          </a:effectRef>
+          <a:fontRef idx="minor">
+            <a:schemeClr val="lt1"/>
+          </a:fontRef>
+        </p:style>
+        <p:txBody>
+          <a:bodyPr rtlCol="0" anchor="ctr"/>
+          <a:lstStyle/>
+          <a:p>
+            <a:pPr algn="ctr"/>
+            <a:endParaRPr/>
+          </a:p>
+        </p:txBody>
+      </p:sp>
+      <p:sp>
+        <p:nvSpPr>
+          <p:cNvPr id="33" name="TextBox 32"/>
+          <p:cNvSpPr txBox="1"/>
+          <p:nvPr/>
+        </p:nvSpPr>
+        <p:spPr>
+          <a:xfrm>
+            <a:off x="8109508" y="3398520"/>
             <a:ext cx="3368955" cy="601980"/>
           </a:xfrm>
           <a:prstGeom prst="rect">
@@ -18082,20 +18472,20 @@
                 </a:solidFill>
                 <a:latin typeface="Calibri"/>
               </a:rPr>
-              <a:t>One dialog, hands-off, logged summary</a:t>
-            </a:r>
-          </a:p>
-        </p:txBody>
-      </p:sp>
-      <p:sp>
-        <p:nvSpPr>
-          <p:cNvPr id="22" name="Rectangle 21"/>
+              <a:t>One dialog; unmatched UWIs reported; PA preserved</a:t>
+            </a:r>
+          </a:p>
+        </p:txBody>
+      </p:sp>
+      <p:sp>
+        <p:nvSpPr>
+          <p:cNvPr id="34" name="Rectangle 33"/>
           <p:cNvSpPr/>
           <p:nvPr/>
         </p:nvSpPr>
         <p:spPr>
           <a:xfrm>
-            <a:off x="548640" y="2796540"/>
+            <a:off x="548640" y="4000500"/>
             <a:ext cx="3698138" cy="601980"/>
           </a:xfrm>
           <a:prstGeom prst="rect">
@@ -18134,13 +18524,13 @@
       </p:sp>
       <p:sp>
         <p:nvSpPr>
-          <p:cNvPr id="23" name="TextBox 22"/>
-          <p:cNvSpPr txBox="1"/>
-          <p:nvPr/>
-        </p:nvSpPr>
-        <p:spPr>
-          <a:xfrm>
-            <a:off x="713232" y="2796540"/>
+          <p:cNvPr id="35" name="TextBox 34"/>
+          <p:cNvSpPr txBox="1"/>
+          <p:nvPr/>
+        </p:nvSpPr>
+        <p:spPr>
+          <a:xfrm>
+            <a:off x="713232" y="4000500"/>
             <a:ext cx="3368954" cy="601980"/>
           </a:xfrm>
           <a:prstGeom prst="rect">
@@ -18162,20 +18552,20 @@
                 </a:solidFill>
                 <a:latin typeface="Calibri"/>
               </a:rPr>
-              <a:t>Monthly PA (ValNav)</a:t>
-            </a:r>
-          </a:p>
-        </p:txBody>
-      </p:sp>
-      <p:sp>
-        <p:nvSpPr>
-          <p:cNvPr id="24" name="Rectangle 23"/>
+              <a:t>New well onboarding</a:t>
+            </a:r>
+          </a:p>
+        </p:txBody>
+      </p:sp>
+      <p:sp>
+        <p:nvSpPr>
+          <p:cNvPr id="36" name="Rectangle 35"/>
           <p:cNvSpPr/>
           <p:nvPr/>
         </p:nvSpPr>
         <p:spPr>
           <a:xfrm>
-            <a:off x="4246778" y="2796540"/>
+            <a:off x="4246778" y="4000500"/>
             <a:ext cx="3698138" cy="601980"/>
           </a:xfrm>
           <a:prstGeom prst="rect">
@@ -18214,13 +18604,13 @@
       </p:sp>
       <p:sp>
         <p:nvSpPr>
-          <p:cNvPr id="25" name="TextBox 24"/>
-          <p:cNvSpPr txBox="1"/>
-          <p:nvPr/>
-        </p:nvSpPr>
-        <p:spPr>
-          <a:xfrm>
-            <a:off x="4411370" y="2796540"/>
+          <p:cNvPr id="37" name="TextBox 36"/>
+          <p:cNvSpPr txBox="1"/>
+          <p:nvPr/>
+        </p:nvSpPr>
+        <p:spPr>
+          <a:xfrm>
+            <a:off x="4411370" y="4000500"/>
             <a:ext cx="3368954" cy="601980"/>
           </a:xfrm>
           <a:prstGeom prst="rect">
@@ -18242,20 +18632,20 @@
                 </a:solidFill>
                 <a:latin typeface="Calibri"/>
               </a:rPr>
-              <a:t>Manual factor calc + manual propagation</a:t>
-            </a:r>
-          </a:p>
-        </p:txBody>
-      </p:sp>
-      <p:sp>
-        <p:nvSpPr>
-          <p:cNvPr id="26" name="Rectangle 25"/>
+              <a:t>Update multiple workbooks</a:t>
+            </a:r>
+          </a:p>
+        </p:txBody>
+      </p:sp>
+      <p:sp>
+        <p:nvSpPr>
+          <p:cNvPr id="38" name="Rectangle 37"/>
           <p:cNvSpPr/>
           <p:nvPr/>
         </p:nvSpPr>
         <p:spPr>
           <a:xfrm>
-            <a:off x="7944916" y="2796540"/>
+            <a:off x="7944916" y="4000500"/>
             <a:ext cx="3698139" cy="601980"/>
           </a:xfrm>
           <a:prstGeom prst="rect">
@@ -18294,13 +18684,13 @@
       </p:sp>
       <p:sp>
         <p:nvSpPr>
-          <p:cNvPr id="27" name="TextBox 26"/>
-          <p:cNvSpPr txBox="1"/>
-          <p:nvPr/>
-        </p:nvSpPr>
-        <p:spPr>
-          <a:xfrm>
-            <a:off x="8109508" y="2796540"/>
+          <p:cNvPr id="39" name="TextBox 38"/>
+          <p:cNvSpPr txBox="1"/>
+          <p:nvPr/>
+        </p:nvSpPr>
+        <p:spPr>
+          <a:xfrm>
+            <a:off x="8109508" y="4000500"/>
             <a:ext cx="3368955" cy="601980"/>
           </a:xfrm>
           <a:prstGeom prst="rect">
@@ -18322,20 +18712,20 @@
                 </a:solidFill>
                 <a:latin typeface="Calibri"/>
               </a:rPr>
-              <a:t>One dialog; CDA / Production update automatically</a:t>
-            </a:r>
-          </a:p>
-        </p:txBody>
-      </p:sp>
-      <p:sp>
-        <p:nvSpPr>
-          <p:cNvPr id="28" name="Rectangle 27"/>
+              <a:t>Add in Well Master, run Prodview when ready</a:t>
+            </a:r>
+          </a:p>
+        </p:txBody>
+      </p:sp>
+      <p:sp>
+        <p:nvSpPr>
+          <p:cNvPr id="40" name="Rectangle 39"/>
           <p:cNvSpPr/>
           <p:nvPr/>
         </p:nvSpPr>
         <p:spPr>
           <a:xfrm>
-            <a:off x="548640" y="3398520"/>
+            <a:off x="548640" y="4602480"/>
             <a:ext cx="3698138" cy="601980"/>
           </a:xfrm>
           <a:prstGeom prst="rect">
@@ -18374,13 +18764,13 @@
       </p:sp>
       <p:sp>
         <p:nvSpPr>
-          <p:cNvPr id="29" name="TextBox 28"/>
-          <p:cNvSpPr txBox="1"/>
-          <p:nvPr/>
-        </p:nvSpPr>
-        <p:spPr>
-          <a:xfrm>
-            <a:off x="713232" y="3398520"/>
+          <p:cNvPr id="41" name="TextBox 40"/>
+          <p:cNvSpPr txBox="1"/>
+          <p:nvPr/>
+        </p:nvSpPr>
+        <p:spPr>
+          <a:xfrm>
+            <a:off x="713232" y="4602480"/>
             <a:ext cx="3368954" cy="601980"/>
           </a:xfrm>
           <a:prstGeom prst="rect">
@@ -18402,20 +18792,20 @@
                 </a:solidFill>
                 <a:latin typeface="Calibri"/>
               </a:rPr>
-              <a:t>Public Sales (Accumap)</a:t>
-            </a:r>
-          </a:p>
-        </p:txBody>
-      </p:sp>
-      <p:sp>
-        <p:nvSpPr>
-          <p:cNvPr id="30" name="Rectangle 29"/>
+              <a:t>Survey / Type Curve imports</a:t>
+            </a:r>
+          </a:p>
+        </p:txBody>
+      </p:sp>
+      <p:sp>
+        <p:nvSpPr>
+          <p:cNvPr id="42" name="Rectangle 41"/>
           <p:cNvSpPr/>
           <p:nvPr/>
         </p:nvSpPr>
         <p:spPr>
           <a:xfrm>
-            <a:off x="4246778" y="3398520"/>
+            <a:off x="4246778" y="4602480"/>
             <a:ext cx="3698138" cy="601980"/>
           </a:xfrm>
           <a:prstGeom prst="rect">
@@ -18454,13 +18844,13 @@
       </p:sp>
       <p:sp>
         <p:nvSpPr>
-          <p:cNvPr id="31" name="TextBox 30"/>
-          <p:cNvSpPr txBox="1"/>
-          <p:nvPr/>
-        </p:nvSpPr>
-        <p:spPr>
-          <a:xfrm>
-            <a:off x="4411370" y="3398520"/>
+          <p:cNvPr id="43" name="TextBox 42"/>
+          <p:cNvSpPr txBox="1"/>
+          <p:nvPr/>
+        </p:nvSpPr>
+        <p:spPr>
+          <a:xfrm>
+            <a:off x="4411370" y="4602480"/>
             <a:ext cx="3368954" cy="601980"/>
           </a:xfrm>
           <a:prstGeom prst="rect">
@@ -18482,20 +18872,20 @@
                 </a:solidFill>
                 <a:latin typeface="Calibri"/>
               </a:rPr>
-              <a:t>Manual UWI matching; risk of erasing PA</a:t>
-            </a:r>
-          </a:p>
-        </p:txBody>
-      </p:sp>
-      <p:sp>
-        <p:nvSpPr>
-          <p:cNvPr id="32" name="Rectangle 31"/>
+              <a:t>Manual mapping and pasting</a:t>
+            </a:r>
+          </a:p>
+        </p:txBody>
+      </p:sp>
+      <p:sp>
+        <p:nvSpPr>
+          <p:cNvPr id="44" name="Rectangle 43"/>
           <p:cNvSpPr/>
           <p:nvPr/>
         </p:nvSpPr>
         <p:spPr>
           <a:xfrm>
-            <a:off x="7944916" y="3398520"/>
+            <a:off x="7944916" y="4602480"/>
             <a:ext cx="3698139" cy="601980"/>
           </a:xfrm>
           <a:prstGeom prst="rect">
@@ -18534,13 +18924,13 @@
       </p:sp>
       <p:sp>
         <p:nvSpPr>
-          <p:cNvPr id="33" name="TextBox 32"/>
-          <p:cNvSpPr txBox="1"/>
-          <p:nvPr/>
-        </p:nvSpPr>
-        <p:spPr>
-          <a:xfrm>
-            <a:off x="8109508" y="3398520"/>
+          <p:cNvPr id="45" name="TextBox 44"/>
+          <p:cNvSpPr txBox="1"/>
+          <p:nvPr/>
+        </p:nvSpPr>
+        <p:spPr>
+          <a:xfrm>
+            <a:off x="8109508" y="4602480"/>
             <a:ext cx="3368955" cy="601980"/>
           </a:xfrm>
           <a:prstGeom prst="rect">
@@ -18562,20 +18952,20 @@
                 </a:solidFill>
                 <a:latin typeface="Calibri"/>
               </a:rPr>
-              <a:t>One dialog; unmatched UWIs reported; PA preserved</a:t>
-            </a:r>
-          </a:p>
-        </p:txBody>
-      </p:sp>
-      <p:sp>
-        <p:nvSpPr>
-          <p:cNvPr id="34" name="Rectangle 33"/>
+              <a:t>Bulk + mapped imports with audit reports</a:t>
+            </a:r>
+          </a:p>
+        </p:txBody>
+      </p:sp>
+      <p:sp>
+        <p:nvSpPr>
+          <p:cNvPr id="46" name="Rectangle 45"/>
           <p:cNvSpPr/>
           <p:nvPr/>
         </p:nvSpPr>
         <p:spPr>
           <a:xfrm>
-            <a:off x="548640" y="4000500"/>
+            <a:off x="548640" y="5204460"/>
             <a:ext cx="3698138" cy="601980"/>
           </a:xfrm>
           <a:prstGeom prst="rect">
@@ -18614,13 +19004,13 @@
       </p:sp>
       <p:sp>
         <p:nvSpPr>
-          <p:cNvPr id="35" name="TextBox 34"/>
-          <p:cNvSpPr txBox="1"/>
-          <p:nvPr/>
-        </p:nvSpPr>
-        <p:spPr>
-          <a:xfrm>
-            <a:off x="713232" y="4000500"/>
+          <p:cNvPr id="47" name="TextBox 46"/>
+          <p:cNvSpPr txBox="1"/>
+          <p:nvPr/>
+        </p:nvSpPr>
+        <p:spPr>
+          <a:xfrm>
+            <a:off x="713232" y="5204460"/>
             <a:ext cx="3368954" cy="601980"/>
           </a:xfrm>
           <a:prstGeom prst="rect">
@@ -18642,20 +19032,20 @@
                 </a:solidFill>
                 <a:latin typeface="Calibri"/>
               </a:rPr>
-              <a:t>New well onboarding</a:t>
-            </a:r>
-          </a:p>
-        </p:txBody>
-      </p:sp>
-      <p:sp>
-        <p:nvSpPr>
-          <p:cNvPr id="36" name="Rectangle 35"/>
+              <a:t>Re-running a month</a:t>
+            </a:r>
+          </a:p>
+        </p:txBody>
+      </p:sp>
+      <p:sp>
+        <p:nvSpPr>
+          <p:cNvPr id="48" name="Rectangle 47"/>
           <p:cNvSpPr/>
           <p:nvPr/>
         </p:nvSpPr>
         <p:spPr>
           <a:xfrm>
-            <a:off x="4246778" y="4000500"/>
+            <a:off x="4246778" y="5204460"/>
             <a:ext cx="3698138" cy="601980"/>
           </a:xfrm>
           <a:prstGeom prst="rect">
@@ -18694,13 +19084,13 @@
       </p:sp>
       <p:sp>
         <p:nvSpPr>
-          <p:cNvPr id="37" name="TextBox 36"/>
-          <p:cNvSpPr txBox="1"/>
-          <p:nvPr/>
-        </p:nvSpPr>
-        <p:spPr>
-          <a:xfrm>
-            <a:off x="4411370" y="4000500"/>
+          <p:cNvPr id="49" name="TextBox 48"/>
+          <p:cNvSpPr txBox="1"/>
+          <p:nvPr/>
+        </p:nvSpPr>
+        <p:spPr>
+          <a:xfrm>
+            <a:off x="4411370" y="5204460"/>
             <a:ext cx="3368954" cy="601980"/>
           </a:xfrm>
           <a:prstGeom prst="rect">
@@ -18722,20 +19112,20 @@
                 </a:solidFill>
                 <a:latin typeface="Calibri"/>
               </a:rPr>
-              <a:t>Update multiple workbooks</a:t>
-            </a:r>
-          </a:p>
-        </p:txBody>
-      </p:sp>
-      <p:sp>
-        <p:nvSpPr>
-          <p:cNvPr id="38" name="Rectangle 37"/>
+              <a:t>Risky; could overwrite</a:t>
+            </a:r>
+          </a:p>
+        </p:txBody>
+      </p:sp>
+      <p:sp>
+        <p:nvSpPr>
+          <p:cNvPr id="50" name="Rectangle 49"/>
           <p:cNvSpPr/>
           <p:nvPr/>
         </p:nvSpPr>
         <p:spPr>
           <a:xfrm>
-            <a:off x="7944916" y="4000500"/>
+            <a:off x="7944916" y="5204460"/>
             <a:ext cx="3698139" cy="601980"/>
           </a:xfrm>
           <a:prstGeom prst="rect">
@@ -18774,486 +19164,6 @@
       </p:sp>
       <p:sp>
         <p:nvSpPr>
-          <p:cNvPr id="39" name="TextBox 38"/>
-          <p:cNvSpPr txBox="1"/>
-          <p:nvPr/>
-        </p:nvSpPr>
-        <p:spPr>
-          <a:xfrm>
-            <a:off x="8109508" y="4000500"/>
-            <a:ext cx="3368955" cy="601980"/>
-          </a:xfrm>
-          <a:prstGeom prst="rect">
-            <a:avLst/>
-          </a:prstGeom>
-          <a:noFill/>
-        </p:spPr>
-        <p:txBody>
-          <a:bodyPr wrap="square" lIns="0" tIns="0" rIns="0" bIns="0" anchor="ctr">
-            <a:spAutoFit/>
-          </a:bodyPr>
-          <a:lstStyle/>
-          <a:p>
-            <a:pPr algn="l"/>
-            <a:r>
-              <a:rPr sz="1200" b="0" i="0">
-                <a:solidFill>
-                  <a:srgbClr val="1F2937"/>
-                </a:solidFill>
-                <a:latin typeface="Calibri"/>
-              </a:rPr>
-              <a:t>Add in Well Master, run Prodview when ready</a:t>
-            </a:r>
-          </a:p>
-        </p:txBody>
-      </p:sp>
-      <p:sp>
-        <p:nvSpPr>
-          <p:cNvPr id="40" name="Rectangle 39"/>
-          <p:cNvSpPr/>
-          <p:nvPr/>
-        </p:nvSpPr>
-        <p:spPr>
-          <a:xfrm>
-            <a:off x="548640" y="4602480"/>
-            <a:ext cx="3698138" cy="601980"/>
-          </a:xfrm>
-          <a:prstGeom prst="rect">
-            <a:avLst/>
-          </a:prstGeom>
-          <a:solidFill>
-            <a:srgbClr val="FFFFFF"/>
-          </a:solidFill>
-          <a:ln>
-            <a:noFill/>
-          </a:ln>
-          <a:effectLst/>
-        </p:spPr>
-        <p:style>
-          <a:lnRef idx="1">
-            <a:schemeClr val="accent1"/>
-          </a:lnRef>
-          <a:fillRef idx="3">
-            <a:schemeClr val="accent1"/>
-          </a:fillRef>
-          <a:effectRef idx="2">
-            <a:schemeClr val="accent1"/>
-          </a:effectRef>
-          <a:fontRef idx="minor">
-            <a:schemeClr val="lt1"/>
-          </a:fontRef>
-        </p:style>
-        <p:txBody>
-          <a:bodyPr rtlCol="0" anchor="ctr"/>
-          <a:lstStyle/>
-          <a:p>
-            <a:pPr algn="ctr"/>
-            <a:endParaRPr/>
-          </a:p>
-        </p:txBody>
-      </p:sp>
-      <p:sp>
-        <p:nvSpPr>
-          <p:cNvPr id="41" name="TextBox 40"/>
-          <p:cNvSpPr txBox="1"/>
-          <p:nvPr/>
-        </p:nvSpPr>
-        <p:spPr>
-          <a:xfrm>
-            <a:off x="713232" y="4602480"/>
-            <a:ext cx="3368954" cy="601980"/>
-          </a:xfrm>
-          <a:prstGeom prst="rect">
-            <a:avLst/>
-          </a:prstGeom>
-          <a:noFill/>
-        </p:spPr>
-        <p:txBody>
-          <a:bodyPr wrap="square" lIns="0" tIns="0" rIns="0" bIns="0" anchor="ctr">
-            <a:spAutoFit/>
-          </a:bodyPr>
-          <a:lstStyle/>
-          <a:p>
-            <a:pPr algn="l"/>
-            <a:r>
-              <a:rPr sz="1200" b="1" i="0">
-                <a:solidFill>
-                  <a:srgbClr val="1F2937"/>
-                </a:solidFill>
-                <a:latin typeface="Calibri"/>
-              </a:rPr>
-              <a:t>Survey / Type Curve imports</a:t>
-            </a:r>
-          </a:p>
-        </p:txBody>
-      </p:sp>
-      <p:sp>
-        <p:nvSpPr>
-          <p:cNvPr id="42" name="Rectangle 41"/>
-          <p:cNvSpPr/>
-          <p:nvPr/>
-        </p:nvSpPr>
-        <p:spPr>
-          <a:xfrm>
-            <a:off x="4246778" y="4602480"/>
-            <a:ext cx="3698138" cy="601980"/>
-          </a:xfrm>
-          <a:prstGeom prst="rect">
-            <a:avLst/>
-          </a:prstGeom>
-          <a:solidFill>
-            <a:srgbClr val="FFFFFF"/>
-          </a:solidFill>
-          <a:ln>
-            <a:noFill/>
-          </a:ln>
-          <a:effectLst/>
-        </p:spPr>
-        <p:style>
-          <a:lnRef idx="1">
-            <a:schemeClr val="accent1"/>
-          </a:lnRef>
-          <a:fillRef idx="3">
-            <a:schemeClr val="accent1"/>
-          </a:fillRef>
-          <a:effectRef idx="2">
-            <a:schemeClr val="accent1"/>
-          </a:effectRef>
-          <a:fontRef idx="minor">
-            <a:schemeClr val="lt1"/>
-          </a:fontRef>
-        </p:style>
-        <p:txBody>
-          <a:bodyPr rtlCol="0" anchor="ctr"/>
-          <a:lstStyle/>
-          <a:p>
-            <a:pPr algn="ctr"/>
-            <a:endParaRPr/>
-          </a:p>
-        </p:txBody>
-      </p:sp>
-      <p:sp>
-        <p:nvSpPr>
-          <p:cNvPr id="43" name="TextBox 42"/>
-          <p:cNvSpPr txBox="1"/>
-          <p:nvPr/>
-        </p:nvSpPr>
-        <p:spPr>
-          <a:xfrm>
-            <a:off x="4411370" y="4602480"/>
-            <a:ext cx="3368954" cy="601980"/>
-          </a:xfrm>
-          <a:prstGeom prst="rect">
-            <a:avLst/>
-          </a:prstGeom>
-          <a:noFill/>
-        </p:spPr>
-        <p:txBody>
-          <a:bodyPr wrap="square" lIns="0" tIns="0" rIns="0" bIns="0" anchor="ctr">
-            <a:spAutoFit/>
-          </a:bodyPr>
-          <a:lstStyle/>
-          <a:p>
-            <a:pPr algn="l"/>
-            <a:r>
-              <a:rPr sz="1200" b="0" i="0">
-                <a:solidFill>
-                  <a:srgbClr val="1F2937"/>
-                </a:solidFill>
-                <a:latin typeface="Calibri"/>
-              </a:rPr>
-              <a:t>Manual mapping and pasting</a:t>
-            </a:r>
-          </a:p>
-        </p:txBody>
-      </p:sp>
-      <p:sp>
-        <p:nvSpPr>
-          <p:cNvPr id="44" name="Rectangle 43"/>
-          <p:cNvSpPr/>
-          <p:nvPr/>
-        </p:nvSpPr>
-        <p:spPr>
-          <a:xfrm>
-            <a:off x="7944916" y="4602480"/>
-            <a:ext cx="3698139" cy="601980"/>
-          </a:xfrm>
-          <a:prstGeom prst="rect">
-            <a:avLst/>
-          </a:prstGeom>
-          <a:solidFill>
-            <a:srgbClr val="FFFFFF"/>
-          </a:solidFill>
-          <a:ln>
-            <a:noFill/>
-          </a:ln>
-          <a:effectLst/>
-        </p:spPr>
-        <p:style>
-          <a:lnRef idx="1">
-            <a:schemeClr val="accent1"/>
-          </a:lnRef>
-          <a:fillRef idx="3">
-            <a:schemeClr val="accent1"/>
-          </a:fillRef>
-          <a:effectRef idx="2">
-            <a:schemeClr val="accent1"/>
-          </a:effectRef>
-          <a:fontRef idx="minor">
-            <a:schemeClr val="lt1"/>
-          </a:fontRef>
-        </p:style>
-        <p:txBody>
-          <a:bodyPr rtlCol="0" anchor="ctr"/>
-          <a:lstStyle/>
-          <a:p>
-            <a:pPr algn="ctr"/>
-            <a:endParaRPr/>
-          </a:p>
-        </p:txBody>
-      </p:sp>
-      <p:sp>
-        <p:nvSpPr>
-          <p:cNvPr id="45" name="TextBox 44"/>
-          <p:cNvSpPr txBox="1"/>
-          <p:nvPr/>
-        </p:nvSpPr>
-        <p:spPr>
-          <a:xfrm>
-            <a:off x="8109508" y="4602480"/>
-            <a:ext cx="3368955" cy="601980"/>
-          </a:xfrm>
-          <a:prstGeom prst="rect">
-            <a:avLst/>
-          </a:prstGeom>
-          <a:noFill/>
-        </p:spPr>
-        <p:txBody>
-          <a:bodyPr wrap="square" lIns="0" tIns="0" rIns="0" bIns="0" anchor="ctr">
-            <a:spAutoFit/>
-          </a:bodyPr>
-          <a:lstStyle/>
-          <a:p>
-            <a:pPr algn="l"/>
-            <a:r>
-              <a:rPr sz="1200" b="0" i="0">
-                <a:solidFill>
-                  <a:srgbClr val="1F2937"/>
-                </a:solidFill>
-                <a:latin typeface="Calibri"/>
-              </a:rPr>
-              <a:t>Bulk + mapped imports with audit reports</a:t>
-            </a:r>
-          </a:p>
-        </p:txBody>
-      </p:sp>
-      <p:sp>
-        <p:nvSpPr>
-          <p:cNvPr id="46" name="Rectangle 45"/>
-          <p:cNvSpPr/>
-          <p:nvPr/>
-        </p:nvSpPr>
-        <p:spPr>
-          <a:xfrm>
-            <a:off x="548640" y="5204460"/>
-            <a:ext cx="3698138" cy="601980"/>
-          </a:xfrm>
-          <a:prstGeom prst="rect">
-            <a:avLst/>
-          </a:prstGeom>
-          <a:solidFill>
-            <a:srgbClr val="EFF6E2"/>
-          </a:solidFill>
-          <a:ln>
-            <a:noFill/>
-          </a:ln>
-          <a:effectLst/>
-        </p:spPr>
-        <p:style>
-          <a:lnRef idx="1">
-            <a:schemeClr val="accent1"/>
-          </a:lnRef>
-          <a:fillRef idx="3">
-            <a:schemeClr val="accent1"/>
-          </a:fillRef>
-          <a:effectRef idx="2">
-            <a:schemeClr val="accent1"/>
-          </a:effectRef>
-          <a:fontRef idx="minor">
-            <a:schemeClr val="lt1"/>
-          </a:fontRef>
-        </p:style>
-        <p:txBody>
-          <a:bodyPr rtlCol="0" anchor="ctr"/>
-          <a:lstStyle/>
-          <a:p>
-            <a:pPr algn="ctr"/>
-            <a:endParaRPr/>
-          </a:p>
-        </p:txBody>
-      </p:sp>
-      <p:sp>
-        <p:nvSpPr>
-          <p:cNvPr id="47" name="TextBox 46"/>
-          <p:cNvSpPr txBox="1"/>
-          <p:nvPr/>
-        </p:nvSpPr>
-        <p:spPr>
-          <a:xfrm>
-            <a:off x="713232" y="5204460"/>
-            <a:ext cx="3368954" cy="601980"/>
-          </a:xfrm>
-          <a:prstGeom prst="rect">
-            <a:avLst/>
-          </a:prstGeom>
-          <a:noFill/>
-        </p:spPr>
-        <p:txBody>
-          <a:bodyPr wrap="square" lIns="0" tIns="0" rIns="0" bIns="0" anchor="ctr">
-            <a:spAutoFit/>
-          </a:bodyPr>
-          <a:lstStyle/>
-          <a:p>
-            <a:pPr algn="l"/>
-            <a:r>
-              <a:rPr sz="1200" b="1" i="0">
-                <a:solidFill>
-                  <a:srgbClr val="1F2937"/>
-                </a:solidFill>
-                <a:latin typeface="Calibri"/>
-              </a:rPr>
-              <a:t>Re-running a month</a:t>
-            </a:r>
-          </a:p>
-        </p:txBody>
-      </p:sp>
-      <p:sp>
-        <p:nvSpPr>
-          <p:cNvPr id="48" name="Rectangle 47"/>
-          <p:cNvSpPr/>
-          <p:nvPr/>
-        </p:nvSpPr>
-        <p:spPr>
-          <a:xfrm>
-            <a:off x="4246778" y="5204460"/>
-            <a:ext cx="3698138" cy="601980"/>
-          </a:xfrm>
-          <a:prstGeom prst="rect">
-            <a:avLst/>
-          </a:prstGeom>
-          <a:solidFill>
-            <a:srgbClr val="EFF6E2"/>
-          </a:solidFill>
-          <a:ln>
-            <a:noFill/>
-          </a:ln>
-          <a:effectLst/>
-        </p:spPr>
-        <p:style>
-          <a:lnRef idx="1">
-            <a:schemeClr val="accent1"/>
-          </a:lnRef>
-          <a:fillRef idx="3">
-            <a:schemeClr val="accent1"/>
-          </a:fillRef>
-          <a:effectRef idx="2">
-            <a:schemeClr val="accent1"/>
-          </a:effectRef>
-          <a:fontRef idx="minor">
-            <a:schemeClr val="lt1"/>
-          </a:fontRef>
-        </p:style>
-        <p:txBody>
-          <a:bodyPr rtlCol="0" anchor="ctr"/>
-          <a:lstStyle/>
-          <a:p>
-            <a:pPr algn="ctr"/>
-            <a:endParaRPr/>
-          </a:p>
-        </p:txBody>
-      </p:sp>
-      <p:sp>
-        <p:nvSpPr>
-          <p:cNvPr id="49" name="TextBox 48"/>
-          <p:cNvSpPr txBox="1"/>
-          <p:nvPr/>
-        </p:nvSpPr>
-        <p:spPr>
-          <a:xfrm>
-            <a:off x="4411370" y="5204460"/>
-            <a:ext cx="3368954" cy="601980"/>
-          </a:xfrm>
-          <a:prstGeom prst="rect">
-            <a:avLst/>
-          </a:prstGeom>
-          <a:noFill/>
-        </p:spPr>
-        <p:txBody>
-          <a:bodyPr wrap="square" lIns="0" tIns="0" rIns="0" bIns="0" anchor="ctr">
-            <a:spAutoFit/>
-          </a:bodyPr>
-          <a:lstStyle/>
-          <a:p>
-            <a:pPr algn="l"/>
-            <a:r>
-              <a:rPr sz="1200" b="0" i="0">
-                <a:solidFill>
-                  <a:srgbClr val="1F2937"/>
-                </a:solidFill>
-                <a:latin typeface="Calibri"/>
-              </a:rPr>
-              <a:t>Risky; could overwrite</a:t>
-            </a:r>
-          </a:p>
-        </p:txBody>
-      </p:sp>
-      <p:sp>
-        <p:nvSpPr>
-          <p:cNvPr id="50" name="Rectangle 49"/>
-          <p:cNvSpPr/>
-          <p:nvPr/>
-        </p:nvSpPr>
-        <p:spPr>
-          <a:xfrm>
-            <a:off x="7944916" y="5204460"/>
-            <a:ext cx="3698139" cy="601980"/>
-          </a:xfrm>
-          <a:prstGeom prst="rect">
-            <a:avLst/>
-          </a:prstGeom>
-          <a:solidFill>
-            <a:srgbClr val="EFF6E2"/>
-          </a:solidFill>
-          <a:ln>
-            <a:noFill/>
-          </a:ln>
-          <a:effectLst/>
-        </p:spPr>
-        <p:style>
-          <a:lnRef idx="1">
-            <a:schemeClr val="accent1"/>
-          </a:lnRef>
-          <a:fillRef idx="3">
-            <a:schemeClr val="accent1"/>
-          </a:fillRef>
-          <a:effectRef idx="2">
-            <a:schemeClr val="accent1"/>
-          </a:effectRef>
-          <a:fontRef idx="minor">
-            <a:schemeClr val="lt1"/>
-          </a:fontRef>
-        </p:style>
-        <p:txBody>
-          <a:bodyPr rtlCol="0" anchor="ctr"/>
-          <a:lstStyle/>
-          <a:p>
-            <a:pPr algn="ctr"/>
-            <a:endParaRPr/>
-          </a:p>
-        </p:txBody>
-      </p:sp>
-      <p:sp>
-        <p:nvSpPr>
           <p:cNvPr id="51" name="TextBox 50"/>
           <p:cNvSpPr txBox="1"/>
           <p:nvPr/>
@@ -19319,6 +19229,74 @@
               </a:rPr>
               <a:t>Engineers stop doing data plumbing — and spend time on interpretation.</a:t>
             </a:r>
+          </a:p>
+        </p:txBody>
+      </p:sp>
+      <p:sp>
+        <p:nvSpPr>
+          <p:cNvPr id="53" name="TextBox 52">
+            <a:extLst>
+              <a:ext uri="{FF2B5EF4-FFF2-40B4-BE49-F238E27FC236}">
+                <a16:creationId xmlns:a16="http://schemas.microsoft.com/office/drawing/2014/main" id="{9094D084-FBA2-AFCB-E8B5-DD4A656C0364}"/>
+              </a:ext>
+            </a:extLst>
+          </p:cNvPr>
+          <p:cNvSpPr txBox="1"/>
+          <p:nvPr/>
+        </p:nvSpPr>
+        <p:spPr>
+          <a:xfrm>
+            <a:off x="10600509" y="6605468"/>
+            <a:ext cx="4082448" cy="338554"/>
+          </a:xfrm>
+          <a:prstGeom prst="rect">
+            <a:avLst/>
+          </a:prstGeom>
+          <a:noFill/>
+        </p:spPr>
+        <p:txBody>
+          <a:bodyPr wrap="square" lIns="0" tIns="0" rIns="0" bIns="0" anchor="t">
+            <a:spAutoFit/>
+          </a:bodyPr>
+          <a:lstStyle/>
+          <a:p>
+            <a:r>
+              <a:rPr lang="en-CA" sz="1200" b="0" i="0" dirty="0" err="1">
+                <a:solidFill>
+                  <a:srgbClr val="6B7280"/>
+                </a:solidFill>
+                <a:latin typeface="Calibri"/>
+              </a:rPr>
+              <a:t>Adobel</a:t>
+            </a:r>
+            <a:r>
+              <a:rPr lang="en-CA" sz="1200" b="0" i="0" dirty="0">
+                <a:solidFill>
+                  <a:srgbClr val="6B7280"/>
+                </a:solidFill>
+                <a:latin typeface="Calibri"/>
+              </a:rPr>
+              <a:t> Services Inc </a:t>
+            </a:r>
+            <a:r>
+              <a:rPr lang="en-CA" sz="1200" dirty="0">
+                <a:solidFill>
+                  <a:schemeClr val="bg1">
+                    <a:lumMod val="50000"/>
+                  </a:schemeClr>
+                </a:solidFill>
+              </a:rPr>
+              <a:t>©</a:t>
+            </a:r>
+          </a:p>
+          <a:p>
+            <a:pPr algn="l"/>
+            <a:endParaRPr sz="1000" b="0" i="0" dirty="0">
+              <a:solidFill>
+                <a:srgbClr val="6B7280"/>
+              </a:solidFill>
+              <a:latin typeface="Calibri"/>
+            </a:endParaRPr>
           </a:p>
         </p:txBody>
       </p:sp>

--- a/docs/Production_Update_Presentation.pptx
+++ b/docs/Production_Update_Presentation.pptx
@@ -313,7 +313,7 @@
           <a:p>
             <a:fld id="{5BCAD085-E8A6-8845-BD4E-CB4CCA059FC4}" type="datetimeFigureOut">
               <a:rPr lang="en-US" smtClean="0"/>
-              <a:t>5/16/2026</a:t>
+              <a:t>5/25/2026</a:t>
             </a:fld>
             <a:endParaRPr lang="en-US"/>
           </a:p>
@@ -563,7 +563,7 @@
           <a:p>
             <a:fld id="{5BCAD085-E8A6-8845-BD4E-CB4CCA059FC4}" type="datetimeFigureOut">
               <a:rPr lang="en-US" smtClean="0"/>
-              <a:t>5/16/2026</a:t>
+              <a:t>5/25/2026</a:t>
             </a:fld>
             <a:endParaRPr lang="en-US"/>
           </a:p>
@@ -782,7 +782,7 @@
           <a:p>
             <a:fld id="{5BCAD085-E8A6-8845-BD4E-CB4CCA059FC4}" type="datetimeFigureOut">
               <a:rPr lang="en-US" smtClean="0"/>
-              <a:t>5/16/2026</a:t>
+              <a:t>5/25/2026</a:t>
             </a:fld>
             <a:endParaRPr lang="en-US"/>
           </a:p>
@@ -991,7 +991,7 @@
           <a:p>
             <a:fld id="{5BCAD085-E8A6-8845-BD4E-CB4CCA059FC4}" type="datetimeFigureOut">
               <a:rPr lang="en-US" smtClean="0"/>
-              <a:t>5/16/2026</a:t>
+              <a:t>5/25/2026</a:t>
             </a:fld>
             <a:endParaRPr lang="en-US"/>
           </a:p>
@@ -1277,7 +1277,7 @@
           <a:p>
             <a:fld id="{5BCAD085-E8A6-8845-BD4E-CB4CCA059FC4}" type="datetimeFigureOut">
               <a:rPr lang="en-US" smtClean="0"/>
-              <a:t>5/16/2026</a:t>
+              <a:t>5/25/2026</a:t>
             </a:fld>
             <a:endParaRPr lang="en-US"/>
           </a:p>
@@ -1603,7 +1603,7 @@
           <a:p>
             <a:fld id="{5BCAD085-E8A6-8845-BD4E-CB4CCA059FC4}" type="datetimeFigureOut">
               <a:rPr lang="en-US" smtClean="0"/>
-              <a:t>5/16/2026</a:t>
+              <a:t>5/25/2026</a:t>
             </a:fld>
             <a:endParaRPr lang="en-US"/>
           </a:p>
@@ -2063,7 +2063,7 @@
           <a:p>
             <a:fld id="{5BCAD085-E8A6-8845-BD4E-CB4CCA059FC4}" type="datetimeFigureOut">
               <a:rPr lang="en-US" smtClean="0"/>
-              <a:t>5/16/2026</a:t>
+              <a:t>5/25/2026</a:t>
             </a:fld>
             <a:endParaRPr lang="en-US"/>
           </a:p>
@@ -2221,7 +2221,7 @@
           <a:p>
             <a:fld id="{5BCAD085-E8A6-8845-BD4E-CB4CCA059FC4}" type="datetimeFigureOut">
               <a:rPr lang="en-US" smtClean="0"/>
-              <a:t>5/16/2026</a:t>
+              <a:t>5/25/2026</a:t>
             </a:fld>
             <a:endParaRPr lang="en-US"/>
           </a:p>
@@ -2357,7 +2357,7 @@
           <a:p>
             <a:fld id="{5BCAD085-E8A6-8845-BD4E-CB4CCA059FC4}" type="datetimeFigureOut">
               <a:rPr lang="en-US" smtClean="0"/>
-              <a:t>5/16/2026</a:t>
+              <a:t>5/25/2026</a:t>
             </a:fld>
             <a:endParaRPr lang="en-US"/>
           </a:p>
@@ -2673,7 +2673,7 @@
           <a:p>
             <a:fld id="{5BCAD085-E8A6-8845-BD4E-CB4CCA059FC4}" type="datetimeFigureOut">
               <a:rPr lang="en-US" smtClean="0"/>
-              <a:t>5/16/2026</a:t>
+              <a:t>5/25/2026</a:t>
             </a:fld>
             <a:endParaRPr lang="en-US"/>
           </a:p>
@@ -2966,7 +2966,7 @@
           <a:p>
             <a:fld id="{5BCAD085-E8A6-8845-BD4E-CB4CCA059FC4}" type="datetimeFigureOut">
               <a:rPr lang="en-US" smtClean="0"/>
-              <a:t>5/16/2026</a:t>
+              <a:t>5/25/2026</a:t>
             </a:fld>
             <a:endParaRPr lang="en-US"/>
           </a:p>
@@ -3218,7 +3218,7 @@
           <a:p>
             <a:fld id="{5BCAD085-E8A6-8845-BD4E-CB4CCA059FC4}" type="datetimeFigureOut">
               <a:rPr lang="en-US" smtClean="0"/>
-              <a:t>5/16/2026</a:t>
+              <a:t>5/25/2026</a:t>
             </a:fld>
             <a:endParaRPr lang="en-US"/>
           </a:p>
